--- a/assets/Semester_2/pre_milestone/Project Plan.pptx
+++ b/assets/Semester_2/pre_milestone/Project Plan.pptx
@@ -282,7 +282,7 @@
       </p15:sldGuideLst>
     </p:ext>
     <p:ext uri="GoogleSlidesCustomDataVersion2">
-      <go:slidesCustomData xmlns:go="http://customooxmlschemas.google.com/" r:id="rId24" roundtripDataSignature="AMtx7mjNy+0P5E/WsQS4mTzz0vAhRtJb3g=="/>
+      <go:slidesCustomData xmlns:go="http://customooxmlschemas.google.com/" r:id="rId24" roundtripDataSignature="AMtx7miuGQ183Ls/MnH8XArihxf2jOo+bA=="/>
     </p:ext>
   </p:extLst>
 </p:presentation>
@@ -971,7 +971,7 @@
   <p:cSld>
     <p:spTree>
       <p:nvGrpSpPr>
-        <p:cNvPr id="435" name="Shape 435"/>
+        <p:cNvPr id="437" name="Shape 437"/>
         <p:cNvGrpSpPr/>
         <p:nvPr/>
       </p:nvGrpSpPr>
@@ -985,7 +985,7 @@
       </p:grpSpPr>
       <p:sp>
         <p:nvSpPr>
-          <p:cNvPr id="436" name="Google Shape;436;g3ba4c4b9c29_0_129:notes"/>
+          <p:cNvPr id="438" name="Google Shape;438;g3ba4c4b9c29_0_129:notes"/>
           <p:cNvSpPr txBox="1"/>
           <p:nvPr>
             <p:ph idx="1" type="body"/>
@@ -1032,7 +1032,7 @@
       </p:sp>
       <p:sp>
         <p:nvSpPr>
-          <p:cNvPr id="437" name="Google Shape;437;g3ba4c4b9c29_0_129:notes"/>
+          <p:cNvPr id="439" name="Google Shape;439;g3ba4c4b9c29_0_129:notes"/>
           <p:cNvSpPr/>
           <p:nvPr>
             <p:ph idx="2" type="sldImg"/>
@@ -1088,7 +1088,7 @@
   <p:cSld>
     <p:spTree>
       <p:nvGrpSpPr>
-        <p:cNvPr id="453" name="Shape 453"/>
+        <p:cNvPr id="455" name="Shape 455"/>
         <p:cNvGrpSpPr/>
         <p:nvPr/>
       </p:nvGrpSpPr>
@@ -1102,7 +1102,7 @@
       </p:grpSpPr>
       <p:sp>
         <p:nvSpPr>
-          <p:cNvPr id="454" name="Google Shape;454;p7:notes"/>
+          <p:cNvPr id="456" name="Google Shape;456;p7:notes"/>
           <p:cNvSpPr txBox="1"/>
           <p:nvPr>
             <p:ph idx="1" type="body"/>
@@ -1149,7 +1149,7 @@
       </p:sp>
       <p:sp>
         <p:nvSpPr>
-          <p:cNvPr id="455" name="Google Shape;455;p7:notes"/>
+          <p:cNvPr id="457" name="Google Shape;457;p7:notes"/>
           <p:cNvSpPr/>
           <p:nvPr>
             <p:ph idx="2" type="sldImg"/>
@@ -1205,7 +1205,7 @@
   <p:cSld>
     <p:spTree>
       <p:nvGrpSpPr>
-        <p:cNvPr id="511" name="Shape 511"/>
+        <p:cNvPr id="513" name="Shape 513"/>
         <p:cNvGrpSpPr/>
         <p:nvPr/>
       </p:nvGrpSpPr>
@@ -1219,7 +1219,7 @@
       </p:grpSpPr>
       <p:sp>
         <p:nvSpPr>
-          <p:cNvPr id="512" name="Google Shape;512;p8:notes"/>
+          <p:cNvPr id="514" name="Google Shape;514;p8:notes"/>
           <p:cNvSpPr txBox="1"/>
           <p:nvPr>
             <p:ph idx="1" type="body"/>
@@ -1266,7 +1266,7 @@
       </p:sp>
       <p:sp>
         <p:nvSpPr>
-          <p:cNvPr id="513" name="Google Shape;513;p8:notes"/>
+          <p:cNvPr id="515" name="Google Shape;515;p8:notes"/>
           <p:cNvSpPr/>
           <p:nvPr>
             <p:ph idx="2" type="sldImg"/>
@@ -1322,7 +1322,7 @@
   <p:cSld>
     <p:spTree>
       <p:nvGrpSpPr>
-        <p:cNvPr id="529" name="Shape 529"/>
+        <p:cNvPr id="531" name="Shape 531"/>
         <p:cNvGrpSpPr/>
         <p:nvPr/>
       </p:nvGrpSpPr>
@@ -1336,7 +1336,7 @@
       </p:grpSpPr>
       <p:sp>
         <p:nvSpPr>
-          <p:cNvPr id="530" name="Google Shape;530;p9:notes"/>
+          <p:cNvPr id="532" name="Google Shape;532;p9:notes"/>
           <p:cNvSpPr txBox="1"/>
           <p:nvPr>
             <p:ph idx="1" type="body"/>
@@ -1383,7 +1383,7 @@
       </p:sp>
       <p:sp>
         <p:nvSpPr>
-          <p:cNvPr id="531" name="Google Shape;531;p9:notes"/>
+          <p:cNvPr id="533" name="Google Shape;533;p9:notes"/>
           <p:cNvSpPr/>
           <p:nvPr>
             <p:ph idx="2" type="sldImg"/>
@@ -1907,7 +1907,7 @@
   <p:cSld>
     <p:spTree>
       <p:nvGrpSpPr>
-        <p:cNvPr id="276" name="Shape 276"/>
+        <p:cNvPr id="277" name="Shape 277"/>
         <p:cNvGrpSpPr/>
         <p:nvPr/>
       </p:nvGrpSpPr>
@@ -1921,7 +1921,7 @@
       </p:grpSpPr>
       <p:sp>
         <p:nvSpPr>
-          <p:cNvPr id="277" name="Google Shape;277;g3ba4c4b9c29_0_0:notes"/>
+          <p:cNvPr id="278" name="Google Shape;278;g3ba4c4b9c29_0_0:notes"/>
           <p:cNvSpPr txBox="1"/>
           <p:nvPr>
             <p:ph idx="1" type="body"/>
@@ -1968,7 +1968,7 @@
       </p:sp>
       <p:sp>
         <p:nvSpPr>
-          <p:cNvPr id="278" name="Google Shape;278;g3ba4c4b9c29_0_0:notes"/>
+          <p:cNvPr id="279" name="Google Shape;279;g3ba4c4b9c29_0_0:notes"/>
           <p:cNvSpPr/>
           <p:nvPr>
             <p:ph idx="2" type="sldImg"/>
@@ -2024,7 +2024,7 @@
   <p:cSld>
     <p:spTree>
       <p:nvGrpSpPr>
-        <p:cNvPr id="304" name="Shape 304"/>
+        <p:cNvPr id="306" name="Shape 306"/>
         <p:cNvGrpSpPr/>
         <p:nvPr/>
       </p:nvGrpSpPr>
@@ -2038,7 +2038,7 @@
       </p:grpSpPr>
       <p:sp>
         <p:nvSpPr>
-          <p:cNvPr id="305" name="Google Shape;305;p6:notes"/>
+          <p:cNvPr id="307" name="Google Shape;307;p6:notes"/>
           <p:cNvSpPr txBox="1"/>
           <p:nvPr>
             <p:ph idx="1" type="body"/>
@@ -2085,7 +2085,7 @@
       </p:sp>
       <p:sp>
         <p:nvSpPr>
-          <p:cNvPr id="306" name="Google Shape;306;p6:notes"/>
+          <p:cNvPr id="308" name="Google Shape;308;p6:notes"/>
           <p:cNvSpPr/>
           <p:nvPr>
             <p:ph idx="2" type="sldImg"/>
@@ -2141,7 +2141,7 @@
   <p:cSld>
     <p:spTree>
       <p:nvGrpSpPr>
-        <p:cNvPr id="353" name="Shape 353"/>
+        <p:cNvPr id="355" name="Shape 355"/>
         <p:cNvGrpSpPr/>
         <p:nvPr/>
       </p:nvGrpSpPr>
@@ -2155,7 +2155,7 @@
       </p:grpSpPr>
       <p:sp>
         <p:nvSpPr>
-          <p:cNvPr id="354" name="Google Shape;354;g3ba4c4b9c29_0_27:notes"/>
+          <p:cNvPr id="356" name="Google Shape;356;g3ba4c4b9c29_0_27:notes"/>
           <p:cNvSpPr txBox="1"/>
           <p:nvPr>
             <p:ph idx="1" type="body"/>
@@ -2202,7 +2202,7 @@
       </p:sp>
       <p:sp>
         <p:nvSpPr>
-          <p:cNvPr id="355" name="Google Shape;355;g3ba4c4b9c29_0_27:notes"/>
+          <p:cNvPr id="357" name="Google Shape;357;g3ba4c4b9c29_0_27:notes"/>
           <p:cNvSpPr/>
           <p:nvPr>
             <p:ph idx="2" type="sldImg"/>
@@ -2258,7 +2258,7 @@
   <p:cSld>
     <p:spTree>
       <p:nvGrpSpPr>
-        <p:cNvPr id="391" name="Shape 391"/>
+        <p:cNvPr id="393" name="Shape 393"/>
         <p:cNvGrpSpPr/>
         <p:nvPr/>
       </p:nvGrpSpPr>
@@ -2272,7 +2272,7 @@
       </p:grpSpPr>
       <p:sp>
         <p:nvSpPr>
-          <p:cNvPr id="392" name="Google Shape;392;g3ba4c4b9c29_0_77:notes"/>
+          <p:cNvPr id="394" name="Google Shape;394;g3ba4c4b9c29_0_77:notes"/>
           <p:cNvSpPr txBox="1"/>
           <p:nvPr>
             <p:ph idx="1" type="body"/>
@@ -2319,7 +2319,7 @@
       </p:sp>
       <p:sp>
         <p:nvSpPr>
-          <p:cNvPr id="393" name="Google Shape;393;g3ba4c4b9c29_0_77:notes"/>
+          <p:cNvPr id="395" name="Google Shape;395;g3ba4c4b9c29_0_77:notes"/>
           <p:cNvSpPr/>
           <p:nvPr>
             <p:ph idx="2" type="sldImg"/>
@@ -17637,7 +17637,7 @@
   <p:cSld>
     <p:spTree>
       <p:nvGrpSpPr>
-        <p:cNvPr id="438" name="Shape 438"/>
+        <p:cNvPr id="440" name="Shape 440"/>
         <p:cNvGrpSpPr/>
         <p:nvPr/>
       </p:nvGrpSpPr>
@@ -17651,7 +17651,7 @@
       </p:grpSpPr>
       <p:grpSp>
         <p:nvGrpSpPr>
-          <p:cNvPr id="439" name="Google Shape;439;g3ba4c4b9c29_0_129"/>
+          <p:cNvPr id="441" name="Google Shape;441;g3ba4c4b9c29_0_129"/>
           <p:cNvGrpSpPr/>
           <p:nvPr/>
         </p:nvGrpSpPr>
@@ -17665,7 +17665,7 @@
         </p:grpSpPr>
         <p:sp>
           <p:nvSpPr>
-            <p:cNvPr id="440" name="Google Shape;440;g3ba4c4b9c29_0_129"/>
+            <p:cNvPr id="442" name="Google Shape;442;g3ba4c4b9c29_0_129"/>
             <p:cNvSpPr/>
             <p:nvPr/>
           </p:nvSpPr>
@@ -17750,7 +17750,7 @@
         </p:sp>
         <p:sp>
           <p:nvSpPr>
-            <p:cNvPr id="441" name="Google Shape;441;g3ba4c4b9c29_0_129"/>
+            <p:cNvPr id="443" name="Google Shape;443;g3ba4c4b9c29_0_129"/>
             <p:cNvSpPr txBox="1"/>
             <p:nvPr/>
           </p:nvSpPr>
@@ -17808,7 +17808,7 @@
       </p:grpSp>
       <p:sp>
         <p:nvSpPr>
-          <p:cNvPr id="442" name="Google Shape;442;g3ba4c4b9c29_0_129"/>
+          <p:cNvPr id="444" name="Google Shape;444;g3ba4c4b9c29_0_129"/>
           <p:cNvSpPr/>
           <p:nvPr/>
         </p:nvSpPr>
@@ -17892,7 +17892,7 @@
       </p:sp>
       <p:grpSp>
         <p:nvGrpSpPr>
-          <p:cNvPr id="443" name="Google Shape;443;g3ba4c4b9c29_0_129"/>
+          <p:cNvPr id="445" name="Google Shape;445;g3ba4c4b9c29_0_129"/>
           <p:cNvGrpSpPr/>
           <p:nvPr/>
         </p:nvGrpSpPr>
@@ -17906,7 +17906,7 @@
         </p:grpSpPr>
         <p:sp>
           <p:nvSpPr>
-            <p:cNvPr id="444" name="Google Shape;444;g3ba4c4b9c29_0_129"/>
+            <p:cNvPr id="446" name="Google Shape;446;g3ba4c4b9c29_0_129"/>
             <p:cNvSpPr/>
             <p:nvPr/>
           </p:nvSpPr>
@@ -17997,7 +17997,7 @@
         </p:sp>
         <p:sp>
           <p:nvSpPr>
-            <p:cNvPr id="445" name="Google Shape;445;g3ba4c4b9c29_0_129"/>
+            <p:cNvPr id="447" name="Google Shape;447;g3ba4c4b9c29_0_129"/>
             <p:cNvSpPr txBox="1"/>
             <p:nvPr/>
           </p:nvSpPr>
@@ -18055,7 +18055,7 @@
       </p:grpSp>
       <p:grpSp>
         <p:nvGrpSpPr>
-          <p:cNvPr id="446" name="Google Shape;446;g3ba4c4b9c29_0_129"/>
+          <p:cNvPr id="448" name="Google Shape;448;g3ba4c4b9c29_0_129"/>
           <p:cNvGrpSpPr/>
           <p:nvPr/>
         </p:nvGrpSpPr>
@@ -18069,7 +18069,7 @@
         </p:grpSpPr>
         <p:sp>
           <p:nvSpPr>
-            <p:cNvPr id="447" name="Google Shape;447;g3ba4c4b9c29_0_129"/>
+            <p:cNvPr id="449" name="Google Shape;449;g3ba4c4b9c29_0_129"/>
             <p:cNvSpPr/>
             <p:nvPr/>
           </p:nvSpPr>
@@ -18154,7 +18154,7 @@
         </p:sp>
         <p:sp>
           <p:nvSpPr>
-            <p:cNvPr id="448" name="Google Shape;448;g3ba4c4b9c29_0_129"/>
+            <p:cNvPr id="450" name="Google Shape;450;g3ba4c4b9c29_0_129"/>
             <p:cNvSpPr txBox="1"/>
             <p:nvPr/>
           </p:nvSpPr>
@@ -18212,7 +18212,7 @@
       </p:grpSp>
       <p:grpSp>
         <p:nvGrpSpPr>
-          <p:cNvPr id="449" name="Google Shape;449;g3ba4c4b9c29_0_129"/>
+          <p:cNvPr id="451" name="Google Shape;451;g3ba4c4b9c29_0_129"/>
           <p:cNvGrpSpPr/>
           <p:nvPr/>
         </p:nvGrpSpPr>
@@ -18226,7 +18226,7 @@
         </p:grpSpPr>
         <p:sp>
           <p:nvSpPr>
-            <p:cNvPr id="450" name="Google Shape;450;g3ba4c4b9c29_0_129"/>
+            <p:cNvPr id="452" name="Google Shape;452;g3ba4c4b9c29_0_129"/>
             <p:cNvSpPr/>
             <p:nvPr/>
           </p:nvSpPr>
@@ -18317,7 +18317,7 @@
         </p:sp>
         <p:sp>
           <p:nvSpPr>
-            <p:cNvPr id="451" name="Google Shape;451;g3ba4c4b9c29_0_129"/>
+            <p:cNvPr id="453" name="Google Shape;453;g3ba4c4b9c29_0_129"/>
             <p:cNvSpPr txBox="1"/>
             <p:nvPr/>
           </p:nvSpPr>
@@ -18375,7 +18375,7 @@
       </p:grpSp>
       <p:pic>
         <p:nvPicPr>
-          <p:cNvPr id="452" name="Google Shape;452;g3ba4c4b9c29_0_129"/>
+          <p:cNvPr id="454" name="Google Shape;454;g3ba4c4b9c29_0_129"/>
           <p:cNvPicPr preferRelativeResize="0"/>
           <p:nvPr/>
         </p:nvPicPr>
@@ -18414,7 +18414,7 @@
   <p:cSld>
     <p:spTree>
       <p:nvGrpSpPr>
-        <p:cNvPr id="456" name="Shape 456"/>
+        <p:cNvPr id="458" name="Shape 458"/>
         <p:cNvGrpSpPr/>
         <p:nvPr/>
       </p:nvGrpSpPr>
@@ -18428,7 +18428,7 @@
       </p:grpSpPr>
       <p:sp>
         <p:nvSpPr>
-          <p:cNvPr id="457" name="Google Shape;457;p7"/>
+          <p:cNvPr id="459" name="Google Shape;459;p7"/>
           <p:cNvSpPr/>
           <p:nvPr/>
         </p:nvSpPr>
@@ -18512,7 +18512,7 @@
       </p:sp>
       <p:sp>
         <p:nvSpPr>
-          <p:cNvPr id="458" name="Google Shape;458;p7"/>
+          <p:cNvPr id="460" name="Google Shape;460;p7"/>
           <p:cNvSpPr/>
           <p:nvPr/>
         </p:nvSpPr>
@@ -18596,7 +18596,7 @@
       </p:sp>
       <p:grpSp>
         <p:nvGrpSpPr>
-          <p:cNvPr id="459" name="Google Shape;459;p7"/>
+          <p:cNvPr id="461" name="Google Shape;461;p7"/>
           <p:cNvGrpSpPr/>
           <p:nvPr/>
         </p:nvGrpSpPr>
@@ -18610,7 +18610,7 @@
         </p:grpSpPr>
         <p:sp>
           <p:nvSpPr>
-            <p:cNvPr id="460" name="Google Shape;460;p7"/>
+            <p:cNvPr id="462" name="Google Shape;462;p7"/>
             <p:cNvSpPr/>
             <p:nvPr/>
           </p:nvSpPr>
@@ -18701,7 +18701,7 @@
         </p:sp>
         <p:sp>
           <p:nvSpPr>
-            <p:cNvPr id="461" name="Google Shape;461;p7"/>
+            <p:cNvPr id="463" name="Google Shape;463;p7"/>
             <p:cNvSpPr txBox="1"/>
             <p:nvPr/>
           </p:nvSpPr>
@@ -18759,7 +18759,7 @@
       </p:grpSp>
       <p:sp>
         <p:nvSpPr>
-          <p:cNvPr id="462" name="Google Shape;462;p7"/>
+          <p:cNvPr id="464" name="Google Shape;464;p7"/>
           <p:cNvSpPr/>
           <p:nvPr/>
         </p:nvSpPr>
@@ -18843,7 +18843,7 @@
       </p:sp>
       <p:grpSp>
         <p:nvGrpSpPr>
-          <p:cNvPr id="463" name="Google Shape;463;p7"/>
+          <p:cNvPr id="465" name="Google Shape;465;p7"/>
           <p:cNvGrpSpPr/>
           <p:nvPr/>
         </p:nvGrpSpPr>
@@ -18857,7 +18857,7 @@
         </p:grpSpPr>
         <p:sp>
           <p:nvSpPr>
-            <p:cNvPr id="464" name="Google Shape;464;p7"/>
+            <p:cNvPr id="466" name="Google Shape;466;p7"/>
             <p:cNvSpPr/>
             <p:nvPr/>
           </p:nvSpPr>
@@ -18948,7 +18948,7 @@
         </p:sp>
         <p:sp>
           <p:nvSpPr>
-            <p:cNvPr id="465" name="Google Shape;465;p7"/>
+            <p:cNvPr id="467" name="Google Shape;467;p7"/>
             <p:cNvSpPr txBox="1"/>
             <p:nvPr/>
           </p:nvSpPr>
@@ -19006,7 +19006,7 @@
       </p:grpSp>
       <p:grpSp>
         <p:nvGrpSpPr>
-          <p:cNvPr id="466" name="Google Shape;466;p7"/>
+          <p:cNvPr id="468" name="Google Shape;468;p7"/>
           <p:cNvGrpSpPr/>
           <p:nvPr/>
         </p:nvGrpSpPr>
@@ -19020,7 +19020,7 @@
         </p:grpSpPr>
         <p:grpSp>
           <p:nvGrpSpPr>
-            <p:cNvPr id="467" name="Google Shape;467;p7"/>
+            <p:cNvPr id="469" name="Google Shape;469;p7"/>
             <p:cNvGrpSpPr/>
             <p:nvPr/>
           </p:nvGrpSpPr>
@@ -19034,7 +19034,7 @@
           </p:grpSpPr>
           <p:sp>
             <p:nvSpPr>
-              <p:cNvPr id="468" name="Google Shape;468;p7"/>
+              <p:cNvPr id="470" name="Google Shape;470;p7"/>
               <p:cNvSpPr/>
               <p:nvPr/>
             </p:nvSpPr>
@@ -19119,7 +19119,7 @@
           </p:sp>
           <p:sp>
             <p:nvSpPr>
-              <p:cNvPr id="469" name="Google Shape;469;p7"/>
+              <p:cNvPr id="471" name="Google Shape;471;p7"/>
               <p:cNvSpPr txBox="1"/>
               <p:nvPr/>
             </p:nvSpPr>
@@ -19177,7 +19177,7 @@
         </p:grpSp>
         <p:sp>
           <p:nvSpPr>
-            <p:cNvPr id="470" name="Google Shape;470;p7"/>
+            <p:cNvPr id="472" name="Google Shape;472;p7"/>
             <p:cNvSpPr/>
             <p:nvPr/>
           </p:nvSpPr>
@@ -19262,7 +19262,7 @@
       </p:grpSp>
       <p:sp>
         <p:nvSpPr>
-          <p:cNvPr id="471" name="Google Shape;471;p7"/>
+          <p:cNvPr id="473" name="Google Shape;473;p7"/>
           <p:cNvSpPr/>
           <p:nvPr/>
         </p:nvSpPr>
@@ -19346,7 +19346,7 @@
       </p:sp>
       <p:grpSp>
         <p:nvGrpSpPr>
-          <p:cNvPr id="472" name="Google Shape;472;p7"/>
+          <p:cNvPr id="474" name="Google Shape;474;p7"/>
           <p:cNvGrpSpPr/>
           <p:nvPr/>
         </p:nvGrpSpPr>
@@ -19360,7 +19360,7 @@
         </p:grpSpPr>
         <p:sp>
           <p:nvSpPr>
-            <p:cNvPr id="473" name="Google Shape;473;p7"/>
+            <p:cNvPr id="475" name="Google Shape;475;p7"/>
             <p:cNvSpPr/>
             <p:nvPr/>
           </p:nvSpPr>
@@ -19451,7 +19451,7 @@
         </p:sp>
         <p:sp>
           <p:nvSpPr>
-            <p:cNvPr id="474" name="Google Shape;474;p7"/>
+            <p:cNvPr id="476" name="Google Shape;476;p7"/>
             <p:cNvSpPr txBox="1"/>
             <p:nvPr/>
           </p:nvSpPr>
@@ -19509,7 +19509,7 @@
       </p:grpSp>
       <p:grpSp>
         <p:nvGrpSpPr>
-          <p:cNvPr id="475" name="Google Shape;475;p7"/>
+          <p:cNvPr id="477" name="Google Shape;477;p7"/>
           <p:cNvGrpSpPr/>
           <p:nvPr/>
         </p:nvGrpSpPr>
@@ -19523,7 +19523,7 @@
         </p:grpSpPr>
         <p:grpSp>
           <p:nvGrpSpPr>
-            <p:cNvPr id="476" name="Google Shape;476;p7"/>
+            <p:cNvPr id="478" name="Google Shape;478;p7"/>
             <p:cNvGrpSpPr/>
             <p:nvPr/>
           </p:nvGrpSpPr>
@@ -19537,7 +19537,7 @@
           </p:grpSpPr>
           <p:sp>
             <p:nvSpPr>
-              <p:cNvPr id="477" name="Google Shape;477;p7"/>
+              <p:cNvPr id="479" name="Google Shape;479;p7"/>
               <p:cNvSpPr/>
               <p:nvPr/>
             </p:nvSpPr>
@@ -19622,7 +19622,7 @@
           </p:sp>
           <p:sp>
             <p:nvSpPr>
-              <p:cNvPr id="478" name="Google Shape;478;p7"/>
+              <p:cNvPr id="480" name="Google Shape;480;p7"/>
               <p:cNvSpPr txBox="1"/>
               <p:nvPr/>
             </p:nvSpPr>
@@ -19680,7 +19680,7 @@
         </p:grpSp>
         <p:sp>
           <p:nvSpPr>
-            <p:cNvPr id="479" name="Google Shape;479;p7"/>
+            <p:cNvPr id="481" name="Google Shape;481;p7"/>
             <p:cNvSpPr/>
             <p:nvPr/>
           </p:nvSpPr>
@@ -19765,7 +19765,7 @@
       </p:grpSp>
       <p:grpSp>
         <p:nvGrpSpPr>
-          <p:cNvPr id="480" name="Google Shape;480;p7"/>
+          <p:cNvPr id="482" name="Google Shape;482;p7"/>
           <p:cNvGrpSpPr/>
           <p:nvPr/>
         </p:nvGrpSpPr>
@@ -19779,7 +19779,7 @@
         </p:grpSpPr>
         <p:sp>
           <p:nvSpPr>
-            <p:cNvPr id="481" name="Google Shape;481;p7"/>
+            <p:cNvPr id="483" name="Google Shape;483;p7"/>
             <p:cNvSpPr/>
             <p:nvPr/>
           </p:nvSpPr>
@@ -19863,7 +19863,7 @@
         </p:sp>
         <p:grpSp>
           <p:nvGrpSpPr>
-            <p:cNvPr id="482" name="Google Shape;482;p7"/>
+            <p:cNvPr id="484" name="Google Shape;484;p7"/>
             <p:cNvGrpSpPr/>
             <p:nvPr/>
           </p:nvGrpSpPr>
@@ -19877,7 +19877,7 @@
           </p:grpSpPr>
           <p:sp>
             <p:nvSpPr>
-              <p:cNvPr id="483" name="Google Shape;483;p7"/>
+              <p:cNvPr id="485" name="Google Shape;485;p7"/>
               <p:cNvSpPr/>
               <p:nvPr/>
             </p:nvSpPr>
@@ -19962,7 +19962,7 @@
           </p:sp>
           <p:sp>
             <p:nvSpPr>
-              <p:cNvPr id="484" name="Google Shape;484;p7"/>
+              <p:cNvPr id="486" name="Google Shape;486;p7"/>
               <p:cNvSpPr txBox="1"/>
               <p:nvPr/>
             </p:nvSpPr>
@@ -20021,7 +20021,7 @@
       </p:grpSp>
       <p:grpSp>
         <p:nvGrpSpPr>
-          <p:cNvPr id="485" name="Google Shape;485;p7"/>
+          <p:cNvPr id="487" name="Google Shape;487;p7"/>
           <p:cNvGrpSpPr/>
           <p:nvPr/>
         </p:nvGrpSpPr>
@@ -20035,7 +20035,7 @@
         </p:grpSpPr>
         <p:sp>
           <p:nvSpPr>
-            <p:cNvPr id="486" name="Google Shape;486;p7"/>
+            <p:cNvPr id="488" name="Google Shape;488;p7"/>
             <p:cNvSpPr/>
             <p:nvPr/>
           </p:nvSpPr>
@@ -20120,7 +20120,7 @@
         </p:sp>
         <p:sp>
           <p:nvSpPr>
-            <p:cNvPr id="487" name="Google Shape;487;p7"/>
+            <p:cNvPr id="489" name="Google Shape;489;p7"/>
             <p:cNvSpPr txBox="1"/>
             <p:nvPr/>
           </p:nvSpPr>
@@ -20178,7 +20178,7 @@
       </p:grpSp>
       <p:grpSp>
         <p:nvGrpSpPr>
-          <p:cNvPr id="488" name="Google Shape;488;p7"/>
+          <p:cNvPr id="490" name="Google Shape;490;p7"/>
           <p:cNvGrpSpPr/>
           <p:nvPr/>
         </p:nvGrpSpPr>
@@ -20192,7 +20192,7 @@
         </p:grpSpPr>
         <p:sp>
           <p:nvSpPr>
-            <p:cNvPr id="489" name="Google Shape;489;p7"/>
+            <p:cNvPr id="491" name="Google Shape;491;p7"/>
             <p:cNvSpPr/>
             <p:nvPr/>
           </p:nvSpPr>
@@ -20283,7 +20283,7 @@
         </p:sp>
         <p:sp>
           <p:nvSpPr>
-            <p:cNvPr id="490" name="Google Shape;490;p7"/>
+            <p:cNvPr id="492" name="Google Shape;492;p7"/>
             <p:cNvSpPr txBox="1"/>
             <p:nvPr/>
           </p:nvSpPr>
@@ -20341,7 +20341,7 @@
       </p:grpSp>
       <p:sp>
         <p:nvSpPr>
-          <p:cNvPr id="491" name="Google Shape;491;p7"/>
+          <p:cNvPr id="493" name="Google Shape;493;p7"/>
           <p:cNvSpPr/>
           <p:nvPr/>
         </p:nvSpPr>
@@ -20425,7 +20425,7 @@
       </p:sp>
       <p:grpSp>
         <p:nvGrpSpPr>
-          <p:cNvPr id="492" name="Google Shape;492;p7"/>
+          <p:cNvPr id="494" name="Google Shape;494;p7"/>
           <p:cNvGrpSpPr/>
           <p:nvPr/>
         </p:nvGrpSpPr>
@@ -20439,7 +20439,7 @@
         </p:grpSpPr>
         <p:sp>
           <p:nvSpPr>
-            <p:cNvPr id="493" name="Google Shape;493;p7"/>
+            <p:cNvPr id="495" name="Google Shape;495;p7"/>
             <p:cNvSpPr/>
             <p:nvPr/>
           </p:nvSpPr>
@@ -20524,7 +20524,7 @@
         </p:sp>
         <p:sp>
           <p:nvSpPr>
-            <p:cNvPr id="494" name="Google Shape;494;p7"/>
+            <p:cNvPr id="496" name="Google Shape;496;p7"/>
             <p:cNvSpPr txBox="1"/>
             <p:nvPr/>
           </p:nvSpPr>
@@ -20582,7 +20582,7 @@
       </p:grpSp>
       <p:grpSp>
         <p:nvGrpSpPr>
-          <p:cNvPr id="495" name="Google Shape;495;p7"/>
+          <p:cNvPr id="497" name="Google Shape;497;p7"/>
           <p:cNvGrpSpPr/>
           <p:nvPr/>
         </p:nvGrpSpPr>
@@ -20596,7 +20596,7 @@
         </p:grpSpPr>
         <p:sp>
           <p:nvSpPr>
-            <p:cNvPr id="496" name="Google Shape;496;p7"/>
+            <p:cNvPr id="498" name="Google Shape;498;p7"/>
             <p:cNvSpPr/>
             <p:nvPr/>
           </p:nvSpPr>
@@ -20687,7 +20687,7 @@
         </p:sp>
         <p:sp>
           <p:nvSpPr>
-            <p:cNvPr id="497" name="Google Shape;497;p7"/>
+            <p:cNvPr id="499" name="Google Shape;499;p7"/>
             <p:cNvSpPr txBox="1"/>
             <p:nvPr/>
           </p:nvSpPr>
@@ -20745,7 +20745,7 @@
       </p:grpSp>
       <p:sp>
         <p:nvSpPr>
-          <p:cNvPr id="498" name="Google Shape;498;p7"/>
+          <p:cNvPr id="500" name="Google Shape;500;p7"/>
           <p:cNvSpPr/>
           <p:nvPr/>
         </p:nvSpPr>
@@ -20779,174 +20779,6 @@
           </a:custGeom>
           <a:blipFill rotWithShape="1">
             <a:blip r:embed="rId9">
-              <a:alphaModFix/>
-            </a:blip>
-            <a:stretch>
-              <a:fillRect b="0" l="0" r="0" t="0"/>
-            </a:stretch>
-          </a:blipFill>
-          <a:ln>
-            <a:noFill/>
-          </a:ln>
-        </p:spPr>
-        <p:txBody>
-          <a:bodyPr anchorCtr="0" anchor="t" bIns="45700" lIns="91425" spcFirstLastPara="1" rIns="91425" wrap="square" tIns="45700">
-            <a:noAutofit/>
-          </a:bodyPr>
-          <a:lstStyle/>
-          <a:p>
-            <a:pPr indent="0" lvl="0" marL="0" marR="0" rtl="0" algn="l">
-              <a:lnSpc>
-                <a:spcPct val="100000"/>
-              </a:lnSpc>
-              <a:spcBef>
-                <a:spcPts val="0"/>
-              </a:spcBef>
-              <a:spcAft>
-                <a:spcPts val="0"/>
-              </a:spcAft>
-              <a:buClr>
-                <a:srgbClr val="000000"/>
-              </a:buClr>
-              <a:buSzPts val="1800"/>
-              <a:buFont typeface="Arial"/>
-              <a:buNone/>
-            </a:pPr>
-            <a:r>
-              <a:t/>
-            </a:r>
-            <a:endParaRPr b="0" i="0" sz="1800" u="none" cap="none" strike="noStrike">
-              <a:solidFill>
-                <a:schemeClr val="dk1"/>
-              </a:solidFill>
-              <a:latin typeface="Calibri"/>
-              <a:ea typeface="Calibri"/>
-              <a:cs typeface="Calibri"/>
-              <a:sym typeface="Calibri"/>
-            </a:endParaRPr>
-          </a:p>
-        </p:txBody>
-      </p:sp>
-      <p:sp>
-        <p:nvSpPr>
-          <p:cNvPr id="499" name="Google Shape;499;p7"/>
-          <p:cNvSpPr/>
-          <p:nvPr/>
-        </p:nvSpPr>
-        <p:spPr>
-          <a:xfrm>
-            <a:off x="17597510" y="-464532"/>
-            <a:ext cx="1196074" cy="1037594"/>
-          </a:xfrm>
-          <a:custGeom>
-            <a:rect b="b" l="l" r="r" t="t"/>
-            <a:pathLst>
-              <a:path extrusionOk="0" h="1037594" w="1196074">
-                <a:moveTo>
-                  <a:pt x="0" y="0"/>
-                </a:moveTo>
-                <a:lnTo>
-                  <a:pt x="1196075" y="0"/>
-                </a:lnTo>
-                <a:lnTo>
-                  <a:pt x="1196075" y="1037594"/>
-                </a:lnTo>
-                <a:lnTo>
-                  <a:pt x="0" y="1037594"/>
-                </a:lnTo>
-                <a:lnTo>
-                  <a:pt x="0" y="0"/>
-                </a:lnTo>
-                <a:close/>
-              </a:path>
-            </a:pathLst>
-          </a:custGeom>
-          <a:blipFill rotWithShape="1">
-            <a:blip r:embed="rId10">
-              <a:alphaModFix/>
-            </a:blip>
-            <a:stretch>
-              <a:fillRect b="0" l="0" r="0" t="0"/>
-            </a:stretch>
-          </a:blipFill>
-          <a:ln>
-            <a:noFill/>
-          </a:ln>
-        </p:spPr>
-        <p:txBody>
-          <a:bodyPr anchorCtr="0" anchor="t" bIns="45700" lIns="91425" spcFirstLastPara="1" rIns="91425" wrap="square" tIns="45700">
-            <a:noAutofit/>
-          </a:bodyPr>
-          <a:lstStyle/>
-          <a:p>
-            <a:pPr indent="0" lvl="0" marL="0" marR="0" rtl="0" algn="l">
-              <a:lnSpc>
-                <a:spcPct val="100000"/>
-              </a:lnSpc>
-              <a:spcBef>
-                <a:spcPts val="0"/>
-              </a:spcBef>
-              <a:spcAft>
-                <a:spcPts val="0"/>
-              </a:spcAft>
-              <a:buClr>
-                <a:srgbClr val="000000"/>
-              </a:buClr>
-              <a:buSzPts val="1800"/>
-              <a:buFont typeface="Arial"/>
-              <a:buNone/>
-            </a:pPr>
-            <a:r>
-              <a:t/>
-            </a:r>
-            <a:endParaRPr b="0" i="0" sz="1800" u="none" cap="none" strike="noStrike">
-              <a:solidFill>
-                <a:schemeClr val="dk1"/>
-              </a:solidFill>
-              <a:latin typeface="Calibri"/>
-              <a:ea typeface="Calibri"/>
-              <a:cs typeface="Calibri"/>
-              <a:sym typeface="Calibri"/>
-            </a:endParaRPr>
-          </a:p>
-        </p:txBody>
-      </p:sp>
-      <p:sp>
-        <p:nvSpPr>
-          <p:cNvPr id="500" name="Google Shape;500;p7"/>
-          <p:cNvSpPr/>
-          <p:nvPr/>
-        </p:nvSpPr>
-        <p:spPr>
-          <a:xfrm>
-            <a:off x="14871582" y="10072240"/>
-            <a:ext cx="1992249" cy="4114800"/>
-          </a:xfrm>
-          <a:custGeom>
-            <a:rect b="b" l="l" r="r" t="t"/>
-            <a:pathLst>
-              <a:path extrusionOk="0" h="4114800" w="1992249">
-                <a:moveTo>
-                  <a:pt x="0" y="0"/>
-                </a:moveTo>
-                <a:lnTo>
-                  <a:pt x="1992249" y="0"/>
-                </a:lnTo>
-                <a:lnTo>
-                  <a:pt x="1992249" y="4114800"/>
-                </a:lnTo>
-                <a:lnTo>
-                  <a:pt x="0" y="4114800"/>
-                </a:lnTo>
-                <a:lnTo>
-                  <a:pt x="0" y="0"/>
-                </a:lnTo>
-                <a:close/>
-              </a:path>
-            </a:pathLst>
-          </a:custGeom>
-          <a:blipFill rotWithShape="1">
-            <a:blip r:embed="rId11">
               <a:alphaModFix/>
             </a:blip>
             <a:stretch>
@@ -21003,6 +20835,174 @@
         </p:nvSpPr>
         <p:spPr>
           <a:xfrm>
+            <a:off x="17597510" y="-464532"/>
+            <a:ext cx="1196074" cy="1037594"/>
+          </a:xfrm>
+          <a:custGeom>
+            <a:rect b="b" l="l" r="r" t="t"/>
+            <a:pathLst>
+              <a:path extrusionOk="0" h="1037594" w="1196074">
+                <a:moveTo>
+                  <a:pt x="0" y="0"/>
+                </a:moveTo>
+                <a:lnTo>
+                  <a:pt x="1196075" y="0"/>
+                </a:lnTo>
+                <a:lnTo>
+                  <a:pt x="1196075" y="1037594"/>
+                </a:lnTo>
+                <a:lnTo>
+                  <a:pt x="0" y="1037594"/>
+                </a:lnTo>
+                <a:lnTo>
+                  <a:pt x="0" y="0"/>
+                </a:lnTo>
+                <a:close/>
+              </a:path>
+            </a:pathLst>
+          </a:custGeom>
+          <a:blipFill rotWithShape="1">
+            <a:blip r:embed="rId10">
+              <a:alphaModFix/>
+            </a:blip>
+            <a:stretch>
+              <a:fillRect b="0" l="0" r="0" t="0"/>
+            </a:stretch>
+          </a:blipFill>
+          <a:ln>
+            <a:noFill/>
+          </a:ln>
+        </p:spPr>
+        <p:txBody>
+          <a:bodyPr anchorCtr="0" anchor="t" bIns="45700" lIns="91425" spcFirstLastPara="1" rIns="91425" wrap="square" tIns="45700">
+            <a:noAutofit/>
+          </a:bodyPr>
+          <a:lstStyle/>
+          <a:p>
+            <a:pPr indent="0" lvl="0" marL="0" marR="0" rtl="0" algn="l">
+              <a:lnSpc>
+                <a:spcPct val="100000"/>
+              </a:lnSpc>
+              <a:spcBef>
+                <a:spcPts val="0"/>
+              </a:spcBef>
+              <a:spcAft>
+                <a:spcPts val="0"/>
+              </a:spcAft>
+              <a:buClr>
+                <a:srgbClr val="000000"/>
+              </a:buClr>
+              <a:buSzPts val="1800"/>
+              <a:buFont typeface="Arial"/>
+              <a:buNone/>
+            </a:pPr>
+            <a:r>
+              <a:t/>
+            </a:r>
+            <a:endParaRPr b="0" i="0" sz="1800" u="none" cap="none" strike="noStrike">
+              <a:solidFill>
+                <a:schemeClr val="dk1"/>
+              </a:solidFill>
+              <a:latin typeface="Calibri"/>
+              <a:ea typeface="Calibri"/>
+              <a:cs typeface="Calibri"/>
+              <a:sym typeface="Calibri"/>
+            </a:endParaRPr>
+          </a:p>
+        </p:txBody>
+      </p:sp>
+      <p:sp>
+        <p:nvSpPr>
+          <p:cNvPr id="502" name="Google Shape;502;p7"/>
+          <p:cNvSpPr/>
+          <p:nvPr/>
+        </p:nvSpPr>
+        <p:spPr>
+          <a:xfrm>
+            <a:off x="14871582" y="10072240"/>
+            <a:ext cx="1992249" cy="4114800"/>
+          </a:xfrm>
+          <a:custGeom>
+            <a:rect b="b" l="l" r="r" t="t"/>
+            <a:pathLst>
+              <a:path extrusionOk="0" h="4114800" w="1992249">
+                <a:moveTo>
+                  <a:pt x="0" y="0"/>
+                </a:moveTo>
+                <a:lnTo>
+                  <a:pt x="1992249" y="0"/>
+                </a:lnTo>
+                <a:lnTo>
+                  <a:pt x="1992249" y="4114800"/>
+                </a:lnTo>
+                <a:lnTo>
+                  <a:pt x="0" y="4114800"/>
+                </a:lnTo>
+                <a:lnTo>
+                  <a:pt x="0" y="0"/>
+                </a:lnTo>
+                <a:close/>
+              </a:path>
+            </a:pathLst>
+          </a:custGeom>
+          <a:blipFill rotWithShape="1">
+            <a:blip r:embed="rId11">
+              <a:alphaModFix/>
+            </a:blip>
+            <a:stretch>
+              <a:fillRect b="0" l="0" r="0" t="0"/>
+            </a:stretch>
+          </a:blipFill>
+          <a:ln>
+            <a:noFill/>
+          </a:ln>
+        </p:spPr>
+        <p:txBody>
+          <a:bodyPr anchorCtr="0" anchor="t" bIns="45700" lIns="91425" spcFirstLastPara="1" rIns="91425" wrap="square" tIns="45700">
+            <a:noAutofit/>
+          </a:bodyPr>
+          <a:lstStyle/>
+          <a:p>
+            <a:pPr indent="0" lvl="0" marL="0" marR="0" rtl="0" algn="l">
+              <a:lnSpc>
+                <a:spcPct val="100000"/>
+              </a:lnSpc>
+              <a:spcBef>
+                <a:spcPts val="0"/>
+              </a:spcBef>
+              <a:spcAft>
+                <a:spcPts val="0"/>
+              </a:spcAft>
+              <a:buClr>
+                <a:srgbClr val="000000"/>
+              </a:buClr>
+              <a:buSzPts val="1800"/>
+              <a:buFont typeface="Arial"/>
+              <a:buNone/>
+            </a:pPr>
+            <a:r>
+              <a:t/>
+            </a:r>
+            <a:endParaRPr b="0" i="0" sz="1800" u="none" cap="none" strike="noStrike">
+              <a:solidFill>
+                <a:schemeClr val="dk1"/>
+              </a:solidFill>
+              <a:latin typeface="Calibri"/>
+              <a:ea typeface="Calibri"/>
+              <a:cs typeface="Calibri"/>
+              <a:sym typeface="Calibri"/>
+            </a:endParaRPr>
+          </a:p>
+        </p:txBody>
+      </p:sp>
+      <p:sp>
+        <p:nvSpPr>
+          <p:cNvPr id="503" name="Google Shape;503;p7"/>
+          <p:cNvSpPr/>
+          <p:nvPr/>
+        </p:nvSpPr>
+        <p:spPr>
+          <a:xfrm>
             <a:off x="1895197" y="2707758"/>
             <a:ext cx="1299381" cy="1182438"/>
           </a:xfrm>
@@ -21081,7 +21081,7 @@
       </p:sp>
       <p:sp>
         <p:nvSpPr>
-          <p:cNvPr id="502" name="Google Shape;502;p7"/>
+          <p:cNvPr id="504" name="Google Shape;504;p7"/>
           <p:cNvSpPr/>
           <p:nvPr/>
         </p:nvSpPr>
@@ -21165,7 +21165,7 @@
       </p:sp>
       <p:sp>
         <p:nvSpPr>
-          <p:cNvPr id="503" name="Google Shape;503;p7"/>
+          <p:cNvPr id="505" name="Google Shape;505;p7"/>
           <p:cNvSpPr/>
           <p:nvPr/>
         </p:nvSpPr>
@@ -21249,7 +21249,7 @@
       </p:sp>
       <p:sp>
         <p:nvSpPr>
-          <p:cNvPr id="504" name="Google Shape;504;p7"/>
+          <p:cNvPr id="506" name="Google Shape;506;p7"/>
           <p:cNvSpPr txBox="1"/>
           <p:nvPr/>
         </p:nvSpPr>
@@ -21327,7 +21327,7 @@
       </p:sp>
       <p:sp>
         <p:nvSpPr>
-          <p:cNvPr id="505" name="Google Shape;505;p7"/>
+          <p:cNvPr id="507" name="Google Shape;507;p7"/>
           <p:cNvSpPr txBox="1"/>
           <p:nvPr/>
         </p:nvSpPr>
@@ -21393,7 +21393,7 @@
       </p:sp>
       <p:sp>
         <p:nvSpPr>
-          <p:cNvPr id="506" name="Google Shape;506;p7"/>
+          <p:cNvPr id="508" name="Google Shape;508;p7"/>
           <p:cNvSpPr txBox="1"/>
           <p:nvPr/>
         </p:nvSpPr>
@@ -21610,7 +21610,7 @@
       </p:sp>
       <p:sp>
         <p:nvSpPr>
-          <p:cNvPr id="507" name="Google Shape;507;p7"/>
+          <p:cNvPr id="509" name="Google Shape;509;p7"/>
           <p:cNvSpPr txBox="1"/>
           <p:nvPr/>
         </p:nvSpPr>
@@ -21688,7 +21688,7 @@
       </p:sp>
       <p:sp>
         <p:nvSpPr>
-          <p:cNvPr id="508" name="Google Shape;508;p7"/>
+          <p:cNvPr id="510" name="Google Shape;510;p7"/>
           <p:cNvSpPr txBox="1"/>
           <p:nvPr/>
         </p:nvSpPr>
@@ -22065,7 +22065,7 @@
       </p:sp>
       <p:sp>
         <p:nvSpPr>
-          <p:cNvPr id="509" name="Google Shape;509;p7"/>
+          <p:cNvPr id="511" name="Google Shape;511;p7"/>
           <p:cNvSpPr txBox="1"/>
           <p:nvPr/>
         </p:nvSpPr>
@@ -22143,7 +22143,7 @@
       </p:sp>
       <p:sp>
         <p:nvSpPr>
-          <p:cNvPr id="510" name="Google Shape;510;p7"/>
+          <p:cNvPr id="512" name="Google Shape;512;p7"/>
           <p:cNvSpPr txBox="1"/>
           <p:nvPr/>
         </p:nvSpPr>
@@ -22451,7 +22451,7 @@
   <p:cSld>
     <p:spTree>
       <p:nvGrpSpPr>
-        <p:cNvPr id="514" name="Shape 514"/>
+        <p:cNvPr id="516" name="Shape 516"/>
         <p:cNvGrpSpPr/>
         <p:nvPr/>
       </p:nvGrpSpPr>
@@ -22465,7 +22465,7 @@
       </p:grpSpPr>
       <p:grpSp>
         <p:nvGrpSpPr>
-          <p:cNvPr id="515" name="Google Shape;515;p8"/>
+          <p:cNvPr id="517" name="Google Shape;517;p8"/>
           <p:cNvGrpSpPr/>
           <p:nvPr/>
         </p:nvGrpSpPr>
@@ -22479,7 +22479,7 @@
         </p:grpSpPr>
         <p:sp>
           <p:nvSpPr>
-            <p:cNvPr id="516" name="Google Shape;516;p8"/>
+            <p:cNvPr id="518" name="Google Shape;518;p8"/>
             <p:cNvSpPr/>
             <p:nvPr/>
           </p:nvSpPr>
@@ -22564,7 +22564,7 @@
         </p:sp>
         <p:sp>
           <p:nvSpPr>
-            <p:cNvPr id="517" name="Google Shape;517;p8"/>
+            <p:cNvPr id="519" name="Google Shape;519;p8"/>
             <p:cNvSpPr txBox="1"/>
             <p:nvPr/>
           </p:nvSpPr>
@@ -22622,7 +22622,7 @@
       </p:grpSp>
       <p:sp>
         <p:nvSpPr>
-          <p:cNvPr id="518" name="Google Shape;518;p8"/>
+          <p:cNvPr id="520" name="Google Shape;520;p8"/>
           <p:cNvSpPr/>
           <p:nvPr/>
         </p:nvSpPr>
@@ -22706,7 +22706,7 @@
       </p:sp>
       <p:grpSp>
         <p:nvGrpSpPr>
-          <p:cNvPr id="519" name="Google Shape;519;p8"/>
+          <p:cNvPr id="521" name="Google Shape;521;p8"/>
           <p:cNvGrpSpPr/>
           <p:nvPr/>
         </p:nvGrpSpPr>
@@ -22720,7 +22720,7 @@
         </p:grpSpPr>
         <p:sp>
           <p:nvSpPr>
-            <p:cNvPr id="520" name="Google Shape;520;p8"/>
+            <p:cNvPr id="522" name="Google Shape;522;p8"/>
             <p:cNvSpPr/>
             <p:nvPr/>
           </p:nvSpPr>
@@ -22811,7 +22811,7 @@
         </p:sp>
         <p:sp>
           <p:nvSpPr>
-            <p:cNvPr id="521" name="Google Shape;521;p8"/>
+            <p:cNvPr id="523" name="Google Shape;523;p8"/>
             <p:cNvSpPr txBox="1"/>
             <p:nvPr/>
           </p:nvSpPr>
@@ -22869,7 +22869,7 @@
       </p:grpSp>
       <p:grpSp>
         <p:nvGrpSpPr>
-          <p:cNvPr id="522" name="Google Shape;522;p8"/>
+          <p:cNvPr id="524" name="Google Shape;524;p8"/>
           <p:cNvGrpSpPr/>
           <p:nvPr/>
         </p:nvGrpSpPr>
@@ -22883,7 +22883,7 @@
         </p:grpSpPr>
         <p:sp>
           <p:nvSpPr>
-            <p:cNvPr id="523" name="Google Shape;523;p8"/>
+            <p:cNvPr id="525" name="Google Shape;525;p8"/>
             <p:cNvSpPr/>
             <p:nvPr/>
           </p:nvSpPr>
@@ -22968,7 +22968,7 @@
         </p:sp>
         <p:sp>
           <p:nvSpPr>
-            <p:cNvPr id="524" name="Google Shape;524;p8"/>
+            <p:cNvPr id="526" name="Google Shape;526;p8"/>
             <p:cNvSpPr txBox="1"/>
             <p:nvPr/>
           </p:nvSpPr>
@@ -23026,7 +23026,7 @@
       </p:grpSp>
       <p:grpSp>
         <p:nvGrpSpPr>
-          <p:cNvPr id="525" name="Google Shape;525;p8"/>
+          <p:cNvPr id="527" name="Google Shape;527;p8"/>
           <p:cNvGrpSpPr/>
           <p:nvPr/>
         </p:nvGrpSpPr>
@@ -23040,7 +23040,7 @@
         </p:grpSpPr>
         <p:sp>
           <p:nvSpPr>
-            <p:cNvPr id="526" name="Google Shape;526;p8"/>
+            <p:cNvPr id="528" name="Google Shape;528;p8"/>
             <p:cNvSpPr/>
             <p:nvPr/>
           </p:nvSpPr>
@@ -23131,7 +23131,7 @@
         </p:sp>
         <p:sp>
           <p:nvSpPr>
-            <p:cNvPr id="527" name="Google Shape;527;p8"/>
+            <p:cNvPr id="529" name="Google Shape;529;p8"/>
             <p:cNvSpPr txBox="1"/>
             <p:nvPr/>
           </p:nvSpPr>
@@ -23189,7 +23189,7 @@
       </p:grpSp>
       <p:pic>
         <p:nvPicPr>
-          <p:cNvPr id="528" name="Google Shape;528;p8"/>
+          <p:cNvPr id="530" name="Google Shape;530;p8"/>
           <p:cNvPicPr preferRelativeResize="0"/>
           <p:nvPr/>
         </p:nvPicPr>
@@ -23228,7 +23228,7 @@
   <p:cSld>
     <p:spTree>
       <p:nvGrpSpPr>
-        <p:cNvPr id="532" name="Shape 532"/>
+        <p:cNvPr id="534" name="Shape 534"/>
         <p:cNvGrpSpPr/>
         <p:nvPr/>
       </p:nvGrpSpPr>
@@ -23242,7 +23242,7 @@
       </p:grpSpPr>
       <p:sp>
         <p:nvSpPr>
-          <p:cNvPr id="533" name="Google Shape;533;p9"/>
+          <p:cNvPr id="535" name="Google Shape;535;p9"/>
           <p:cNvSpPr/>
           <p:nvPr/>
         </p:nvSpPr>
@@ -23326,7 +23326,7 @@
       </p:sp>
       <p:grpSp>
         <p:nvGrpSpPr>
-          <p:cNvPr id="534" name="Google Shape;534;p9"/>
+          <p:cNvPr id="536" name="Google Shape;536;p9"/>
           <p:cNvGrpSpPr/>
           <p:nvPr/>
         </p:nvGrpSpPr>
@@ -23340,7 +23340,7 @@
         </p:grpSpPr>
         <p:sp>
           <p:nvSpPr>
-            <p:cNvPr id="535" name="Google Shape;535;p9"/>
+            <p:cNvPr id="537" name="Google Shape;537;p9"/>
             <p:cNvSpPr/>
             <p:nvPr/>
           </p:nvSpPr>
@@ -23425,7 +23425,7 @@
         </p:sp>
         <p:sp>
           <p:nvSpPr>
-            <p:cNvPr id="536" name="Google Shape;536;p9"/>
+            <p:cNvPr id="538" name="Google Shape;538;p9"/>
             <p:cNvSpPr txBox="1"/>
             <p:nvPr/>
           </p:nvSpPr>
@@ -23483,7 +23483,7 @@
       </p:grpSp>
       <p:grpSp>
         <p:nvGrpSpPr>
-          <p:cNvPr id="537" name="Google Shape;537;p9"/>
+          <p:cNvPr id="539" name="Google Shape;539;p9"/>
           <p:cNvGrpSpPr/>
           <p:nvPr/>
         </p:nvGrpSpPr>
@@ -23497,7 +23497,7 @@
         </p:grpSpPr>
         <p:sp>
           <p:nvSpPr>
-            <p:cNvPr id="538" name="Google Shape;538;p9"/>
+            <p:cNvPr id="540" name="Google Shape;540;p9"/>
             <p:cNvSpPr/>
             <p:nvPr/>
           </p:nvSpPr>
@@ -23576,7 +23576,7 @@
         </p:sp>
         <p:sp>
           <p:nvSpPr>
-            <p:cNvPr id="539" name="Google Shape;539;p9"/>
+            <p:cNvPr id="541" name="Google Shape;541;p9"/>
             <p:cNvSpPr txBox="1"/>
             <p:nvPr/>
           </p:nvSpPr>
@@ -23634,7 +23634,7 @@
       </p:grpSp>
       <p:sp>
         <p:nvSpPr>
-          <p:cNvPr id="540" name="Google Shape;540;p9"/>
+          <p:cNvPr id="542" name="Google Shape;542;p9"/>
           <p:cNvSpPr/>
           <p:nvPr/>
         </p:nvSpPr>
@@ -23718,7 +23718,7 @@
       </p:sp>
       <p:sp>
         <p:nvSpPr>
-          <p:cNvPr id="541" name="Google Shape;541;p9"/>
+          <p:cNvPr id="543" name="Google Shape;543;p9"/>
           <p:cNvSpPr/>
           <p:nvPr/>
         </p:nvSpPr>
@@ -23814,7 +23814,7 @@
       </p:sp>
       <p:grpSp>
         <p:nvGrpSpPr>
-          <p:cNvPr id="542" name="Google Shape;542;p9"/>
+          <p:cNvPr id="544" name="Google Shape;544;p9"/>
           <p:cNvGrpSpPr/>
           <p:nvPr/>
         </p:nvGrpSpPr>
@@ -23828,7 +23828,7 @@
         </p:grpSpPr>
         <p:sp>
           <p:nvSpPr>
-            <p:cNvPr id="543" name="Google Shape;543;p9"/>
+            <p:cNvPr id="545" name="Google Shape;545;p9"/>
             <p:cNvSpPr/>
             <p:nvPr/>
           </p:nvSpPr>
@@ -23915,7 +23915,7 @@
         </p:sp>
         <p:sp>
           <p:nvSpPr>
-            <p:cNvPr id="544" name="Google Shape;544;p9"/>
+            <p:cNvPr id="546" name="Google Shape;546;p9"/>
             <p:cNvSpPr txBox="1"/>
             <p:nvPr/>
           </p:nvSpPr>
@@ -23973,7 +23973,7 @@
       </p:grpSp>
       <p:sp>
         <p:nvSpPr>
-          <p:cNvPr id="545" name="Google Shape;545;p9"/>
+          <p:cNvPr id="547" name="Google Shape;547;p9"/>
           <p:cNvSpPr/>
           <p:nvPr/>
         </p:nvSpPr>
@@ -24057,7 +24057,7 @@
       </p:sp>
       <p:sp>
         <p:nvSpPr>
-          <p:cNvPr id="546" name="Google Shape;546;p9"/>
+          <p:cNvPr id="548" name="Google Shape;548;p9"/>
           <p:cNvSpPr/>
           <p:nvPr/>
         </p:nvSpPr>
@@ -24141,7 +24141,7 @@
       </p:sp>
       <p:sp>
         <p:nvSpPr>
-          <p:cNvPr id="547" name="Google Shape;547;p9"/>
+          <p:cNvPr id="549" name="Google Shape;549;p9"/>
           <p:cNvSpPr/>
           <p:nvPr/>
         </p:nvSpPr>
@@ -24179,174 +24179,6 @@
             </a:blip>
             <a:stretch>
               <a:fillRect b="0" l="0" r="-21418" t="-20270"/>
-            </a:stretch>
-          </a:blipFill>
-          <a:ln>
-            <a:noFill/>
-          </a:ln>
-        </p:spPr>
-        <p:txBody>
-          <a:bodyPr anchorCtr="0" anchor="t" bIns="45700" lIns="91425" spcFirstLastPara="1" rIns="91425" wrap="square" tIns="45700">
-            <a:noAutofit/>
-          </a:bodyPr>
-          <a:lstStyle/>
-          <a:p>
-            <a:pPr indent="0" lvl="0" marL="0" marR="0" rtl="0" algn="l">
-              <a:lnSpc>
-                <a:spcPct val="100000"/>
-              </a:lnSpc>
-              <a:spcBef>
-                <a:spcPts val="0"/>
-              </a:spcBef>
-              <a:spcAft>
-                <a:spcPts val="0"/>
-              </a:spcAft>
-              <a:buClr>
-                <a:srgbClr val="000000"/>
-              </a:buClr>
-              <a:buSzPts val="1800"/>
-              <a:buFont typeface="Arial"/>
-              <a:buNone/>
-            </a:pPr>
-            <a:r>
-              <a:t/>
-            </a:r>
-            <a:endParaRPr b="0" i="0" sz="1800" u="none" cap="none" strike="noStrike">
-              <a:solidFill>
-                <a:schemeClr val="dk1"/>
-              </a:solidFill>
-              <a:latin typeface="Calibri"/>
-              <a:ea typeface="Calibri"/>
-              <a:cs typeface="Calibri"/>
-              <a:sym typeface="Calibri"/>
-            </a:endParaRPr>
-          </a:p>
-        </p:txBody>
-      </p:sp>
-      <p:sp>
-        <p:nvSpPr>
-          <p:cNvPr id="548" name="Google Shape;548;p9"/>
-          <p:cNvSpPr/>
-          <p:nvPr/>
-        </p:nvSpPr>
-        <p:spPr>
-          <a:xfrm>
-            <a:off x="12646769" y="9439275"/>
-            <a:ext cx="1533144" cy="289381"/>
-          </a:xfrm>
-          <a:custGeom>
-            <a:rect b="b" l="l" r="r" t="t"/>
-            <a:pathLst>
-              <a:path extrusionOk="0" h="289381" w="1533144">
-                <a:moveTo>
-                  <a:pt x="0" y="0"/>
-                </a:moveTo>
-                <a:lnTo>
-                  <a:pt x="1533144" y="0"/>
-                </a:lnTo>
-                <a:lnTo>
-                  <a:pt x="1533144" y="289381"/>
-                </a:lnTo>
-                <a:lnTo>
-                  <a:pt x="0" y="289381"/>
-                </a:lnTo>
-                <a:lnTo>
-                  <a:pt x="0" y="0"/>
-                </a:lnTo>
-                <a:close/>
-              </a:path>
-            </a:pathLst>
-          </a:custGeom>
-          <a:blipFill rotWithShape="1">
-            <a:blip r:embed="rId9">
-              <a:alphaModFix/>
-            </a:blip>
-            <a:stretch>
-              <a:fillRect b="0" l="0" r="0" t="0"/>
-            </a:stretch>
-          </a:blipFill>
-          <a:ln>
-            <a:noFill/>
-          </a:ln>
-        </p:spPr>
-        <p:txBody>
-          <a:bodyPr anchorCtr="0" anchor="t" bIns="45700" lIns="91425" spcFirstLastPara="1" rIns="91425" wrap="square" tIns="45700">
-            <a:noAutofit/>
-          </a:bodyPr>
-          <a:lstStyle/>
-          <a:p>
-            <a:pPr indent="0" lvl="0" marL="0" marR="0" rtl="0" algn="l">
-              <a:lnSpc>
-                <a:spcPct val="100000"/>
-              </a:lnSpc>
-              <a:spcBef>
-                <a:spcPts val="0"/>
-              </a:spcBef>
-              <a:spcAft>
-                <a:spcPts val="0"/>
-              </a:spcAft>
-              <a:buClr>
-                <a:srgbClr val="000000"/>
-              </a:buClr>
-              <a:buSzPts val="1800"/>
-              <a:buFont typeface="Arial"/>
-              <a:buNone/>
-            </a:pPr>
-            <a:r>
-              <a:t/>
-            </a:r>
-            <a:endParaRPr b="0" i="0" sz="1800" u="none" cap="none" strike="noStrike">
-              <a:solidFill>
-                <a:schemeClr val="dk1"/>
-              </a:solidFill>
-              <a:latin typeface="Calibri"/>
-              <a:ea typeface="Calibri"/>
-              <a:cs typeface="Calibri"/>
-              <a:sym typeface="Calibri"/>
-            </a:endParaRPr>
-          </a:p>
-        </p:txBody>
-      </p:sp>
-      <p:sp>
-        <p:nvSpPr>
-          <p:cNvPr id="549" name="Google Shape;549;p9"/>
-          <p:cNvSpPr/>
-          <p:nvPr/>
-        </p:nvSpPr>
-        <p:spPr>
-          <a:xfrm>
-            <a:off x="-2785432" y="9977430"/>
-            <a:ext cx="11434272" cy="1293877"/>
-          </a:xfrm>
-          <a:custGeom>
-            <a:rect b="b" l="l" r="r" t="t"/>
-            <a:pathLst>
-              <a:path extrusionOk="0" h="1293877" w="11434272">
-                <a:moveTo>
-                  <a:pt x="0" y="0"/>
-                </a:moveTo>
-                <a:lnTo>
-                  <a:pt x="11434272" y="0"/>
-                </a:lnTo>
-                <a:lnTo>
-                  <a:pt x="11434272" y="1293877"/>
-                </a:lnTo>
-                <a:lnTo>
-                  <a:pt x="0" y="1293877"/>
-                </a:lnTo>
-                <a:lnTo>
-                  <a:pt x="0" y="0"/>
-                </a:lnTo>
-                <a:close/>
-              </a:path>
-            </a:pathLst>
-          </a:custGeom>
-          <a:blipFill rotWithShape="1">
-            <a:blip r:embed="rId10">
-              <a:alphaModFix/>
-            </a:blip>
-            <a:stretch>
-              <a:fillRect b="0" l="0" r="0" t="-483192"/>
             </a:stretch>
           </a:blipFill>
           <a:ln>
@@ -24399,24 +24231,24 @@
         </p:nvSpPr>
         <p:spPr>
           <a:xfrm>
-            <a:off x="-508390" y="8777238"/>
-            <a:ext cx="1752990" cy="1509762"/>
+            <a:off x="12646769" y="9439275"/>
+            <a:ext cx="1533144" cy="289381"/>
           </a:xfrm>
           <a:custGeom>
             <a:rect b="b" l="l" r="r" t="t"/>
             <a:pathLst>
-              <a:path extrusionOk="0" h="1509762" w="1752990">
+              <a:path extrusionOk="0" h="289381" w="1533144">
                 <a:moveTo>
                   <a:pt x="0" y="0"/>
                 </a:moveTo>
                 <a:lnTo>
-                  <a:pt x="1752990" y="0"/>
-                </a:lnTo>
-                <a:lnTo>
-                  <a:pt x="1752990" y="1509762"/>
-                </a:lnTo>
-                <a:lnTo>
-                  <a:pt x="0" y="1509762"/>
+                  <a:pt x="1533144" y="0"/>
+                </a:lnTo>
+                <a:lnTo>
+                  <a:pt x="1533144" y="289381"/>
+                </a:lnTo>
+                <a:lnTo>
+                  <a:pt x="0" y="289381"/>
                 </a:lnTo>
                 <a:lnTo>
                   <a:pt x="0" y="0"/>
@@ -24426,7 +24258,7 @@
             </a:pathLst>
           </a:custGeom>
           <a:blipFill rotWithShape="1">
-            <a:blip r:embed="rId11">
+            <a:blip r:embed="rId9">
               <a:alphaModFix/>
             </a:blip>
             <a:stretch>
@@ -24482,25 +24314,25 @@
           <p:nvPr/>
         </p:nvSpPr>
         <p:spPr>
-          <a:xfrm rot="1399573">
-            <a:off x="1673507" y="4194905"/>
-            <a:ext cx="5215642" cy="1897190"/>
+          <a:xfrm>
+            <a:off x="-2785432" y="9977430"/>
+            <a:ext cx="11434272" cy="1293877"/>
           </a:xfrm>
           <a:custGeom>
             <a:rect b="b" l="l" r="r" t="t"/>
             <a:pathLst>
-              <a:path extrusionOk="0" h="1897190" w="5215642">
+              <a:path extrusionOk="0" h="1293877" w="11434272">
                 <a:moveTo>
                   <a:pt x="0" y="0"/>
                 </a:moveTo>
                 <a:lnTo>
-                  <a:pt x="5215641" y="0"/>
-                </a:lnTo>
-                <a:lnTo>
-                  <a:pt x="5215641" y="1897190"/>
-                </a:lnTo>
-                <a:lnTo>
-                  <a:pt x="0" y="1897190"/>
+                  <a:pt x="11434272" y="0"/>
+                </a:lnTo>
+                <a:lnTo>
+                  <a:pt x="11434272" y="1293877"/>
+                </a:lnTo>
+                <a:lnTo>
+                  <a:pt x="0" y="1293877"/>
                 </a:lnTo>
                 <a:lnTo>
                   <a:pt x="0" y="0"/>
@@ -24510,11 +24342,11 @@
             </a:pathLst>
           </a:custGeom>
           <a:blipFill rotWithShape="1">
-            <a:blip r:embed="rId12">
+            <a:blip r:embed="rId10">
               <a:alphaModFix/>
             </a:blip>
             <a:stretch>
-              <a:fillRect b="0" l="0" r="0" t="0"/>
+              <a:fillRect b="0" l="0" r="0" t="-483192"/>
             </a:stretch>
           </a:blipFill>
           <a:ln>
@@ -24567,24 +24399,24 @@
         </p:nvSpPr>
         <p:spPr>
           <a:xfrm>
-            <a:off x="17800265" y="9827062"/>
-            <a:ext cx="1992249" cy="4114800"/>
+            <a:off x="-508390" y="8777238"/>
+            <a:ext cx="1752990" cy="1509762"/>
           </a:xfrm>
           <a:custGeom>
             <a:rect b="b" l="l" r="r" t="t"/>
             <a:pathLst>
-              <a:path extrusionOk="0" h="4114800" w="1992249">
+              <a:path extrusionOk="0" h="1509762" w="1752990">
                 <a:moveTo>
                   <a:pt x="0" y="0"/>
                 </a:moveTo>
                 <a:lnTo>
-                  <a:pt x="1992249" y="0"/>
-                </a:lnTo>
-                <a:lnTo>
-                  <a:pt x="1992249" y="4114800"/>
-                </a:lnTo>
-                <a:lnTo>
-                  <a:pt x="0" y="4114800"/>
+                  <a:pt x="1752990" y="0"/>
+                </a:lnTo>
+                <a:lnTo>
+                  <a:pt x="1752990" y="1509762"/>
+                </a:lnTo>
+                <a:lnTo>
+                  <a:pt x="0" y="1509762"/>
                 </a:lnTo>
                 <a:lnTo>
                   <a:pt x="0" y="0"/>
@@ -24594,7 +24426,7 @@
             </a:pathLst>
           </a:custGeom>
           <a:blipFill rotWithShape="1">
-            <a:blip r:embed="rId13">
+            <a:blip r:embed="rId11">
               <a:alphaModFix/>
             </a:blip>
             <a:stretch>
@@ -24650,25 +24482,25 @@
           <p:nvPr/>
         </p:nvSpPr>
         <p:spPr>
-          <a:xfrm>
-            <a:off x="9296400" y="-1190948"/>
-            <a:ext cx="5956381" cy="2792054"/>
+          <a:xfrm rot="1399573">
+            <a:off x="1673507" y="4194905"/>
+            <a:ext cx="5215642" cy="1897190"/>
           </a:xfrm>
           <a:custGeom>
             <a:rect b="b" l="l" r="r" t="t"/>
             <a:pathLst>
-              <a:path extrusionOk="0" h="2792054" w="5956381">
+              <a:path extrusionOk="0" h="1897190" w="5215642">
                 <a:moveTo>
                   <a:pt x="0" y="0"/>
                 </a:moveTo>
                 <a:lnTo>
-                  <a:pt x="5956381" y="0"/>
-                </a:lnTo>
-                <a:lnTo>
-                  <a:pt x="5956381" y="2792053"/>
-                </a:lnTo>
-                <a:lnTo>
-                  <a:pt x="0" y="2792053"/>
+                  <a:pt x="5215641" y="0"/>
+                </a:lnTo>
+                <a:lnTo>
+                  <a:pt x="5215641" y="1897190"/>
+                </a:lnTo>
+                <a:lnTo>
+                  <a:pt x="0" y="1897190"/>
                 </a:lnTo>
                 <a:lnTo>
                   <a:pt x="0" y="0"/>
@@ -24678,8 +24510,8 @@
             </a:pathLst>
           </a:custGeom>
           <a:blipFill rotWithShape="1">
-            <a:blip r:embed="rId14">
-              <a:alphaModFix amt="25000"/>
+            <a:blip r:embed="rId12">
+              <a:alphaModFix/>
             </a:blip>
             <a:stretch>
               <a:fillRect b="0" l="0" r="0" t="0"/>
@@ -24735,6 +24567,174 @@
         </p:nvSpPr>
         <p:spPr>
           <a:xfrm>
+            <a:off x="17800265" y="9827062"/>
+            <a:ext cx="1992249" cy="4114800"/>
+          </a:xfrm>
+          <a:custGeom>
+            <a:rect b="b" l="l" r="r" t="t"/>
+            <a:pathLst>
+              <a:path extrusionOk="0" h="4114800" w="1992249">
+                <a:moveTo>
+                  <a:pt x="0" y="0"/>
+                </a:moveTo>
+                <a:lnTo>
+                  <a:pt x="1992249" y="0"/>
+                </a:lnTo>
+                <a:lnTo>
+                  <a:pt x="1992249" y="4114800"/>
+                </a:lnTo>
+                <a:lnTo>
+                  <a:pt x="0" y="4114800"/>
+                </a:lnTo>
+                <a:lnTo>
+                  <a:pt x="0" y="0"/>
+                </a:lnTo>
+                <a:close/>
+              </a:path>
+            </a:pathLst>
+          </a:custGeom>
+          <a:blipFill rotWithShape="1">
+            <a:blip r:embed="rId13">
+              <a:alphaModFix/>
+            </a:blip>
+            <a:stretch>
+              <a:fillRect b="0" l="0" r="0" t="0"/>
+            </a:stretch>
+          </a:blipFill>
+          <a:ln>
+            <a:noFill/>
+          </a:ln>
+        </p:spPr>
+        <p:txBody>
+          <a:bodyPr anchorCtr="0" anchor="t" bIns="45700" lIns="91425" spcFirstLastPara="1" rIns="91425" wrap="square" tIns="45700">
+            <a:noAutofit/>
+          </a:bodyPr>
+          <a:lstStyle/>
+          <a:p>
+            <a:pPr indent="0" lvl="0" marL="0" marR="0" rtl="0" algn="l">
+              <a:lnSpc>
+                <a:spcPct val="100000"/>
+              </a:lnSpc>
+              <a:spcBef>
+                <a:spcPts val="0"/>
+              </a:spcBef>
+              <a:spcAft>
+                <a:spcPts val="0"/>
+              </a:spcAft>
+              <a:buClr>
+                <a:srgbClr val="000000"/>
+              </a:buClr>
+              <a:buSzPts val="1800"/>
+              <a:buFont typeface="Arial"/>
+              <a:buNone/>
+            </a:pPr>
+            <a:r>
+              <a:t/>
+            </a:r>
+            <a:endParaRPr b="0" i="0" sz="1800" u="none" cap="none" strike="noStrike">
+              <a:solidFill>
+                <a:schemeClr val="dk1"/>
+              </a:solidFill>
+              <a:latin typeface="Calibri"/>
+              <a:ea typeface="Calibri"/>
+              <a:cs typeface="Calibri"/>
+              <a:sym typeface="Calibri"/>
+            </a:endParaRPr>
+          </a:p>
+        </p:txBody>
+      </p:sp>
+      <p:sp>
+        <p:nvSpPr>
+          <p:cNvPr id="555" name="Google Shape;555;p9"/>
+          <p:cNvSpPr/>
+          <p:nvPr/>
+        </p:nvSpPr>
+        <p:spPr>
+          <a:xfrm>
+            <a:off x="9296400" y="-1190948"/>
+            <a:ext cx="5956381" cy="2792054"/>
+          </a:xfrm>
+          <a:custGeom>
+            <a:rect b="b" l="l" r="r" t="t"/>
+            <a:pathLst>
+              <a:path extrusionOk="0" h="2792054" w="5956381">
+                <a:moveTo>
+                  <a:pt x="0" y="0"/>
+                </a:moveTo>
+                <a:lnTo>
+                  <a:pt x="5956381" y="0"/>
+                </a:lnTo>
+                <a:lnTo>
+                  <a:pt x="5956381" y="2792053"/>
+                </a:lnTo>
+                <a:lnTo>
+                  <a:pt x="0" y="2792053"/>
+                </a:lnTo>
+                <a:lnTo>
+                  <a:pt x="0" y="0"/>
+                </a:lnTo>
+                <a:close/>
+              </a:path>
+            </a:pathLst>
+          </a:custGeom>
+          <a:blipFill rotWithShape="1">
+            <a:blip r:embed="rId14">
+              <a:alphaModFix amt="25000"/>
+            </a:blip>
+            <a:stretch>
+              <a:fillRect b="0" l="0" r="0" t="0"/>
+            </a:stretch>
+          </a:blipFill>
+          <a:ln>
+            <a:noFill/>
+          </a:ln>
+        </p:spPr>
+        <p:txBody>
+          <a:bodyPr anchorCtr="0" anchor="t" bIns="45700" lIns="91425" spcFirstLastPara="1" rIns="91425" wrap="square" tIns="45700">
+            <a:noAutofit/>
+          </a:bodyPr>
+          <a:lstStyle/>
+          <a:p>
+            <a:pPr indent="0" lvl="0" marL="0" marR="0" rtl="0" algn="l">
+              <a:lnSpc>
+                <a:spcPct val="100000"/>
+              </a:lnSpc>
+              <a:spcBef>
+                <a:spcPts val="0"/>
+              </a:spcBef>
+              <a:spcAft>
+                <a:spcPts val="0"/>
+              </a:spcAft>
+              <a:buClr>
+                <a:srgbClr val="000000"/>
+              </a:buClr>
+              <a:buSzPts val="1800"/>
+              <a:buFont typeface="Arial"/>
+              <a:buNone/>
+            </a:pPr>
+            <a:r>
+              <a:t/>
+            </a:r>
+            <a:endParaRPr b="0" i="0" sz="1800" u="none" cap="none" strike="noStrike">
+              <a:solidFill>
+                <a:schemeClr val="dk1"/>
+              </a:solidFill>
+              <a:latin typeface="Calibri"/>
+              <a:ea typeface="Calibri"/>
+              <a:cs typeface="Calibri"/>
+              <a:sym typeface="Calibri"/>
+            </a:endParaRPr>
+          </a:p>
+        </p:txBody>
+      </p:sp>
+      <p:sp>
+        <p:nvSpPr>
+          <p:cNvPr id="556" name="Google Shape;556;p9"/>
+          <p:cNvSpPr/>
+          <p:nvPr/>
+        </p:nvSpPr>
+        <p:spPr>
+          <a:xfrm>
             <a:off x="11215851" y="3086100"/>
             <a:ext cx="4394980" cy="4114800"/>
           </a:xfrm>
@@ -24813,7 +24813,7 @@
       </p:sp>
       <p:sp>
         <p:nvSpPr>
-          <p:cNvPr id="555" name="Google Shape;555;p9"/>
+          <p:cNvPr id="557" name="Google Shape;557;p9"/>
           <p:cNvSpPr txBox="1"/>
           <p:nvPr/>
         </p:nvSpPr>
@@ -24879,7 +24879,7 @@
       </p:sp>
       <p:sp>
         <p:nvSpPr>
-          <p:cNvPr id="556" name="Google Shape;556;p9"/>
+          <p:cNvPr id="558" name="Google Shape;558;p9"/>
           <p:cNvSpPr txBox="1"/>
           <p:nvPr/>
         </p:nvSpPr>
@@ -24945,7 +24945,7 @@
       </p:sp>
       <p:sp>
         <p:nvSpPr>
-          <p:cNvPr id="557" name="Google Shape;557;p9"/>
+          <p:cNvPr id="559" name="Google Shape;559;p9"/>
           <p:cNvSpPr txBox="1"/>
           <p:nvPr/>
         </p:nvSpPr>
@@ -33334,7 +33334,7 @@
         </p:nvSpPr>
         <p:spPr>
           <a:xfrm flipH="1">
-            <a:off x="11028783" y="8196912"/>
+            <a:off x="11242833" y="7798737"/>
             <a:ext cx="6302261" cy="1892446"/>
           </a:xfrm>
           <a:custGeom>
@@ -33648,96 +33648,6 @@
       <p:sp>
         <p:nvSpPr>
           <p:cNvPr id="261" name="Google Shape;261;p5"/>
-          <p:cNvSpPr/>
-          <p:nvPr/>
-        </p:nvSpPr>
-        <p:spPr>
-          <a:xfrm>
-            <a:off x="9531663" y="1714500"/>
-            <a:ext cx="9972749" cy="7176934"/>
-          </a:xfrm>
-          <a:custGeom>
-            <a:rect b="b" l="l" r="r" t="t"/>
-            <a:pathLst>
-              <a:path extrusionOk="0" h="583663" w="811032">
-                <a:moveTo>
-                  <a:pt x="203200" y="0"/>
-                </a:moveTo>
-                <a:lnTo>
-                  <a:pt x="811032" y="0"/>
-                </a:lnTo>
-                <a:lnTo>
-                  <a:pt x="607832" y="583663"/>
-                </a:lnTo>
-                <a:lnTo>
-                  <a:pt x="0" y="583663"/>
-                </a:lnTo>
-                <a:lnTo>
-                  <a:pt x="203200" y="0"/>
-                </a:lnTo>
-                <a:close/>
-              </a:path>
-            </a:pathLst>
-          </a:custGeom>
-          <a:blipFill rotWithShape="1">
-            <a:blip r:embed="rId6">
-              <a:alphaModFix/>
-            </a:blip>
-            <a:stretch>
-              <a:fillRect b="0" l="-11769" r="-11769" t="0"/>
-            </a:stretch>
-          </a:blipFill>
-          <a:ln cap="sq" cmpd="sng" w="142875">
-            <a:solidFill>
-              <a:srgbClr val="FFFFFF"/>
-            </a:solidFill>
-            <a:prstDash val="solid"/>
-            <a:miter lim="8000"/>
-            <a:headEnd len="sm" w="sm" type="none"/>
-            <a:tailEnd len="sm" w="sm" type="none"/>
-          </a:ln>
-        </p:spPr>
-        <p:txBody>
-          <a:bodyPr anchorCtr="0" anchor="t" bIns="45700" lIns="91425" spcFirstLastPara="1" rIns="91425" wrap="square" tIns="45700">
-            <a:noAutofit/>
-          </a:bodyPr>
-          <a:lstStyle/>
-          <a:p>
-            <a:pPr indent="0" lvl="0" marL="0" marR="0" rtl="0" algn="l">
-              <a:lnSpc>
-                <a:spcPct val="100000"/>
-              </a:lnSpc>
-              <a:spcBef>
-                <a:spcPts val="0"/>
-              </a:spcBef>
-              <a:spcAft>
-                <a:spcPts val="0"/>
-              </a:spcAft>
-              <a:buClr>
-                <a:srgbClr val="000000"/>
-              </a:buClr>
-              <a:buSzPts val="1800"/>
-              <a:buFont typeface="Arial"/>
-              <a:buNone/>
-            </a:pPr>
-            <a:r>
-              <a:t/>
-            </a:r>
-            <a:endParaRPr b="0" i="0" sz="1800" u="none" cap="none" strike="noStrike">
-              <a:solidFill>
-                <a:schemeClr val="dk1"/>
-              </a:solidFill>
-              <a:latin typeface="Calibri"/>
-              <a:ea typeface="Calibri"/>
-              <a:cs typeface="Calibri"/>
-              <a:sym typeface="Calibri"/>
-            </a:endParaRPr>
-          </a:p>
-        </p:txBody>
-      </p:sp>
-      <p:sp>
-        <p:nvSpPr>
-          <p:cNvPr id="262" name="Google Shape;262;p5"/>
           <p:cNvSpPr txBox="1"/>
           <p:nvPr/>
         </p:nvSpPr>
@@ -33803,7 +33713,7 @@
       </p:sp>
       <p:sp>
         <p:nvSpPr>
-          <p:cNvPr id="263" name="Google Shape;263;p5"/>
+          <p:cNvPr id="262" name="Google Shape;262;p5"/>
           <p:cNvSpPr/>
           <p:nvPr/>
         </p:nvSpPr>
@@ -33836,7 +33746,7 @@
             </a:pathLst>
           </a:custGeom>
           <a:blipFill rotWithShape="1">
-            <a:blip r:embed="rId7">
+            <a:blip r:embed="rId6">
               <a:alphaModFix/>
             </a:blip>
             <a:stretch>
@@ -33887,7 +33797,7 @@
       </p:sp>
       <p:sp>
         <p:nvSpPr>
-          <p:cNvPr id="264" name="Google Shape;264;p5"/>
+          <p:cNvPr id="263" name="Google Shape;263;p5"/>
           <p:cNvSpPr txBox="1"/>
           <p:nvPr/>
         </p:nvSpPr>
@@ -33993,7 +33903,7 @@
       </p:sp>
       <p:grpSp>
         <p:nvGrpSpPr>
-          <p:cNvPr id="265" name="Google Shape;265;p5"/>
+          <p:cNvPr id="264" name="Google Shape;264;p5"/>
           <p:cNvGrpSpPr/>
           <p:nvPr/>
         </p:nvGrpSpPr>
@@ -34007,7 +33917,7 @@
         </p:grpSpPr>
         <p:sp>
           <p:nvSpPr>
-            <p:cNvPr id="266" name="Google Shape;266;p5"/>
+            <p:cNvPr id="265" name="Google Shape;265;p5"/>
             <p:cNvSpPr/>
             <p:nvPr/>
           </p:nvSpPr>
@@ -34092,7 +34002,7 @@
         </p:sp>
         <p:sp>
           <p:nvSpPr>
-            <p:cNvPr id="267" name="Google Shape;267;p5"/>
+            <p:cNvPr id="266" name="Google Shape;266;p5"/>
             <p:cNvSpPr txBox="1"/>
             <p:nvPr/>
           </p:nvSpPr>
@@ -34150,7 +34060,7 @@
       </p:grpSp>
       <p:grpSp>
         <p:nvGrpSpPr>
-          <p:cNvPr id="268" name="Google Shape;268;p5"/>
+          <p:cNvPr id="267" name="Google Shape;267;p5"/>
           <p:cNvGrpSpPr/>
           <p:nvPr/>
         </p:nvGrpSpPr>
@@ -34164,7 +34074,7 @@
         </p:grpSpPr>
         <p:sp>
           <p:nvSpPr>
-            <p:cNvPr id="269" name="Google Shape;269;p5"/>
+            <p:cNvPr id="268" name="Google Shape;268;p5"/>
             <p:cNvSpPr/>
             <p:nvPr/>
           </p:nvSpPr>
@@ -34255,7 +34165,7 @@
         </p:sp>
         <p:sp>
           <p:nvSpPr>
-            <p:cNvPr id="270" name="Google Shape;270;p5"/>
+            <p:cNvPr id="269" name="Google Shape;269;p5"/>
             <p:cNvSpPr txBox="1"/>
             <p:nvPr/>
           </p:nvSpPr>
@@ -34313,7 +34223,7 @@
       </p:grpSp>
       <p:sp>
         <p:nvSpPr>
-          <p:cNvPr id="271" name="Google Shape;271;p5"/>
+          <p:cNvPr id="270" name="Google Shape;270;p5"/>
           <p:cNvSpPr/>
           <p:nvPr/>
         </p:nvSpPr>
@@ -34346,11 +34256,95 @@
             </a:pathLst>
           </a:custGeom>
           <a:blipFill rotWithShape="1">
+            <a:blip r:embed="rId7">
+              <a:alphaModFix/>
+            </a:blip>
+            <a:stretch>
+              <a:fillRect b="0" l="0" r="0" t="-23479"/>
+            </a:stretch>
+          </a:blipFill>
+          <a:ln>
+            <a:noFill/>
+          </a:ln>
+        </p:spPr>
+        <p:txBody>
+          <a:bodyPr anchorCtr="0" anchor="t" bIns="45700" lIns="91425" spcFirstLastPara="1" rIns="91425" wrap="square" tIns="45700">
+            <a:noAutofit/>
+          </a:bodyPr>
+          <a:lstStyle/>
+          <a:p>
+            <a:pPr indent="0" lvl="0" marL="0" marR="0" rtl="0" algn="l">
+              <a:lnSpc>
+                <a:spcPct val="100000"/>
+              </a:lnSpc>
+              <a:spcBef>
+                <a:spcPts val="0"/>
+              </a:spcBef>
+              <a:spcAft>
+                <a:spcPts val="0"/>
+              </a:spcAft>
+              <a:buClr>
+                <a:srgbClr val="000000"/>
+              </a:buClr>
+              <a:buSzPts val="1800"/>
+              <a:buFont typeface="Arial"/>
+              <a:buNone/>
+            </a:pPr>
+            <a:r>
+              <a:t/>
+            </a:r>
+            <a:endParaRPr b="0" i="0" sz="1800" u="none" cap="none" strike="noStrike">
+              <a:solidFill>
+                <a:schemeClr val="dk1"/>
+              </a:solidFill>
+              <a:latin typeface="Calibri"/>
+              <a:ea typeface="Calibri"/>
+              <a:cs typeface="Calibri"/>
+              <a:sym typeface="Calibri"/>
+            </a:endParaRPr>
+          </a:p>
+        </p:txBody>
+      </p:sp>
+      <p:sp>
+        <p:nvSpPr>
+          <p:cNvPr id="271" name="Google Shape;271;p5"/>
+          <p:cNvSpPr/>
+          <p:nvPr/>
+        </p:nvSpPr>
+        <p:spPr>
+          <a:xfrm>
+            <a:off x="12646769" y="9439275"/>
+            <a:ext cx="1533144" cy="289381"/>
+          </a:xfrm>
+          <a:custGeom>
+            <a:rect b="b" l="l" r="r" t="t"/>
+            <a:pathLst>
+              <a:path extrusionOk="0" h="289381" w="1533144">
+                <a:moveTo>
+                  <a:pt x="0" y="0"/>
+                </a:moveTo>
+                <a:lnTo>
+                  <a:pt x="1533144" y="0"/>
+                </a:lnTo>
+                <a:lnTo>
+                  <a:pt x="1533144" y="289381"/>
+                </a:lnTo>
+                <a:lnTo>
+                  <a:pt x="0" y="289381"/>
+                </a:lnTo>
+                <a:lnTo>
+                  <a:pt x="0" y="0"/>
+                </a:lnTo>
+                <a:close/>
+              </a:path>
+            </a:pathLst>
+          </a:custGeom>
+          <a:blipFill rotWithShape="1">
             <a:blip r:embed="rId8">
               <a:alphaModFix/>
             </a:blip>
             <a:stretch>
-              <a:fillRect b="0" l="0" r="0" t="-23479"/>
+              <a:fillRect b="0" l="0" r="0" t="0"/>
             </a:stretch>
           </a:blipFill>
           <a:ln>
@@ -34403,24 +34397,24 @@
         </p:nvSpPr>
         <p:spPr>
           <a:xfrm>
-            <a:off x="12646769" y="9439275"/>
-            <a:ext cx="1533144" cy="289381"/>
+            <a:off x="-508390" y="8777238"/>
+            <a:ext cx="1752990" cy="1509762"/>
           </a:xfrm>
           <a:custGeom>
             <a:rect b="b" l="l" r="r" t="t"/>
             <a:pathLst>
-              <a:path extrusionOk="0" h="289381" w="1533144">
+              <a:path extrusionOk="0" h="1509762" w="1752990">
                 <a:moveTo>
                   <a:pt x="0" y="0"/>
                 </a:moveTo>
                 <a:lnTo>
-                  <a:pt x="1533144" y="0"/>
-                </a:lnTo>
-                <a:lnTo>
-                  <a:pt x="1533144" y="289381"/>
-                </a:lnTo>
-                <a:lnTo>
-                  <a:pt x="0" y="289381"/>
+                  <a:pt x="1752990" y="0"/>
+                </a:lnTo>
+                <a:lnTo>
+                  <a:pt x="1752990" y="1509762"/>
+                </a:lnTo>
+                <a:lnTo>
+                  <a:pt x="0" y="1509762"/>
                 </a:lnTo>
                 <a:lnTo>
                   <a:pt x="0" y="0"/>
@@ -34487,24 +34481,24 @@
         </p:nvSpPr>
         <p:spPr>
           <a:xfrm>
-            <a:off x="-508390" y="8777238"/>
-            <a:ext cx="1752990" cy="1509762"/>
+            <a:off x="16537781" y="-2032197"/>
+            <a:ext cx="3098800" cy="2738564"/>
           </a:xfrm>
           <a:custGeom>
             <a:rect b="b" l="l" r="r" t="t"/>
             <a:pathLst>
-              <a:path extrusionOk="0" h="1509762" w="1752990">
+              <a:path extrusionOk="0" h="2738564" w="3098800">
                 <a:moveTo>
                   <a:pt x="0" y="0"/>
                 </a:moveTo>
                 <a:lnTo>
-                  <a:pt x="1752990" y="0"/>
-                </a:lnTo>
-                <a:lnTo>
-                  <a:pt x="1752990" y="1509762"/>
-                </a:lnTo>
-                <a:lnTo>
-                  <a:pt x="0" y="1509762"/>
+                  <a:pt x="3098800" y="0"/>
+                </a:lnTo>
+                <a:lnTo>
+                  <a:pt x="3098800" y="2738564"/>
+                </a:lnTo>
+                <a:lnTo>
+                  <a:pt x="0" y="2738564"/>
                 </a:lnTo>
                 <a:lnTo>
                   <a:pt x="0" y="0"/>
@@ -34571,24 +34565,24 @@
         </p:nvSpPr>
         <p:spPr>
           <a:xfrm>
-            <a:off x="16537781" y="-2032197"/>
-            <a:ext cx="3098800" cy="2738564"/>
+            <a:off x="17800265" y="9827062"/>
+            <a:ext cx="1992249" cy="4114800"/>
           </a:xfrm>
           <a:custGeom>
             <a:rect b="b" l="l" r="r" t="t"/>
             <a:pathLst>
-              <a:path extrusionOk="0" h="2738564" w="3098800">
+              <a:path extrusionOk="0" h="4114800" w="1992249">
                 <a:moveTo>
                   <a:pt x="0" y="0"/>
                 </a:moveTo>
                 <a:lnTo>
-                  <a:pt x="3098800" y="0"/>
-                </a:lnTo>
-                <a:lnTo>
-                  <a:pt x="3098800" y="2738564"/>
-                </a:lnTo>
-                <a:lnTo>
-                  <a:pt x="0" y="2738564"/>
+                  <a:pt x="1992249" y="0"/>
+                </a:lnTo>
+                <a:lnTo>
+                  <a:pt x="1992249" y="4114800"/>
+                </a:lnTo>
+                <a:lnTo>
+                  <a:pt x="0" y="4114800"/>
                 </a:lnTo>
                 <a:lnTo>
                   <a:pt x="0" y="0"/>
@@ -34655,27 +34649,33 @@
         </p:nvSpPr>
         <p:spPr>
           <a:xfrm>
-            <a:off x="17800265" y="9827062"/>
-            <a:ext cx="1992249" cy="4114800"/>
+            <a:off x="9324347" y="1386782"/>
+            <a:ext cx="7408243" cy="6422722"/>
           </a:xfrm>
           <a:custGeom>
             <a:rect b="b" l="l" r="r" t="t"/>
             <a:pathLst>
-              <a:path extrusionOk="0" h="4114800" w="1992249">
+              <a:path extrusionOk="0" h="630606" w="727368">
                 <a:moveTo>
-                  <a:pt x="0" y="0"/>
+                  <a:pt x="727368" y="315303"/>
                 </a:moveTo>
                 <a:lnTo>
-                  <a:pt x="1992249" y="0"/>
-                </a:lnTo>
-                <a:lnTo>
-                  <a:pt x="1992249" y="4114800"/>
-                </a:lnTo>
-                <a:lnTo>
-                  <a:pt x="0" y="4114800"/>
-                </a:lnTo>
-                <a:lnTo>
-                  <a:pt x="0" y="0"/>
+                  <a:pt x="524168" y="630606"/>
+                </a:lnTo>
+                <a:lnTo>
+                  <a:pt x="203200" y="630606"/>
+                </a:lnTo>
+                <a:lnTo>
+                  <a:pt x="0" y="315303"/>
+                </a:lnTo>
+                <a:lnTo>
+                  <a:pt x="203200" y="0"/>
+                </a:lnTo>
+                <a:lnTo>
+                  <a:pt x="524168" y="0"/>
+                </a:lnTo>
+                <a:lnTo>
+                  <a:pt x="727368" y="315303"/>
                 </a:lnTo>
                 <a:close/>
               </a:path>
@@ -34686,11 +34686,17 @@
               <a:alphaModFix/>
             </a:blip>
             <a:stretch>
-              <a:fillRect b="0" l="0" r="0" t="0"/>
+              <a:fillRect b="0" l="-15019" r="-15019" t="0"/>
             </a:stretch>
           </a:blipFill>
-          <a:ln>
-            <a:noFill/>
+          <a:ln cap="sq" cmpd="sng" w="142875">
+            <a:solidFill>
+              <a:srgbClr val="FFFFFF"/>
+            </a:solidFill>
+            <a:prstDash val="solid"/>
+            <a:miter lim="8000"/>
+            <a:headEnd len="sm" w="sm" type="none"/>
+            <a:tailEnd len="sm" w="sm" type="none"/>
           </a:ln>
         </p:spPr>
         <p:txBody>
@@ -34731,6 +34737,34 @@
           </a:p>
         </p:txBody>
       </p:sp>
+      <p:pic>
+        <p:nvPicPr>
+          <p:cNvPr id="276" name="Google Shape;276;p5"/>
+          <p:cNvPicPr preferRelativeResize="0"/>
+          <p:nvPr/>
+        </p:nvPicPr>
+        <p:blipFill>
+          <a:blip r:embed="rId13">
+            <a:alphaModFix/>
+          </a:blip>
+          <a:stretch>
+            <a:fillRect/>
+          </a:stretch>
+        </p:blipFill>
+        <p:spPr>
+          <a:xfrm>
+            <a:off x="11289684" y="2125521"/>
+            <a:ext cx="3477569" cy="4629899"/>
+          </a:xfrm>
+          <a:prstGeom prst="rect">
+            <a:avLst/>
+          </a:prstGeom>
+          <a:noFill/>
+          <a:ln>
+            <a:noFill/>
+          </a:ln>
+        </p:spPr>
+      </p:pic>
     </p:spTree>
   </p:cSld>
   <p:clrMapOvr>
@@ -34744,7 +34778,7 @@
   <p:cSld>
     <p:spTree>
       <p:nvGrpSpPr>
-        <p:cNvPr id="279" name="Shape 279"/>
+        <p:cNvPr id="280" name="Shape 280"/>
         <p:cNvGrpSpPr/>
         <p:nvPr/>
       </p:nvGrpSpPr>
@@ -34758,7 +34792,7 @@
       </p:grpSpPr>
       <p:sp>
         <p:nvSpPr>
-          <p:cNvPr id="280" name="Google Shape;280;g3ba4c4b9c29_0_0"/>
+          <p:cNvPr id="281" name="Google Shape;281;g3ba4c4b9c29_0_0"/>
           <p:cNvSpPr/>
           <p:nvPr/>
         </p:nvSpPr>
@@ -34842,7 +34876,7 @@
       </p:sp>
       <p:grpSp>
         <p:nvGrpSpPr>
-          <p:cNvPr id="281" name="Google Shape;281;g3ba4c4b9c29_0_0"/>
+          <p:cNvPr id="282" name="Google Shape;282;g3ba4c4b9c29_0_0"/>
           <p:cNvGrpSpPr/>
           <p:nvPr/>
         </p:nvGrpSpPr>
@@ -34856,7 +34890,7 @@
         </p:grpSpPr>
         <p:sp>
           <p:nvSpPr>
-            <p:cNvPr id="282" name="Google Shape;282;g3ba4c4b9c29_0_0"/>
+            <p:cNvPr id="283" name="Google Shape;283;g3ba4c4b9c29_0_0"/>
             <p:cNvSpPr/>
             <p:nvPr/>
           </p:nvSpPr>
@@ -34935,7 +34969,7 @@
         </p:sp>
         <p:sp>
           <p:nvSpPr>
-            <p:cNvPr id="283" name="Google Shape;283;g3ba4c4b9c29_0_0"/>
+            <p:cNvPr id="284" name="Google Shape;284;g3ba4c4b9c29_0_0"/>
             <p:cNvSpPr txBox="1"/>
             <p:nvPr/>
           </p:nvSpPr>
@@ -34993,13 +35027,13 @@
       </p:grpSp>
       <p:sp>
         <p:nvSpPr>
-          <p:cNvPr id="284" name="Google Shape;284;g3ba4c4b9c29_0_0"/>
+          <p:cNvPr id="285" name="Google Shape;285;g3ba4c4b9c29_0_0"/>
           <p:cNvSpPr/>
           <p:nvPr/>
         </p:nvSpPr>
         <p:spPr>
           <a:xfrm flipH="1">
-            <a:off x="11028783" y="8196912"/>
+            <a:off x="10881508" y="8017787"/>
             <a:ext cx="6302261" cy="1892446"/>
           </a:xfrm>
           <a:custGeom>
@@ -35077,7 +35111,7 @@
       </p:sp>
       <p:grpSp>
         <p:nvGrpSpPr>
-          <p:cNvPr id="285" name="Google Shape;285;g3ba4c4b9c29_0_0"/>
+          <p:cNvPr id="286" name="Google Shape;286;g3ba4c4b9c29_0_0"/>
           <p:cNvGrpSpPr/>
           <p:nvPr/>
         </p:nvGrpSpPr>
@@ -35091,7 +35125,7 @@
         </p:grpSpPr>
         <p:sp>
           <p:nvSpPr>
-            <p:cNvPr id="286" name="Google Shape;286;g3ba4c4b9c29_0_0"/>
+            <p:cNvPr id="287" name="Google Shape;287;g3ba4c4b9c29_0_0"/>
             <p:cNvSpPr/>
             <p:nvPr/>
           </p:nvSpPr>
@@ -35170,7 +35204,7 @@
         </p:sp>
         <p:sp>
           <p:nvSpPr>
-            <p:cNvPr id="287" name="Google Shape;287;g3ba4c4b9c29_0_0"/>
+            <p:cNvPr id="288" name="Google Shape;288;g3ba4c4b9c29_0_0"/>
             <p:cNvSpPr txBox="1"/>
             <p:nvPr/>
           </p:nvSpPr>
@@ -35228,7 +35262,7 @@
       </p:grpSp>
       <p:sp>
         <p:nvSpPr>
-          <p:cNvPr id="288" name="Google Shape;288;g3ba4c4b9c29_0_0"/>
+          <p:cNvPr id="289" name="Google Shape;289;g3ba4c4b9c29_0_0"/>
           <p:cNvSpPr/>
           <p:nvPr/>
         </p:nvSpPr>
@@ -35270,96 +35304,6 @@
           </a:blipFill>
           <a:ln>
             <a:noFill/>
-          </a:ln>
-        </p:spPr>
-        <p:txBody>
-          <a:bodyPr anchorCtr="0" anchor="t" bIns="45700" lIns="91425" spcFirstLastPara="1" rIns="91425" wrap="square" tIns="45700">
-            <a:noAutofit/>
-          </a:bodyPr>
-          <a:lstStyle/>
-          <a:p>
-            <a:pPr indent="0" lvl="0" marL="0" marR="0" rtl="0" algn="l">
-              <a:lnSpc>
-                <a:spcPct val="100000"/>
-              </a:lnSpc>
-              <a:spcBef>
-                <a:spcPts val="0"/>
-              </a:spcBef>
-              <a:spcAft>
-                <a:spcPts val="0"/>
-              </a:spcAft>
-              <a:buClr>
-                <a:srgbClr val="000000"/>
-              </a:buClr>
-              <a:buSzPts val="1800"/>
-              <a:buFont typeface="Arial"/>
-              <a:buNone/>
-            </a:pPr>
-            <a:r>
-              <a:t/>
-            </a:r>
-            <a:endParaRPr b="0" i="0" sz="1800" u="none" cap="none" strike="noStrike">
-              <a:solidFill>
-                <a:schemeClr val="dk1"/>
-              </a:solidFill>
-              <a:latin typeface="Calibri"/>
-              <a:ea typeface="Calibri"/>
-              <a:cs typeface="Calibri"/>
-              <a:sym typeface="Calibri"/>
-            </a:endParaRPr>
-          </a:p>
-        </p:txBody>
-      </p:sp>
-      <p:sp>
-        <p:nvSpPr>
-          <p:cNvPr id="289" name="Google Shape;289;g3ba4c4b9c29_0_0"/>
-          <p:cNvSpPr/>
-          <p:nvPr/>
-        </p:nvSpPr>
-        <p:spPr>
-          <a:xfrm>
-            <a:off x="9531663" y="1714500"/>
-            <a:ext cx="9973666" cy="7177596"/>
-          </a:xfrm>
-          <a:custGeom>
-            <a:rect b="b" l="l" r="r" t="t"/>
-            <a:pathLst>
-              <a:path extrusionOk="0" h="583663" w="811032">
-                <a:moveTo>
-                  <a:pt x="203200" y="0"/>
-                </a:moveTo>
-                <a:lnTo>
-                  <a:pt x="811032" y="0"/>
-                </a:lnTo>
-                <a:lnTo>
-                  <a:pt x="607832" y="583663"/>
-                </a:lnTo>
-                <a:lnTo>
-                  <a:pt x="0" y="583663"/>
-                </a:lnTo>
-                <a:lnTo>
-                  <a:pt x="203200" y="0"/>
-                </a:lnTo>
-                <a:close/>
-              </a:path>
-            </a:pathLst>
-          </a:custGeom>
-          <a:blipFill rotWithShape="1">
-            <a:blip r:embed="rId6">
-              <a:alphaModFix/>
-            </a:blip>
-            <a:stretch>
-              <a:fillRect b="0" l="-11769" r="-11769" t="0"/>
-            </a:stretch>
-          </a:blipFill>
-          <a:ln cap="sq" cmpd="sng" w="142875">
-            <a:solidFill>
-              <a:srgbClr val="FFFFFF"/>
-            </a:solidFill>
-            <a:prstDash val="solid"/>
-            <a:miter lim="8000"/>
-            <a:headEnd len="sm" w="sm" type="none"/>
-            <a:tailEnd len="sm" w="sm" type="none"/>
           </a:ln>
         </p:spPr>
         <p:txBody>
@@ -35501,7 +35445,7 @@
             </a:pathLst>
           </a:custGeom>
           <a:blipFill rotWithShape="1">
-            <a:blip r:embed="rId7">
+            <a:blip r:embed="rId6">
               <a:alphaModFix/>
             </a:blip>
             <a:stretch>
@@ -35559,7 +35503,7 @@
         <p:spPr>
           <a:xfrm>
             <a:off x="1064975" y="3428992"/>
-            <a:ext cx="7746900" cy="3201600"/>
+            <a:ext cx="7746900" cy="4063500"/>
           </a:xfrm>
           <a:prstGeom prst="rect">
             <a:avLst/>
@@ -35735,6 +35679,46 @@
                 <a:sym typeface="Public Sans"/>
               </a:rPr>
               <a:t>Jira</a:t>
+            </a:r>
+            <a:endParaRPr b="1" sz="4000">
+              <a:solidFill>
+                <a:srgbClr val="1D1A1B"/>
+              </a:solidFill>
+              <a:latin typeface="Public Sans"/>
+              <a:ea typeface="Public Sans"/>
+              <a:cs typeface="Public Sans"/>
+              <a:sym typeface="Public Sans"/>
+            </a:endParaRPr>
+          </a:p>
+          <a:p>
+            <a:pPr indent="-356233" lvl="1" marL="496571" marR="0" rtl="0" algn="l">
+              <a:lnSpc>
+                <a:spcPct val="140000"/>
+              </a:lnSpc>
+              <a:spcBef>
+                <a:spcPts val="0"/>
+              </a:spcBef>
+              <a:spcAft>
+                <a:spcPts val="0"/>
+              </a:spcAft>
+              <a:buClr>
+                <a:srgbClr val="1D1A1B"/>
+              </a:buClr>
+              <a:buSzPts val="4000"/>
+              <a:buFont typeface="Public Sans"/>
+              <a:buChar char="•"/>
+            </a:pPr>
+            <a:r>
+              <a:rPr b="1" lang="en-US" sz="4000">
+                <a:solidFill>
+                  <a:srgbClr val="1D1A1B"/>
+                </a:solidFill>
+                <a:latin typeface="Public Sans"/>
+                <a:ea typeface="Public Sans"/>
+                <a:cs typeface="Public Sans"/>
+                <a:sym typeface="Public Sans"/>
+              </a:rPr>
+              <a:t>GitHub</a:t>
             </a:r>
             <a:endParaRPr b="1" sz="4000">
               <a:solidFill>
@@ -36103,7 +36087,7 @@
             </a:pathLst>
           </a:custGeom>
           <a:blipFill rotWithShape="1">
-            <a:blip r:embed="rId8">
+            <a:blip r:embed="rId7">
               <a:alphaModFix/>
             </a:blip>
             <a:stretch>
@@ -36187,7 +36171,7 @@
             </a:pathLst>
           </a:custGeom>
           <a:blipFill rotWithShape="1">
-            <a:blip r:embed="rId9">
+            <a:blip r:embed="rId8">
               <a:alphaModFix/>
             </a:blip>
             <a:stretch>
@@ -36271,7 +36255,7 @@
             </a:pathLst>
           </a:custGeom>
           <a:blipFill rotWithShape="1">
-            <a:blip r:embed="rId10">
+            <a:blip r:embed="rId9">
               <a:alphaModFix/>
             </a:blip>
             <a:stretch>
@@ -36355,7 +36339,7 @@
             </a:pathLst>
           </a:custGeom>
           <a:blipFill rotWithShape="1">
-            <a:blip r:embed="rId11">
+            <a:blip r:embed="rId10">
               <a:alphaModFix/>
             </a:blip>
             <a:stretch>
@@ -36439,7 +36423,7 @@
             </a:pathLst>
           </a:custGeom>
           <a:blipFill rotWithShape="1">
-            <a:blip r:embed="rId12">
+            <a:blip r:embed="rId11">
               <a:alphaModFix/>
             </a:blip>
             <a:stretch>
@@ -36488,6 +36472,130 @@
           </a:p>
         </p:txBody>
       </p:sp>
+      <p:sp>
+        <p:nvSpPr>
+          <p:cNvPr id="304" name="Google Shape;304;g3ba4c4b9c29_0_0"/>
+          <p:cNvSpPr/>
+          <p:nvPr/>
+        </p:nvSpPr>
+        <p:spPr>
+          <a:xfrm>
+            <a:off x="8811872" y="1509707"/>
+            <a:ext cx="7408243" cy="6422722"/>
+          </a:xfrm>
+          <a:custGeom>
+            <a:rect b="b" l="l" r="r" t="t"/>
+            <a:pathLst>
+              <a:path extrusionOk="0" h="630606" w="727368">
+                <a:moveTo>
+                  <a:pt x="727368" y="315303"/>
+                </a:moveTo>
+                <a:lnTo>
+                  <a:pt x="524168" y="630606"/>
+                </a:lnTo>
+                <a:lnTo>
+                  <a:pt x="203200" y="630606"/>
+                </a:lnTo>
+                <a:lnTo>
+                  <a:pt x="0" y="315303"/>
+                </a:lnTo>
+                <a:lnTo>
+                  <a:pt x="203200" y="0"/>
+                </a:lnTo>
+                <a:lnTo>
+                  <a:pt x="524168" y="0"/>
+                </a:lnTo>
+                <a:lnTo>
+                  <a:pt x="727368" y="315303"/>
+                </a:lnTo>
+                <a:close/>
+              </a:path>
+            </a:pathLst>
+          </a:custGeom>
+          <a:blipFill rotWithShape="1">
+            <a:blip r:embed="rId12">
+              <a:alphaModFix/>
+            </a:blip>
+            <a:stretch>
+              <a:fillRect b="0" l="-15019" r="-15019" t="0"/>
+            </a:stretch>
+          </a:blipFill>
+          <a:ln cap="sq" cmpd="sng" w="142875">
+            <a:solidFill>
+              <a:srgbClr val="FFFFFF"/>
+            </a:solidFill>
+            <a:prstDash val="solid"/>
+            <a:miter lim="8000"/>
+            <a:headEnd len="sm" w="sm" type="none"/>
+            <a:tailEnd len="sm" w="sm" type="none"/>
+          </a:ln>
+        </p:spPr>
+        <p:txBody>
+          <a:bodyPr anchorCtr="0" anchor="t" bIns="45700" lIns="91425" spcFirstLastPara="1" rIns="91425" wrap="square" tIns="45700">
+            <a:noAutofit/>
+          </a:bodyPr>
+          <a:lstStyle/>
+          <a:p>
+            <a:pPr indent="0" lvl="0" marL="0" marR="0" rtl="0" algn="l">
+              <a:lnSpc>
+                <a:spcPct val="100000"/>
+              </a:lnSpc>
+              <a:spcBef>
+                <a:spcPts val="0"/>
+              </a:spcBef>
+              <a:spcAft>
+                <a:spcPts val="0"/>
+              </a:spcAft>
+              <a:buClr>
+                <a:srgbClr val="000000"/>
+              </a:buClr>
+              <a:buSzPts val="1800"/>
+              <a:buFont typeface="Arial"/>
+              <a:buNone/>
+            </a:pPr>
+            <a:r>
+              <a:t/>
+            </a:r>
+            <a:endParaRPr b="0" i="0" sz="1800" u="none" cap="none" strike="noStrike">
+              <a:solidFill>
+                <a:schemeClr val="dk1"/>
+              </a:solidFill>
+              <a:latin typeface="Calibri"/>
+              <a:ea typeface="Calibri"/>
+              <a:cs typeface="Calibri"/>
+              <a:sym typeface="Calibri"/>
+            </a:endParaRPr>
+          </a:p>
+        </p:txBody>
+      </p:sp>
+      <p:pic>
+        <p:nvPicPr>
+          <p:cNvPr id="305" name="Google Shape;305;g3ba4c4b9c29_0_0"/>
+          <p:cNvPicPr preferRelativeResize="0"/>
+          <p:nvPr/>
+        </p:nvPicPr>
+        <p:blipFill>
+          <a:blip r:embed="rId13">
+            <a:alphaModFix/>
+          </a:blip>
+          <a:stretch>
+            <a:fillRect/>
+          </a:stretch>
+        </p:blipFill>
+        <p:spPr>
+          <a:xfrm>
+            <a:off x="10881499" y="2888824"/>
+            <a:ext cx="3534175" cy="3664475"/>
+          </a:xfrm>
+          <a:prstGeom prst="rect">
+            <a:avLst/>
+          </a:prstGeom>
+          <a:noFill/>
+          <a:ln>
+            <a:noFill/>
+          </a:ln>
+        </p:spPr>
+      </p:pic>
     </p:spTree>
   </p:cSld>
   <p:clrMapOvr>
@@ -36501,7 +36609,7 @@
   <p:cSld>
     <p:spTree>
       <p:nvGrpSpPr>
-        <p:cNvPr id="307" name="Shape 307"/>
+        <p:cNvPr id="309" name="Shape 309"/>
         <p:cNvGrpSpPr/>
         <p:nvPr/>
       </p:nvGrpSpPr>
@@ -36515,7 +36623,7 @@
       </p:grpSpPr>
       <p:sp>
         <p:nvSpPr>
-          <p:cNvPr id="308" name="Google Shape;308;p6"/>
+          <p:cNvPr id="310" name="Google Shape;310;p6"/>
           <p:cNvSpPr/>
           <p:nvPr/>
         </p:nvSpPr>
@@ -36599,7 +36707,7 @@
       </p:sp>
       <p:grpSp>
         <p:nvGrpSpPr>
-          <p:cNvPr id="309" name="Google Shape;309;p6"/>
+          <p:cNvPr id="311" name="Google Shape;311;p6"/>
           <p:cNvGrpSpPr/>
           <p:nvPr/>
         </p:nvGrpSpPr>
@@ -36613,7 +36721,7 @@
         </p:grpSpPr>
         <p:sp>
           <p:nvSpPr>
-            <p:cNvPr id="310" name="Google Shape;310;p6"/>
+            <p:cNvPr id="312" name="Google Shape;312;p6"/>
             <p:cNvSpPr/>
             <p:nvPr/>
           </p:nvSpPr>
@@ -36692,7 +36800,7 @@
         </p:sp>
         <p:sp>
           <p:nvSpPr>
-            <p:cNvPr id="311" name="Google Shape;311;p6"/>
+            <p:cNvPr id="313" name="Google Shape;313;p6"/>
             <p:cNvSpPr txBox="1"/>
             <p:nvPr/>
           </p:nvSpPr>
@@ -36750,7 +36858,7 @@
       </p:grpSp>
       <p:grpSp>
         <p:nvGrpSpPr>
-          <p:cNvPr id="312" name="Google Shape;312;p6"/>
+          <p:cNvPr id="314" name="Google Shape;314;p6"/>
           <p:cNvGrpSpPr/>
           <p:nvPr/>
         </p:nvGrpSpPr>
@@ -36764,7 +36872,7 @@
         </p:grpSpPr>
         <p:sp>
           <p:nvSpPr>
-            <p:cNvPr id="313" name="Google Shape;313;p6"/>
+            <p:cNvPr id="315" name="Google Shape;315;p6"/>
             <p:cNvSpPr/>
             <p:nvPr/>
           </p:nvSpPr>
@@ -36843,7 +36951,7 @@
         </p:sp>
         <p:sp>
           <p:nvSpPr>
-            <p:cNvPr id="314" name="Google Shape;314;p6"/>
+            <p:cNvPr id="316" name="Google Shape;316;p6"/>
             <p:cNvSpPr txBox="1"/>
             <p:nvPr/>
           </p:nvSpPr>
@@ -36901,7 +37009,7 @@
       </p:grpSp>
       <p:sp>
         <p:nvSpPr>
-          <p:cNvPr id="315" name="Google Shape;315;p6"/>
+          <p:cNvPr id="317" name="Google Shape;317;p6"/>
           <p:cNvSpPr/>
           <p:nvPr/>
         </p:nvSpPr>
@@ -36985,7 +37093,7 @@
       </p:sp>
       <p:sp>
         <p:nvSpPr>
-          <p:cNvPr id="316" name="Google Shape;316;p6"/>
+          <p:cNvPr id="318" name="Google Shape;318;p6"/>
           <p:cNvSpPr/>
           <p:nvPr/>
         </p:nvSpPr>
@@ -37081,7 +37189,7 @@
       </p:sp>
       <p:sp>
         <p:nvSpPr>
-          <p:cNvPr id="317" name="Google Shape;317;p6"/>
+          <p:cNvPr id="319" name="Google Shape;319;p6"/>
           <p:cNvSpPr/>
           <p:nvPr/>
         </p:nvSpPr>
@@ -37115,174 +37223,6 @@
           </a:custGeom>
           <a:blipFill rotWithShape="1">
             <a:blip r:embed="rId4">
-              <a:alphaModFix/>
-            </a:blip>
-            <a:stretch>
-              <a:fillRect b="0" l="0" r="0" t="0"/>
-            </a:stretch>
-          </a:blipFill>
-          <a:ln>
-            <a:noFill/>
-          </a:ln>
-        </p:spPr>
-        <p:txBody>
-          <a:bodyPr anchorCtr="0" anchor="t" bIns="45700" lIns="91425" spcFirstLastPara="1" rIns="91425" wrap="square" tIns="45700">
-            <a:noAutofit/>
-          </a:bodyPr>
-          <a:lstStyle/>
-          <a:p>
-            <a:pPr indent="0" lvl="0" marL="0" marR="0" rtl="0" algn="l">
-              <a:lnSpc>
-                <a:spcPct val="100000"/>
-              </a:lnSpc>
-              <a:spcBef>
-                <a:spcPts val="0"/>
-              </a:spcBef>
-              <a:spcAft>
-                <a:spcPts val="0"/>
-              </a:spcAft>
-              <a:buClr>
-                <a:srgbClr val="000000"/>
-              </a:buClr>
-              <a:buSzPts val="1800"/>
-              <a:buFont typeface="Arial"/>
-              <a:buNone/>
-            </a:pPr>
-            <a:r>
-              <a:t/>
-            </a:r>
-            <a:endParaRPr b="0" i="0" sz="1800" u="none" cap="none" strike="noStrike">
-              <a:solidFill>
-                <a:schemeClr val="dk1"/>
-              </a:solidFill>
-              <a:latin typeface="Calibri"/>
-              <a:ea typeface="Calibri"/>
-              <a:cs typeface="Calibri"/>
-              <a:sym typeface="Calibri"/>
-            </a:endParaRPr>
-          </a:p>
-        </p:txBody>
-      </p:sp>
-      <p:sp>
-        <p:nvSpPr>
-          <p:cNvPr id="318" name="Google Shape;318;p6"/>
-          <p:cNvSpPr/>
-          <p:nvPr/>
-        </p:nvSpPr>
-        <p:spPr>
-          <a:xfrm>
-            <a:off x="8075981" y="3506954"/>
-            <a:ext cx="566367" cy="566367"/>
-          </a:xfrm>
-          <a:custGeom>
-            <a:rect b="b" l="l" r="r" t="t"/>
-            <a:pathLst>
-              <a:path extrusionOk="0" h="566367" w="566367">
-                <a:moveTo>
-                  <a:pt x="0" y="0"/>
-                </a:moveTo>
-                <a:lnTo>
-                  <a:pt x="566367" y="0"/>
-                </a:lnTo>
-                <a:lnTo>
-                  <a:pt x="566367" y="566367"/>
-                </a:lnTo>
-                <a:lnTo>
-                  <a:pt x="0" y="566367"/>
-                </a:lnTo>
-                <a:lnTo>
-                  <a:pt x="0" y="0"/>
-                </a:lnTo>
-                <a:close/>
-              </a:path>
-            </a:pathLst>
-          </a:custGeom>
-          <a:blipFill rotWithShape="1">
-            <a:blip r:embed="rId6">
-              <a:alphaModFix/>
-            </a:blip>
-            <a:stretch>
-              <a:fillRect b="0" l="0" r="0" t="0"/>
-            </a:stretch>
-          </a:blipFill>
-          <a:ln>
-            <a:noFill/>
-          </a:ln>
-        </p:spPr>
-        <p:txBody>
-          <a:bodyPr anchorCtr="0" anchor="t" bIns="45700" lIns="91425" spcFirstLastPara="1" rIns="91425" wrap="square" tIns="45700">
-            <a:noAutofit/>
-          </a:bodyPr>
-          <a:lstStyle/>
-          <a:p>
-            <a:pPr indent="0" lvl="0" marL="0" marR="0" rtl="0" algn="l">
-              <a:lnSpc>
-                <a:spcPct val="100000"/>
-              </a:lnSpc>
-              <a:spcBef>
-                <a:spcPts val="0"/>
-              </a:spcBef>
-              <a:spcAft>
-                <a:spcPts val="0"/>
-              </a:spcAft>
-              <a:buClr>
-                <a:srgbClr val="000000"/>
-              </a:buClr>
-              <a:buSzPts val="1800"/>
-              <a:buFont typeface="Arial"/>
-              <a:buNone/>
-            </a:pPr>
-            <a:r>
-              <a:t/>
-            </a:r>
-            <a:endParaRPr b="0" i="0" sz="1800" u="none" cap="none" strike="noStrike">
-              <a:solidFill>
-                <a:schemeClr val="dk1"/>
-              </a:solidFill>
-              <a:latin typeface="Calibri"/>
-              <a:ea typeface="Calibri"/>
-              <a:cs typeface="Calibri"/>
-              <a:sym typeface="Calibri"/>
-            </a:endParaRPr>
-          </a:p>
-        </p:txBody>
-      </p:sp>
-      <p:sp>
-        <p:nvSpPr>
-          <p:cNvPr id="319" name="Google Shape;319;p6"/>
-          <p:cNvSpPr/>
-          <p:nvPr/>
-        </p:nvSpPr>
-        <p:spPr>
-          <a:xfrm>
-            <a:off x="8075981" y="5253230"/>
-            <a:ext cx="566367" cy="566367"/>
-          </a:xfrm>
-          <a:custGeom>
-            <a:rect b="b" l="l" r="r" t="t"/>
-            <a:pathLst>
-              <a:path extrusionOk="0" h="566367" w="566367">
-                <a:moveTo>
-                  <a:pt x="0" y="0"/>
-                </a:moveTo>
-                <a:lnTo>
-                  <a:pt x="566367" y="0"/>
-                </a:lnTo>
-                <a:lnTo>
-                  <a:pt x="566367" y="566367"/>
-                </a:lnTo>
-                <a:lnTo>
-                  <a:pt x="0" y="566367"/>
-                </a:lnTo>
-                <a:lnTo>
-                  <a:pt x="0" y="0"/>
-                </a:lnTo>
-                <a:close/>
-              </a:path>
-            </a:pathLst>
-          </a:custGeom>
-          <a:blipFill rotWithShape="1">
-            <a:blip r:embed="rId6">
               <a:alphaModFix/>
             </a:blip>
             <a:stretch>
@@ -37339,7 +37279,7 @@
         </p:nvSpPr>
         <p:spPr>
           <a:xfrm>
-            <a:off x="8075981" y="7000697"/>
+            <a:off x="8075981" y="3506954"/>
             <a:ext cx="566367" cy="566367"/>
           </a:xfrm>
           <a:custGeom>
@@ -37415,9 +37355,177 @@
           </a:p>
         </p:txBody>
       </p:sp>
+      <p:sp>
+        <p:nvSpPr>
+          <p:cNvPr id="321" name="Google Shape;321;p6"/>
+          <p:cNvSpPr/>
+          <p:nvPr/>
+        </p:nvSpPr>
+        <p:spPr>
+          <a:xfrm>
+            <a:off x="8075981" y="5253230"/>
+            <a:ext cx="566367" cy="566367"/>
+          </a:xfrm>
+          <a:custGeom>
+            <a:rect b="b" l="l" r="r" t="t"/>
+            <a:pathLst>
+              <a:path extrusionOk="0" h="566367" w="566367">
+                <a:moveTo>
+                  <a:pt x="0" y="0"/>
+                </a:moveTo>
+                <a:lnTo>
+                  <a:pt x="566367" y="0"/>
+                </a:lnTo>
+                <a:lnTo>
+                  <a:pt x="566367" y="566367"/>
+                </a:lnTo>
+                <a:lnTo>
+                  <a:pt x="0" y="566367"/>
+                </a:lnTo>
+                <a:lnTo>
+                  <a:pt x="0" y="0"/>
+                </a:lnTo>
+                <a:close/>
+              </a:path>
+            </a:pathLst>
+          </a:custGeom>
+          <a:blipFill rotWithShape="1">
+            <a:blip r:embed="rId6">
+              <a:alphaModFix/>
+            </a:blip>
+            <a:stretch>
+              <a:fillRect b="0" l="0" r="0" t="0"/>
+            </a:stretch>
+          </a:blipFill>
+          <a:ln>
+            <a:noFill/>
+          </a:ln>
+        </p:spPr>
+        <p:txBody>
+          <a:bodyPr anchorCtr="0" anchor="t" bIns="45700" lIns="91425" spcFirstLastPara="1" rIns="91425" wrap="square" tIns="45700">
+            <a:noAutofit/>
+          </a:bodyPr>
+          <a:lstStyle/>
+          <a:p>
+            <a:pPr indent="0" lvl="0" marL="0" marR="0" rtl="0" algn="l">
+              <a:lnSpc>
+                <a:spcPct val="100000"/>
+              </a:lnSpc>
+              <a:spcBef>
+                <a:spcPts val="0"/>
+              </a:spcBef>
+              <a:spcAft>
+                <a:spcPts val="0"/>
+              </a:spcAft>
+              <a:buClr>
+                <a:srgbClr val="000000"/>
+              </a:buClr>
+              <a:buSzPts val="1800"/>
+              <a:buFont typeface="Arial"/>
+              <a:buNone/>
+            </a:pPr>
+            <a:r>
+              <a:t/>
+            </a:r>
+            <a:endParaRPr b="0" i="0" sz="1800" u="none" cap="none" strike="noStrike">
+              <a:solidFill>
+                <a:schemeClr val="dk1"/>
+              </a:solidFill>
+              <a:latin typeface="Calibri"/>
+              <a:ea typeface="Calibri"/>
+              <a:cs typeface="Calibri"/>
+              <a:sym typeface="Calibri"/>
+            </a:endParaRPr>
+          </a:p>
+        </p:txBody>
+      </p:sp>
+      <p:sp>
+        <p:nvSpPr>
+          <p:cNvPr id="322" name="Google Shape;322;p6"/>
+          <p:cNvSpPr/>
+          <p:nvPr/>
+        </p:nvSpPr>
+        <p:spPr>
+          <a:xfrm>
+            <a:off x="8075981" y="7000697"/>
+            <a:ext cx="566367" cy="566367"/>
+          </a:xfrm>
+          <a:custGeom>
+            <a:rect b="b" l="l" r="r" t="t"/>
+            <a:pathLst>
+              <a:path extrusionOk="0" h="566367" w="566367">
+                <a:moveTo>
+                  <a:pt x="0" y="0"/>
+                </a:moveTo>
+                <a:lnTo>
+                  <a:pt x="566367" y="0"/>
+                </a:lnTo>
+                <a:lnTo>
+                  <a:pt x="566367" y="566367"/>
+                </a:lnTo>
+                <a:lnTo>
+                  <a:pt x="0" y="566367"/>
+                </a:lnTo>
+                <a:lnTo>
+                  <a:pt x="0" y="0"/>
+                </a:lnTo>
+                <a:close/>
+              </a:path>
+            </a:pathLst>
+          </a:custGeom>
+          <a:blipFill rotWithShape="1">
+            <a:blip r:embed="rId6">
+              <a:alphaModFix/>
+            </a:blip>
+            <a:stretch>
+              <a:fillRect b="0" l="0" r="0" t="0"/>
+            </a:stretch>
+          </a:blipFill>
+          <a:ln>
+            <a:noFill/>
+          </a:ln>
+        </p:spPr>
+        <p:txBody>
+          <a:bodyPr anchorCtr="0" anchor="t" bIns="45700" lIns="91425" spcFirstLastPara="1" rIns="91425" wrap="square" tIns="45700">
+            <a:noAutofit/>
+          </a:bodyPr>
+          <a:lstStyle/>
+          <a:p>
+            <a:pPr indent="0" lvl="0" marL="0" marR="0" rtl="0" algn="l">
+              <a:lnSpc>
+                <a:spcPct val="100000"/>
+              </a:lnSpc>
+              <a:spcBef>
+                <a:spcPts val="0"/>
+              </a:spcBef>
+              <a:spcAft>
+                <a:spcPts val="0"/>
+              </a:spcAft>
+              <a:buClr>
+                <a:srgbClr val="000000"/>
+              </a:buClr>
+              <a:buSzPts val="1800"/>
+              <a:buFont typeface="Arial"/>
+              <a:buNone/>
+            </a:pPr>
+            <a:r>
+              <a:t/>
+            </a:r>
+            <a:endParaRPr b="0" i="0" sz="1800" u="none" cap="none" strike="noStrike">
+              <a:solidFill>
+                <a:schemeClr val="dk1"/>
+              </a:solidFill>
+              <a:latin typeface="Calibri"/>
+              <a:ea typeface="Calibri"/>
+              <a:cs typeface="Calibri"/>
+              <a:sym typeface="Calibri"/>
+            </a:endParaRPr>
+          </a:p>
+        </p:txBody>
+      </p:sp>
       <p:grpSp>
         <p:nvGrpSpPr>
-          <p:cNvPr id="321" name="Google Shape;321;p6"/>
+          <p:cNvPr id="323" name="Google Shape;323;p6"/>
           <p:cNvGrpSpPr/>
           <p:nvPr/>
         </p:nvGrpSpPr>
@@ -37431,7 +37539,7 @@
         </p:grpSpPr>
         <p:sp>
           <p:nvSpPr>
-            <p:cNvPr id="322" name="Google Shape;322;p6"/>
+            <p:cNvPr id="324" name="Google Shape;324;p6"/>
             <p:cNvSpPr/>
             <p:nvPr/>
           </p:nvSpPr>
@@ -37524,7 +37632,7 @@
         </p:sp>
         <p:sp>
           <p:nvSpPr>
-            <p:cNvPr id="323" name="Google Shape;323;p6"/>
+            <p:cNvPr id="325" name="Google Shape;325;p6"/>
             <p:cNvSpPr txBox="1"/>
             <p:nvPr/>
           </p:nvSpPr>
@@ -37582,7 +37690,7 @@
       </p:grpSp>
       <p:grpSp>
         <p:nvGrpSpPr>
-          <p:cNvPr id="324" name="Google Shape;324;p6"/>
+          <p:cNvPr id="326" name="Google Shape;326;p6"/>
           <p:cNvGrpSpPr/>
           <p:nvPr/>
         </p:nvGrpSpPr>
@@ -37596,7 +37704,7 @@
         </p:grpSpPr>
         <p:sp>
           <p:nvSpPr>
-            <p:cNvPr id="325" name="Google Shape;325;p6"/>
+            <p:cNvPr id="327" name="Google Shape;327;p6"/>
             <p:cNvSpPr/>
             <p:nvPr/>
           </p:nvSpPr>
@@ -37689,7 +37797,7 @@
         </p:sp>
         <p:sp>
           <p:nvSpPr>
-            <p:cNvPr id="326" name="Google Shape;326;p6"/>
+            <p:cNvPr id="328" name="Google Shape;328;p6"/>
             <p:cNvSpPr txBox="1"/>
             <p:nvPr/>
           </p:nvSpPr>
@@ -37747,7 +37855,7 @@
       </p:grpSp>
       <p:grpSp>
         <p:nvGrpSpPr>
-          <p:cNvPr id="327" name="Google Shape;327;p6"/>
+          <p:cNvPr id="329" name="Google Shape;329;p6"/>
           <p:cNvGrpSpPr/>
           <p:nvPr/>
         </p:nvGrpSpPr>
@@ -37761,7 +37869,7 @@
         </p:grpSpPr>
         <p:sp>
           <p:nvSpPr>
-            <p:cNvPr id="328" name="Google Shape;328;p6"/>
+            <p:cNvPr id="330" name="Google Shape;330;p6"/>
             <p:cNvSpPr/>
             <p:nvPr/>
           </p:nvSpPr>
@@ -37854,7 +37962,7 @@
         </p:sp>
         <p:sp>
           <p:nvSpPr>
-            <p:cNvPr id="329" name="Google Shape;329;p6"/>
+            <p:cNvPr id="331" name="Google Shape;331;p6"/>
             <p:cNvSpPr txBox="1"/>
             <p:nvPr/>
           </p:nvSpPr>
@@ -37912,7 +38020,7 @@
       </p:grpSp>
       <p:grpSp>
         <p:nvGrpSpPr>
-          <p:cNvPr id="330" name="Google Shape;330;p6"/>
+          <p:cNvPr id="332" name="Google Shape;332;p6"/>
           <p:cNvGrpSpPr/>
           <p:nvPr/>
         </p:nvGrpSpPr>
@@ -37926,7 +38034,7 @@
         </p:grpSpPr>
         <p:grpSp>
           <p:nvGrpSpPr>
-            <p:cNvPr id="331" name="Google Shape;331;p6"/>
+            <p:cNvPr id="333" name="Google Shape;333;p6"/>
             <p:cNvGrpSpPr/>
             <p:nvPr/>
           </p:nvGrpSpPr>
@@ -37940,7 +38048,7 @@
           </p:grpSpPr>
           <p:sp>
             <p:nvSpPr>
-              <p:cNvPr id="332" name="Google Shape;332;p6"/>
+              <p:cNvPr id="334" name="Google Shape;334;p6"/>
               <p:cNvSpPr/>
               <p:nvPr/>
             </p:nvSpPr>
@@ -38025,7 +38133,7 @@
           </p:sp>
           <p:sp>
             <p:nvSpPr>
-              <p:cNvPr id="333" name="Google Shape;333;p6"/>
+              <p:cNvPr id="335" name="Google Shape;335;p6"/>
               <p:cNvSpPr txBox="1"/>
               <p:nvPr/>
             </p:nvSpPr>
@@ -38083,7 +38191,7 @@
         </p:grpSp>
         <p:grpSp>
           <p:nvGrpSpPr>
-            <p:cNvPr id="334" name="Google Shape;334;p6"/>
+            <p:cNvPr id="336" name="Google Shape;336;p6"/>
             <p:cNvGrpSpPr/>
             <p:nvPr/>
           </p:nvGrpSpPr>
@@ -38097,7 +38205,7 @@
           </p:grpSpPr>
           <p:sp>
             <p:nvSpPr>
-              <p:cNvPr id="335" name="Google Shape;335;p6"/>
+              <p:cNvPr id="337" name="Google Shape;337;p6"/>
               <p:cNvSpPr/>
               <p:nvPr/>
             </p:nvSpPr>
@@ -38188,7 +38296,7 @@
           </p:sp>
           <p:sp>
             <p:nvSpPr>
-              <p:cNvPr id="336" name="Google Shape;336;p6"/>
+              <p:cNvPr id="338" name="Google Shape;338;p6"/>
               <p:cNvSpPr txBox="1"/>
               <p:nvPr/>
             </p:nvSpPr>
@@ -38247,7 +38355,7 @@
       </p:grpSp>
       <p:sp>
         <p:nvSpPr>
-          <p:cNvPr id="337" name="Google Shape;337;p6"/>
+          <p:cNvPr id="339" name="Google Shape;339;p6"/>
           <p:cNvSpPr/>
           <p:nvPr/>
         </p:nvSpPr>
@@ -38285,174 +38393,6 @@
             </a:blip>
             <a:stretch>
               <a:fillRect b="0" l="0" r="0" t="-23479"/>
-            </a:stretch>
-          </a:blipFill>
-          <a:ln>
-            <a:noFill/>
-          </a:ln>
-        </p:spPr>
-        <p:txBody>
-          <a:bodyPr anchorCtr="0" anchor="t" bIns="45700" lIns="91425" spcFirstLastPara="1" rIns="91425" wrap="square" tIns="45700">
-            <a:noAutofit/>
-          </a:bodyPr>
-          <a:lstStyle/>
-          <a:p>
-            <a:pPr indent="0" lvl="0" marL="0" marR="0" rtl="0" algn="l">
-              <a:lnSpc>
-                <a:spcPct val="100000"/>
-              </a:lnSpc>
-              <a:spcBef>
-                <a:spcPts val="0"/>
-              </a:spcBef>
-              <a:spcAft>
-                <a:spcPts val="0"/>
-              </a:spcAft>
-              <a:buClr>
-                <a:srgbClr val="000000"/>
-              </a:buClr>
-              <a:buSzPts val="1800"/>
-              <a:buFont typeface="Arial"/>
-              <a:buNone/>
-            </a:pPr>
-            <a:r>
-              <a:t/>
-            </a:r>
-            <a:endParaRPr b="0" i="0" sz="1800" u="none" cap="none" strike="noStrike">
-              <a:solidFill>
-                <a:schemeClr val="dk1"/>
-              </a:solidFill>
-              <a:latin typeface="Calibri"/>
-              <a:ea typeface="Calibri"/>
-              <a:cs typeface="Calibri"/>
-              <a:sym typeface="Calibri"/>
-            </a:endParaRPr>
-          </a:p>
-        </p:txBody>
-      </p:sp>
-      <p:sp>
-        <p:nvSpPr>
-          <p:cNvPr id="338" name="Google Shape;338;p6"/>
-          <p:cNvSpPr/>
-          <p:nvPr/>
-        </p:nvSpPr>
-        <p:spPr>
-          <a:xfrm>
-            <a:off x="583821" y="9889984"/>
-            <a:ext cx="1321559" cy="523662"/>
-          </a:xfrm>
-          <a:custGeom>
-            <a:rect b="b" l="l" r="r" t="t"/>
-            <a:pathLst>
-              <a:path extrusionOk="0" h="523662" w="1321559">
-                <a:moveTo>
-                  <a:pt x="0" y="0"/>
-                </a:moveTo>
-                <a:lnTo>
-                  <a:pt x="1321558" y="0"/>
-                </a:lnTo>
-                <a:lnTo>
-                  <a:pt x="1321558" y="523662"/>
-                </a:lnTo>
-                <a:lnTo>
-                  <a:pt x="0" y="523662"/>
-                </a:lnTo>
-                <a:lnTo>
-                  <a:pt x="0" y="0"/>
-                </a:lnTo>
-                <a:close/>
-              </a:path>
-            </a:pathLst>
-          </a:custGeom>
-          <a:blipFill rotWithShape="1">
-            <a:blip r:embed="rId8">
-              <a:alphaModFix/>
-            </a:blip>
-            <a:stretch>
-              <a:fillRect b="0" l="0" r="-21418" t="-20270"/>
-            </a:stretch>
-          </a:blipFill>
-          <a:ln>
-            <a:noFill/>
-          </a:ln>
-        </p:spPr>
-        <p:txBody>
-          <a:bodyPr anchorCtr="0" anchor="t" bIns="45700" lIns="91425" spcFirstLastPara="1" rIns="91425" wrap="square" tIns="45700">
-            <a:noAutofit/>
-          </a:bodyPr>
-          <a:lstStyle/>
-          <a:p>
-            <a:pPr indent="0" lvl="0" marL="0" marR="0" rtl="0" algn="l">
-              <a:lnSpc>
-                <a:spcPct val="100000"/>
-              </a:lnSpc>
-              <a:spcBef>
-                <a:spcPts val="0"/>
-              </a:spcBef>
-              <a:spcAft>
-                <a:spcPts val="0"/>
-              </a:spcAft>
-              <a:buClr>
-                <a:srgbClr val="000000"/>
-              </a:buClr>
-              <a:buSzPts val="1800"/>
-              <a:buFont typeface="Arial"/>
-              <a:buNone/>
-            </a:pPr>
-            <a:r>
-              <a:t/>
-            </a:r>
-            <a:endParaRPr b="0" i="0" sz="1800" u="none" cap="none" strike="noStrike">
-              <a:solidFill>
-                <a:schemeClr val="dk1"/>
-              </a:solidFill>
-              <a:latin typeface="Calibri"/>
-              <a:ea typeface="Calibri"/>
-              <a:cs typeface="Calibri"/>
-              <a:sym typeface="Calibri"/>
-            </a:endParaRPr>
-          </a:p>
-        </p:txBody>
-      </p:sp>
-      <p:sp>
-        <p:nvSpPr>
-          <p:cNvPr id="339" name="Google Shape;339;p6"/>
-          <p:cNvSpPr/>
-          <p:nvPr/>
-        </p:nvSpPr>
-        <p:spPr>
-          <a:xfrm>
-            <a:off x="2394167" y="320995"/>
-            <a:ext cx="1533144" cy="289381"/>
-          </a:xfrm>
-          <a:custGeom>
-            <a:rect b="b" l="l" r="r" t="t"/>
-            <a:pathLst>
-              <a:path extrusionOk="0" h="289381" w="1533144">
-                <a:moveTo>
-                  <a:pt x="0" y="0"/>
-                </a:moveTo>
-                <a:lnTo>
-                  <a:pt x="1533144" y="0"/>
-                </a:lnTo>
-                <a:lnTo>
-                  <a:pt x="1533144" y="289381"/>
-                </a:lnTo>
-                <a:lnTo>
-                  <a:pt x="0" y="289381"/>
-                </a:lnTo>
-                <a:lnTo>
-                  <a:pt x="0" y="0"/>
-                </a:lnTo>
-                <a:close/>
-              </a:path>
-            </a:pathLst>
-          </a:custGeom>
-          <a:blipFill rotWithShape="1">
-            <a:blip r:embed="rId9">
-              <a:alphaModFix/>
-            </a:blip>
-            <a:stretch>
-              <a:fillRect b="0" l="0" r="0" t="0"/>
             </a:stretch>
           </a:blipFill>
           <a:ln>
@@ -38505,24 +38445,24 @@
         </p:nvSpPr>
         <p:spPr>
           <a:xfrm>
-            <a:off x="16537781" y="-2032197"/>
-            <a:ext cx="3098800" cy="2738564"/>
+            <a:off x="583821" y="9889984"/>
+            <a:ext cx="1321559" cy="523662"/>
           </a:xfrm>
           <a:custGeom>
             <a:rect b="b" l="l" r="r" t="t"/>
             <a:pathLst>
-              <a:path extrusionOk="0" h="2738564" w="3098800">
+              <a:path extrusionOk="0" h="523662" w="1321559">
                 <a:moveTo>
                   <a:pt x="0" y="0"/>
                 </a:moveTo>
                 <a:lnTo>
-                  <a:pt x="3098800" y="0"/>
-                </a:lnTo>
-                <a:lnTo>
-                  <a:pt x="3098800" y="2738564"/>
-                </a:lnTo>
-                <a:lnTo>
-                  <a:pt x="0" y="2738564"/>
+                  <a:pt x="1321558" y="0"/>
+                </a:lnTo>
+                <a:lnTo>
+                  <a:pt x="1321558" y="523662"/>
+                </a:lnTo>
+                <a:lnTo>
+                  <a:pt x="0" y="523662"/>
                 </a:lnTo>
                 <a:lnTo>
                   <a:pt x="0" y="0"/>
@@ -38532,11 +38472,11 @@
             </a:pathLst>
           </a:custGeom>
           <a:blipFill rotWithShape="1">
-            <a:blip r:embed="rId10">
+            <a:blip r:embed="rId8">
               <a:alphaModFix/>
             </a:blip>
             <a:stretch>
-              <a:fillRect b="0" l="0" r="0" t="0"/>
+              <a:fillRect b="0" l="0" r="-21418" t="-20270"/>
             </a:stretch>
           </a:blipFill>
           <a:ln>
@@ -38589,24 +38529,24 @@
         </p:nvSpPr>
         <p:spPr>
           <a:xfrm>
-            <a:off x="9144000" y="10018463"/>
-            <a:ext cx="10873692" cy="1293159"/>
+            <a:off x="2394167" y="320995"/>
+            <a:ext cx="1533144" cy="289381"/>
           </a:xfrm>
           <a:custGeom>
             <a:rect b="b" l="l" r="r" t="t"/>
             <a:pathLst>
-              <a:path extrusionOk="0" h="1293159" w="10873692">
+              <a:path extrusionOk="0" h="289381" w="1533144">
                 <a:moveTo>
                   <a:pt x="0" y="0"/>
                 </a:moveTo>
                 <a:lnTo>
-                  <a:pt x="10873692" y="0"/>
-                </a:lnTo>
-                <a:lnTo>
-                  <a:pt x="10873692" y="1293159"/>
-                </a:lnTo>
-                <a:lnTo>
-                  <a:pt x="0" y="1293159"/>
+                  <a:pt x="1533144" y="0"/>
+                </a:lnTo>
+                <a:lnTo>
+                  <a:pt x="1533144" y="289381"/>
+                </a:lnTo>
+                <a:lnTo>
+                  <a:pt x="0" y="289381"/>
                 </a:lnTo>
                 <a:lnTo>
                   <a:pt x="0" y="0"/>
@@ -38616,11 +38556,11 @@
             </a:pathLst>
           </a:custGeom>
           <a:blipFill rotWithShape="1">
-            <a:blip r:embed="rId11">
+            <a:blip r:embed="rId9">
               <a:alphaModFix/>
             </a:blip>
             <a:stretch>
-              <a:fillRect b="0" l="0" r="0" t="-561069"/>
+              <a:fillRect b="0" l="0" r="0" t="0"/>
             </a:stretch>
           </a:blipFill>
           <a:ln>
@@ -38672,35 +38612,35 @@
           <p:nvPr/>
         </p:nvSpPr>
         <p:spPr>
-          <a:xfrm flipH="1">
-            <a:off x="17043400" y="8777238"/>
-            <a:ext cx="1752990" cy="1509762"/>
+          <a:xfrm>
+            <a:off x="16537781" y="-2032197"/>
+            <a:ext cx="3098800" cy="2738564"/>
           </a:xfrm>
           <a:custGeom>
             <a:rect b="b" l="l" r="r" t="t"/>
             <a:pathLst>
-              <a:path extrusionOk="0" h="1509762" w="1752990">
+              <a:path extrusionOk="0" h="2738564" w="3098800">
                 <a:moveTo>
-                  <a:pt x="1752990" y="0"/>
+                  <a:pt x="0" y="0"/>
                 </a:moveTo>
                 <a:lnTo>
+                  <a:pt x="3098800" y="0"/>
+                </a:lnTo>
+                <a:lnTo>
+                  <a:pt x="3098800" y="2738564"/>
+                </a:lnTo>
+                <a:lnTo>
+                  <a:pt x="0" y="2738564"/>
+                </a:lnTo>
+                <a:lnTo>
                   <a:pt x="0" y="0"/>
-                </a:lnTo>
-                <a:lnTo>
-                  <a:pt x="0" y="1509762"/>
-                </a:lnTo>
-                <a:lnTo>
-                  <a:pt x="1752990" y="1509762"/>
-                </a:lnTo>
-                <a:lnTo>
-                  <a:pt x="1752990" y="0"/>
                 </a:lnTo>
                 <a:close/>
               </a:path>
             </a:pathLst>
           </a:custGeom>
           <a:blipFill rotWithShape="1">
-            <a:blip r:embed="rId12">
+            <a:blip r:embed="rId10">
               <a:alphaModFix/>
             </a:blip>
             <a:stretch>
@@ -38757,7 +38697,175 @@
         </p:nvSpPr>
         <p:spPr>
           <a:xfrm>
-            <a:off x="1520169" y="2015921"/>
+            <a:off x="9144000" y="10018463"/>
+            <a:ext cx="10873692" cy="1293159"/>
+          </a:xfrm>
+          <a:custGeom>
+            <a:rect b="b" l="l" r="r" t="t"/>
+            <a:pathLst>
+              <a:path extrusionOk="0" h="1293159" w="10873692">
+                <a:moveTo>
+                  <a:pt x="0" y="0"/>
+                </a:moveTo>
+                <a:lnTo>
+                  <a:pt x="10873692" y="0"/>
+                </a:lnTo>
+                <a:lnTo>
+                  <a:pt x="10873692" y="1293159"/>
+                </a:lnTo>
+                <a:lnTo>
+                  <a:pt x="0" y="1293159"/>
+                </a:lnTo>
+                <a:lnTo>
+                  <a:pt x="0" y="0"/>
+                </a:lnTo>
+                <a:close/>
+              </a:path>
+            </a:pathLst>
+          </a:custGeom>
+          <a:blipFill rotWithShape="1">
+            <a:blip r:embed="rId11">
+              <a:alphaModFix/>
+            </a:blip>
+            <a:stretch>
+              <a:fillRect b="0" l="0" r="0" t="-561069"/>
+            </a:stretch>
+          </a:blipFill>
+          <a:ln>
+            <a:noFill/>
+          </a:ln>
+        </p:spPr>
+        <p:txBody>
+          <a:bodyPr anchorCtr="0" anchor="t" bIns="45700" lIns="91425" spcFirstLastPara="1" rIns="91425" wrap="square" tIns="45700">
+            <a:noAutofit/>
+          </a:bodyPr>
+          <a:lstStyle/>
+          <a:p>
+            <a:pPr indent="0" lvl="0" marL="0" marR="0" rtl="0" algn="l">
+              <a:lnSpc>
+                <a:spcPct val="100000"/>
+              </a:lnSpc>
+              <a:spcBef>
+                <a:spcPts val="0"/>
+              </a:spcBef>
+              <a:spcAft>
+                <a:spcPts val="0"/>
+              </a:spcAft>
+              <a:buClr>
+                <a:srgbClr val="000000"/>
+              </a:buClr>
+              <a:buSzPts val="1800"/>
+              <a:buFont typeface="Arial"/>
+              <a:buNone/>
+            </a:pPr>
+            <a:r>
+              <a:t/>
+            </a:r>
+            <a:endParaRPr b="0" i="0" sz="1800" u="none" cap="none" strike="noStrike">
+              <a:solidFill>
+                <a:schemeClr val="dk1"/>
+              </a:solidFill>
+              <a:latin typeface="Calibri"/>
+              <a:ea typeface="Calibri"/>
+              <a:cs typeface="Calibri"/>
+              <a:sym typeface="Calibri"/>
+            </a:endParaRPr>
+          </a:p>
+        </p:txBody>
+      </p:sp>
+      <p:sp>
+        <p:nvSpPr>
+          <p:cNvPr id="344" name="Google Shape;344;p6"/>
+          <p:cNvSpPr/>
+          <p:nvPr/>
+        </p:nvSpPr>
+        <p:spPr>
+          <a:xfrm flipH="1">
+            <a:off x="17043400" y="8777238"/>
+            <a:ext cx="1752990" cy="1509762"/>
+          </a:xfrm>
+          <a:custGeom>
+            <a:rect b="b" l="l" r="r" t="t"/>
+            <a:pathLst>
+              <a:path extrusionOk="0" h="1509762" w="1752990">
+                <a:moveTo>
+                  <a:pt x="1752990" y="0"/>
+                </a:moveTo>
+                <a:lnTo>
+                  <a:pt x="0" y="0"/>
+                </a:lnTo>
+                <a:lnTo>
+                  <a:pt x="0" y="1509762"/>
+                </a:lnTo>
+                <a:lnTo>
+                  <a:pt x="1752990" y="1509762"/>
+                </a:lnTo>
+                <a:lnTo>
+                  <a:pt x="1752990" y="0"/>
+                </a:lnTo>
+                <a:close/>
+              </a:path>
+            </a:pathLst>
+          </a:custGeom>
+          <a:blipFill rotWithShape="1">
+            <a:blip r:embed="rId12">
+              <a:alphaModFix/>
+            </a:blip>
+            <a:stretch>
+              <a:fillRect b="0" l="0" r="0" t="0"/>
+            </a:stretch>
+          </a:blipFill>
+          <a:ln>
+            <a:noFill/>
+          </a:ln>
+        </p:spPr>
+        <p:txBody>
+          <a:bodyPr anchorCtr="0" anchor="t" bIns="45700" lIns="91425" spcFirstLastPara="1" rIns="91425" wrap="square" tIns="45700">
+            <a:noAutofit/>
+          </a:bodyPr>
+          <a:lstStyle/>
+          <a:p>
+            <a:pPr indent="0" lvl="0" marL="0" marR="0" rtl="0" algn="l">
+              <a:lnSpc>
+                <a:spcPct val="100000"/>
+              </a:lnSpc>
+              <a:spcBef>
+                <a:spcPts val="0"/>
+              </a:spcBef>
+              <a:spcAft>
+                <a:spcPts val="0"/>
+              </a:spcAft>
+              <a:buClr>
+                <a:srgbClr val="000000"/>
+              </a:buClr>
+              <a:buSzPts val="1800"/>
+              <a:buFont typeface="Arial"/>
+              <a:buNone/>
+            </a:pPr>
+            <a:r>
+              <a:t/>
+            </a:r>
+            <a:endParaRPr b="0" i="0" sz="1800" u="none" cap="none" strike="noStrike">
+              <a:solidFill>
+                <a:schemeClr val="dk1"/>
+              </a:solidFill>
+              <a:latin typeface="Calibri"/>
+              <a:ea typeface="Calibri"/>
+              <a:cs typeface="Calibri"/>
+              <a:sym typeface="Calibri"/>
+            </a:endParaRPr>
+          </a:p>
+        </p:txBody>
+      </p:sp>
+      <p:sp>
+        <p:nvSpPr>
+          <p:cNvPr id="345" name="Google Shape;345;p6"/>
+          <p:cNvSpPr/>
+          <p:nvPr/>
+        </p:nvSpPr>
+        <p:spPr>
+          <a:xfrm>
+            <a:off x="1514819" y="1993271"/>
             <a:ext cx="3291840" cy="4114800"/>
           </a:xfrm>
           <a:custGeom>
@@ -38835,7 +38943,7 @@
       </p:sp>
       <p:sp>
         <p:nvSpPr>
-          <p:cNvPr id="344" name="Google Shape;344;p6"/>
+          <p:cNvPr id="346" name="Google Shape;346;p6"/>
           <p:cNvSpPr/>
           <p:nvPr/>
         </p:nvSpPr>
@@ -38931,7 +39039,7 @@
       </p:sp>
       <p:sp>
         <p:nvSpPr>
-          <p:cNvPr id="345" name="Google Shape;345;p6"/>
+          <p:cNvPr id="347" name="Google Shape;347;p6"/>
           <p:cNvSpPr/>
           <p:nvPr/>
         </p:nvSpPr>
@@ -39015,7 +39123,7 @@
       </p:sp>
       <p:sp>
         <p:nvSpPr>
-          <p:cNvPr id="346" name="Google Shape;346;p6"/>
+          <p:cNvPr id="348" name="Google Shape;348;p6"/>
           <p:cNvSpPr txBox="1"/>
           <p:nvPr/>
         </p:nvSpPr>
@@ -39081,7 +39189,7 @@
       </p:sp>
       <p:sp>
         <p:nvSpPr>
-          <p:cNvPr id="347" name="Google Shape;347;p6"/>
+          <p:cNvPr id="349" name="Google Shape;349;p6"/>
           <p:cNvSpPr txBox="1"/>
           <p:nvPr/>
         </p:nvSpPr>
@@ -39147,7 +39255,7 @@
       </p:sp>
       <p:sp>
         <p:nvSpPr>
-          <p:cNvPr id="348" name="Google Shape;348;p6"/>
+          <p:cNvPr id="350" name="Google Shape;350;p6"/>
           <p:cNvSpPr txBox="1"/>
           <p:nvPr/>
         </p:nvSpPr>
@@ -39213,7 +39321,7 @@
       </p:sp>
       <p:sp>
         <p:nvSpPr>
-          <p:cNvPr id="349" name="Google Shape;349;p6"/>
+          <p:cNvPr id="351" name="Google Shape;351;p6"/>
           <p:cNvSpPr txBox="1"/>
           <p:nvPr/>
         </p:nvSpPr>
@@ -39279,7 +39387,7 @@
       </p:sp>
       <p:sp>
         <p:nvSpPr>
-          <p:cNvPr id="350" name="Google Shape;350;p6"/>
+          <p:cNvPr id="352" name="Google Shape;352;p6"/>
           <p:cNvSpPr txBox="1"/>
           <p:nvPr/>
         </p:nvSpPr>
@@ -39345,7 +39453,7 @@
       </p:sp>
       <p:sp>
         <p:nvSpPr>
-          <p:cNvPr id="351" name="Google Shape;351;p6"/>
+          <p:cNvPr id="353" name="Google Shape;353;p6"/>
           <p:cNvSpPr txBox="1"/>
           <p:nvPr/>
         </p:nvSpPr>
@@ -39411,7 +39519,7 @@
       </p:sp>
       <p:sp>
         <p:nvSpPr>
-          <p:cNvPr id="352" name="Google Shape;352;p6"/>
+          <p:cNvPr id="354" name="Google Shape;354;p6"/>
           <p:cNvSpPr txBox="1"/>
           <p:nvPr/>
         </p:nvSpPr>
@@ -39500,7 +39608,7 @@
   <p:cSld>
     <p:spTree>
       <p:nvGrpSpPr>
-        <p:cNvPr id="356" name="Shape 356"/>
+        <p:cNvPr id="358" name="Shape 358"/>
         <p:cNvGrpSpPr/>
         <p:nvPr/>
       </p:nvGrpSpPr>
@@ -39514,7 +39622,7 @@
       </p:grpSpPr>
       <p:sp>
         <p:nvSpPr>
-          <p:cNvPr id="357" name="Google Shape;357;g3ba4c4b9c29_0_27"/>
+          <p:cNvPr id="359" name="Google Shape;359;g3ba4c4b9c29_0_27"/>
           <p:cNvSpPr/>
           <p:nvPr/>
         </p:nvSpPr>
@@ -39598,7 +39706,7 @@
       </p:sp>
       <p:grpSp>
         <p:nvGrpSpPr>
-          <p:cNvPr id="358" name="Google Shape;358;g3ba4c4b9c29_0_27"/>
+          <p:cNvPr id="360" name="Google Shape;360;g3ba4c4b9c29_0_27"/>
           <p:cNvGrpSpPr/>
           <p:nvPr/>
         </p:nvGrpSpPr>
@@ -39612,7 +39720,7 @@
         </p:grpSpPr>
         <p:sp>
           <p:nvSpPr>
-            <p:cNvPr id="359" name="Google Shape;359;g3ba4c4b9c29_0_27"/>
+            <p:cNvPr id="361" name="Google Shape;361;g3ba4c4b9c29_0_27"/>
             <p:cNvSpPr/>
             <p:nvPr/>
           </p:nvSpPr>
@@ -39691,7 +39799,7 @@
         </p:sp>
         <p:sp>
           <p:nvSpPr>
-            <p:cNvPr id="360" name="Google Shape;360;g3ba4c4b9c29_0_27"/>
+            <p:cNvPr id="362" name="Google Shape;362;g3ba4c4b9c29_0_27"/>
             <p:cNvSpPr txBox="1"/>
             <p:nvPr/>
           </p:nvSpPr>
@@ -39749,7 +39857,7 @@
       </p:grpSp>
       <p:grpSp>
         <p:nvGrpSpPr>
-          <p:cNvPr id="361" name="Google Shape;361;g3ba4c4b9c29_0_27"/>
+          <p:cNvPr id="363" name="Google Shape;363;g3ba4c4b9c29_0_27"/>
           <p:cNvGrpSpPr/>
           <p:nvPr/>
         </p:nvGrpSpPr>
@@ -39763,7 +39871,7 @@
         </p:grpSpPr>
         <p:sp>
           <p:nvSpPr>
-            <p:cNvPr id="362" name="Google Shape;362;g3ba4c4b9c29_0_27"/>
+            <p:cNvPr id="364" name="Google Shape;364;g3ba4c4b9c29_0_27"/>
             <p:cNvSpPr/>
             <p:nvPr/>
           </p:nvSpPr>
@@ -39842,7 +39950,7 @@
         </p:sp>
         <p:sp>
           <p:nvSpPr>
-            <p:cNvPr id="363" name="Google Shape;363;g3ba4c4b9c29_0_27"/>
+            <p:cNvPr id="365" name="Google Shape;365;g3ba4c4b9c29_0_27"/>
             <p:cNvSpPr txBox="1"/>
             <p:nvPr/>
           </p:nvSpPr>
@@ -39900,7 +40008,7 @@
       </p:grpSp>
       <p:sp>
         <p:nvSpPr>
-          <p:cNvPr id="364" name="Google Shape;364;g3ba4c4b9c29_0_27"/>
+          <p:cNvPr id="366" name="Google Shape;366;g3ba4c4b9c29_0_27"/>
           <p:cNvSpPr/>
           <p:nvPr/>
         </p:nvSpPr>
@@ -39984,7 +40092,7 @@
       </p:sp>
       <p:sp>
         <p:nvSpPr>
-          <p:cNvPr id="365" name="Google Shape;365;g3ba4c4b9c29_0_27"/>
+          <p:cNvPr id="367" name="Google Shape;367;g3ba4c4b9c29_0_27"/>
           <p:cNvSpPr/>
           <p:nvPr/>
         </p:nvSpPr>
@@ -40080,7 +40188,7 @@
       </p:sp>
       <p:sp>
         <p:nvSpPr>
-          <p:cNvPr id="366" name="Google Shape;366;g3ba4c4b9c29_0_27"/>
+          <p:cNvPr id="368" name="Google Shape;368;g3ba4c4b9c29_0_27"/>
           <p:cNvSpPr/>
           <p:nvPr/>
         </p:nvSpPr>
@@ -40164,7 +40272,7 @@
       </p:sp>
       <p:sp>
         <p:nvSpPr>
-          <p:cNvPr id="367" name="Google Shape;367;g3ba4c4b9c29_0_27"/>
+          <p:cNvPr id="369" name="Google Shape;369;g3ba4c4b9c29_0_27"/>
           <p:cNvSpPr/>
           <p:nvPr/>
         </p:nvSpPr>
@@ -40248,7 +40356,7 @@
       </p:sp>
       <p:grpSp>
         <p:nvGrpSpPr>
-          <p:cNvPr id="368" name="Google Shape;368;g3ba4c4b9c29_0_27"/>
+          <p:cNvPr id="370" name="Google Shape;370;g3ba4c4b9c29_0_27"/>
           <p:cNvGrpSpPr/>
           <p:nvPr/>
         </p:nvGrpSpPr>
@@ -40262,7 +40370,7 @@
         </p:grpSpPr>
         <p:sp>
           <p:nvSpPr>
-            <p:cNvPr id="369" name="Google Shape;369;g3ba4c4b9c29_0_27"/>
+            <p:cNvPr id="371" name="Google Shape;371;g3ba4c4b9c29_0_27"/>
             <p:cNvSpPr/>
             <p:nvPr/>
           </p:nvSpPr>
@@ -40355,7 +40463,7 @@
         </p:sp>
         <p:sp>
           <p:nvSpPr>
-            <p:cNvPr id="370" name="Google Shape;370;g3ba4c4b9c29_0_27"/>
+            <p:cNvPr id="372" name="Google Shape;372;g3ba4c4b9c29_0_27"/>
             <p:cNvSpPr txBox="1"/>
             <p:nvPr/>
           </p:nvSpPr>
@@ -40413,7 +40521,7 @@
       </p:grpSp>
       <p:grpSp>
         <p:nvGrpSpPr>
-          <p:cNvPr id="371" name="Google Shape;371;g3ba4c4b9c29_0_27"/>
+          <p:cNvPr id="373" name="Google Shape;373;g3ba4c4b9c29_0_27"/>
           <p:cNvGrpSpPr/>
           <p:nvPr/>
         </p:nvGrpSpPr>
@@ -40427,7 +40535,7 @@
         </p:grpSpPr>
         <p:grpSp>
           <p:nvGrpSpPr>
-            <p:cNvPr id="372" name="Google Shape;372;g3ba4c4b9c29_0_27"/>
+            <p:cNvPr id="374" name="Google Shape;374;g3ba4c4b9c29_0_27"/>
             <p:cNvGrpSpPr/>
             <p:nvPr/>
           </p:nvGrpSpPr>
@@ -40441,7 +40549,7 @@
           </p:grpSpPr>
           <p:sp>
             <p:nvSpPr>
-              <p:cNvPr id="373" name="Google Shape;373;g3ba4c4b9c29_0_27"/>
+              <p:cNvPr id="375" name="Google Shape;375;g3ba4c4b9c29_0_27"/>
               <p:cNvSpPr/>
               <p:nvPr/>
             </p:nvSpPr>
@@ -40526,7 +40634,7 @@
           </p:sp>
           <p:sp>
             <p:nvSpPr>
-              <p:cNvPr id="374" name="Google Shape;374;g3ba4c4b9c29_0_27"/>
+              <p:cNvPr id="376" name="Google Shape;376;g3ba4c4b9c29_0_27"/>
               <p:cNvSpPr txBox="1"/>
               <p:nvPr/>
             </p:nvSpPr>
@@ -40584,7 +40692,7 @@
         </p:grpSp>
         <p:grpSp>
           <p:nvGrpSpPr>
-            <p:cNvPr id="375" name="Google Shape;375;g3ba4c4b9c29_0_27"/>
+            <p:cNvPr id="377" name="Google Shape;377;g3ba4c4b9c29_0_27"/>
             <p:cNvGrpSpPr/>
             <p:nvPr/>
           </p:nvGrpSpPr>
@@ -40598,7 +40706,7 @@
           </p:grpSpPr>
           <p:sp>
             <p:nvSpPr>
-              <p:cNvPr id="376" name="Google Shape;376;g3ba4c4b9c29_0_27"/>
+              <p:cNvPr id="378" name="Google Shape;378;g3ba4c4b9c29_0_27"/>
               <p:cNvSpPr/>
               <p:nvPr/>
             </p:nvSpPr>
@@ -40689,7 +40797,7 @@
           </p:sp>
           <p:sp>
             <p:nvSpPr>
-              <p:cNvPr id="377" name="Google Shape;377;g3ba4c4b9c29_0_27"/>
+              <p:cNvPr id="379" name="Google Shape;379;g3ba4c4b9c29_0_27"/>
               <p:cNvSpPr txBox="1"/>
               <p:nvPr/>
             </p:nvSpPr>
@@ -40748,7 +40856,7 @@
       </p:grpSp>
       <p:sp>
         <p:nvSpPr>
-          <p:cNvPr id="378" name="Google Shape;378;g3ba4c4b9c29_0_27"/>
+          <p:cNvPr id="380" name="Google Shape;380;g3ba4c4b9c29_0_27"/>
           <p:cNvSpPr/>
           <p:nvPr/>
         </p:nvSpPr>
@@ -40786,174 +40894,6 @@
             </a:blip>
             <a:stretch>
               <a:fillRect b="0" l="0" r="0" t="-23479"/>
-            </a:stretch>
-          </a:blipFill>
-          <a:ln>
-            <a:noFill/>
-          </a:ln>
-        </p:spPr>
-        <p:txBody>
-          <a:bodyPr anchorCtr="0" anchor="t" bIns="45700" lIns="91425" spcFirstLastPara="1" rIns="91425" wrap="square" tIns="45700">
-            <a:noAutofit/>
-          </a:bodyPr>
-          <a:lstStyle/>
-          <a:p>
-            <a:pPr indent="0" lvl="0" marL="0" marR="0" rtl="0" algn="l">
-              <a:lnSpc>
-                <a:spcPct val="100000"/>
-              </a:lnSpc>
-              <a:spcBef>
-                <a:spcPts val="0"/>
-              </a:spcBef>
-              <a:spcAft>
-                <a:spcPts val="0"/>
-              </a:spcAft>
-              <a:buClr>
-                <a:srgbClr val="000000"/>
-              </a:buClr>
-              <a:buSzPts val="1800"/>
-              <a:buFont typeface="Arial"/>
-              <a:buNone/>
-            </a:pPr>
-            <a:r>
-              <a:t/>
-            </a:r>
-            <a:endParaRPr b="0" i="0" sz="1800" u="none" cap="none" strike="noStrike">
-              <a:solidFill>
-                <a:schemeClr val="dk1"/>
-              </a:solidFill>
-              <a:latin typeface="Calibri"/>
-              <a:ea typeface="Calibri"/>
-              <a:cs typeface="Calibri"/>
-              <a:sym typeface="Calibri"/>
-            </a:endParaRPr>
-          </a:p>
-        </p:txBody>
-      </p:sp>
-      <p:sp>
-        <p:nvSpPr>
-          <p:cNvPr id="379" name="Google Shape;379;g3ba4c4b9c29_0_27"/>
-          <p:cNvSpPr/>
-          <p:nvPr/>
-        </p:nvSpPr>
-        <p:spPr>
-          <a:xfrm>
-            <a:off x="583821" y="9889984"/>
-            <a:ext cx="1321559" cy="523662"/>
-          </a:xfrm>
-          <a:custGeom>
-            <a:rect b="b" l="l" r="r" t="t"/>
-            <a:pathLst>
-              <a:path extrusionOk="0" h="523662" w="1321559">
-                <a:moveTo>
-                  <a:pt x="0" y="0"/>
-                </a:moveTo>
-                <a:lnTo>
-                  <a:pt x="1321558" y="0"/>
-                </a:lnTo>
-                <a:lnTo>
-                  <a:pt x="1321558" y="523662"/>
-                </a:lnTo>
-                <a:lnTo>
-                  <a:pt x="0" y="523662"/>
-                </a:lnTo>
-                <a:lnTo>
-                  <a:pt x="0" y="0"/>
-                </a:lnTo>
-                <a:close/>
-              </a:path>
-            </a:pathLst>
-          </a:custGeom>
-          <a:blipFill rotWithShape="1">
-            <a:blip r:embed="rId8">
-              <a:alphaModFix/>
-            </a:blip>
-            <a:stretch>
-              <a:fillRect b="0" l="0" r="-21419" t="-20268"/>
-            </a:stretch>
-          </a:blipFill>
-          <a:ln>
-            <a:noFill/>
-          </a:ln>
-        </p:spPr>
-        <p:txBody>
-          <a:bodyPr anchorCtr="0" anchor="t" bIns="45700" lIns="91425" spcFirstLastPara="1" rIns="91425" wrap="square" tIns="45700">
-            <a:noAutofit/>
-          </a:bodyPr>
-          <a:lstStyle/>
-          <a:p>
-            <a:pPr indent="0" lvl="0" marL="0" marR="0" rtl="0" algn="l">
-              <a:lnSpc>
-                <a:spcPct val="100000"/>
-              </a:lnSpc>
-              <a:spcBef>
-                <a:spcPts val="0"/>
-              </a:spcBef>
-              <a:spcAft>
-                <a:spcPts val="0"/>
-              </a:spcAft>
-              <a:buClr>
-                <a:srgbClr val="000000"/>
-              </a:buClr>
-              <a:buSzPts val="1800"/>
-              <a:buFont typeface="Arial"/>
-              <a:buNone/>
-            </a:pPr>
-            <a:r>
-              <a:t/>
-            </a:r>
-            <a:endParaRPr b="0" i="0" sz="1800" u="none" cap="none" strike="noStrike">
-              <a:solidFill>
-                <a:schemeClr val="dk1"/>
-              </a:solidFill>
-              <a:latin typeface="Calibri"/>
-              <a:ea typeface="Calibri"/>
-              <a:cs typeface="Calibri"/>
-              <a:sym typeface="Calibri"/>
-            </a:endParaRPr>
-          </a:p>
-        </p:txBody>
-      </p:sp>
-      <p:sp>
-        <p:nvSpPr>
-          <p:cNvPr id="380" name="Google Shape;380;g3ba4c4b9c29_0_27"/>
-          <p:cNvSpPr/>
-          <p:nvPr/>
-        </p:nvSpPr>
-        <p:spPr>
-          <a:xfrm>
-            <a:off x="2394167" y="320995"/>
-            <a:ext cx="1533144" cy="289381"/>
-          </a:xfrm>
-          <a:custGeom>
-            <a:rect b="b" l="l" r="r" t="t"/>
-            <a:pathLst>
-              <a:path extrusionOk="0" h="289381" w="1533144">
-                <a:moveTo>
-                  <a:pt x="0" y="0"/>
-                </a:moveTo>
-                <a:lnTo>
-                  <a:pt x="1533144" y="0"/>
-                </a:lnTo>
-                <a:lnTo>
-                  <a:pt x="1533144" y="289381"/>
-                </a:lnTo>
-                <a:lnTo>
-                  <a:pt x="0" y="289381"/>
-                </a:lnTo>
-                <a:lnTo>
-                  <a:pt x="0" y="0"/>
-                </a:lnTo>
-                <a:close/>
-              </a:path>
-            </a:pathLst>
-          </a:custGeom>
-          <a:blipFill rotWithShape="1">
-            <a:blip r:embed="rId9">
-              <a:alphaModFix/>
-            </a:blip>
-            <a:stretch>
-              <a:fillRect b="0" l="0" r="0" t="0"/>
             </a:stretch>
           </a:blipFill>
           <a:ln>
@@ -41006,24 +40946,24 @@
         </p:nvSpPr>
         <p:spPr>
           <a:xfrm>
-            <a:off x="16537781" y="-2032197"/>
-            <a:ext cx="3098800" cy="2738564"/>
+            <a:off x="583821" y="9889984"/>
+            <a:ext cx="1321559" cy="523662"/>
           </a:xfrm>
           <a:custGeom>
             <a:rect b="b" l="l" r="r" t="t"/>
             <a:pathLst>
-              <a:path extrusionOk="0" h="2738564" w="3098800">
+              <a:path extrusionOk="0" h="523662" w="1321559">
                 <a:moveTo>
                   <a:pt x="0" y="0"/>
                 </a:moveTo>
                 <a:lnTo>
-                  <a:pt x="3098800" y="0"/>
-                </a:lnTo>
-                <a:lnTo>
-                  <a:pt x="3098800" y="2738564"/>
-                </a:lnTo>
-                <a:lnTo>
-                  <a:pt x="0" y="2738564"/>
+                  <a:pt x="1321558" y="0"/>
+                </a:lnTo>
+                <a:lnTo>
+                  <a:pt x="1321558" y="523662"/>
+                </a:lnTo>
+                <a:lnTo>
+                  <a:pt x="0" y="523662"/>
                 </a:lnTo>
                 <a:lnTo>
                   <a:pt x="0" y="0"/>
@@ -41033,11 +40973,11 @@
             </a:pathLst>
           </a:custGeom>
           <a:blipFill rotWithShape="1">
-            <a:blip r:embed="rId10">
+            <a:blip r:embed="rId8">
               <a:alphaModFix/>
             </a:blip>
             <a:stretch>
-              <a:fillRect b="0" l="0" r="0" t="0"/>
+              <a:fillRect b="0" l="0" r="-21419" t="-20268"/>
             </a:stretch>
           </a:blipFill>
           <a:ln>
@@ -41090,24 +41030,24 @@
         </p:nvSpPr>
         <p:spPr>
           <a:xfrm>
-            <a:off x="9144000" y="10018463"/>
-            <a:ext cx="10873692" cy="1293159"/>
+            <a:off x="2394167" y="320995"/>
+            <a:ext cx="1533144" cy="289381"/>
           </a:xfrm>
           <a:custGeom>
             <a:rect b="b" l="l" r="r" t="t"/>
             <a:pathLst>
-              <a:path extrusionOk="0" h="1293159" w="10873692">
+              <a:path extrusionOk="0" h="289381" w="1533144">
                 <a:moveTo>
                   <a:pt x="0" y="0"/>
                 </a:moveTo>
                 <a:lnTo>
-                  <a:pt x="10873692" y="0"/>
-                </a:lnTo>
-                <a:lnTo>
-                  <a:pt x="10873692" y="1293159"/>
-                </a:lnTo>
-                <a:lnTo>
-                  <a:pt x="0" y="1293159"/>
+                  <a:pt x="1533144" y="0"/>
+                </a:lnTo>
+                <a:lnTo>
+                  <a:pt x="1533144" y="289381"/>
+                </a:lnTo>
+                <a:lnTo>
+                  <a:pt x="0" y="289381"/>
                 </a:lnTo>
                 <a:lnTo>
                   <a:pt x="0" y="0"/>
@@ -41117,11 +41057,11 @@
             </a:pathLst>
           </a:custGeom>
           <a:blipFill rotWithShape="1">
-            <a:blip r:embed="rId11">
+            <a:blip r:embed="rId9">
               <a:alphaModFix/>
             </a:blip>
             <a:stretch>
-              <a:fillRect b="0" l="0" r="0" t="-561069"/>
+              <a:fillRect b="0" l="0" r="0" t="0"/>
             </a:stretch>
           </a:blipFill>
           <a:ln>
@@ -41173,35 +41113,35 @@
           <p:nvPr/>
         </p:nvSpPr>
         <p:spPr>
-          <a:xfrm flipH="1">
-            <a:off x="17043400" y="8777238"/>
-            <a:ext cx="1752990" cy="1509762"/>
+          <a:xfrm>
+            <a:off x="16537781" y="-2032197"/>
+            <a:ext cx="3098800" cy="2738564"/>
           </a:xfrm>
           <a:custGeom>
             <a:rect b="b" l="l" r="r" t="t"/>
             <a:pathLst>
-              <a:path extrusionOk="0" h="1509762" w="1752990">
+              <a:path extrusionOk="0" h="2738564" w="3098800">
                 <a:moveTo>
-                  <a:pt x="1752990" y="0"/>
+                  <a:pt x="0" y="0"/>
                 </a:moveTo>
                 <a:lnTo>
+                  <a:pt x="3098800" y="0"/>
+                </a:lnTo>
+                <a:lnTo>
+                  <a:pt x="3098800" y="2738564"/>
+                </a:lnTo>
+                <a:lnTo>
+                  <a:pt x="0" y="2738564"/>
+                </a:lnTo>
+                <a:lnTo>
                   <a:pt x="0" y="0"/>
-                </a:lnTo>
-                <a:lnTo>
-                  <a:pt x="0" y="1509762"/>
-                </a:lnTo>
-                <a:lnTo>
-                  <a:pt x="1752990" y="1509762"/>
-                </a:lnTo>
-                <a:lnTo>
-                  <a:pt x="1752990" y="0"/>
                 </a:lnTo>
                 <a:close/>
               </a:path>
             </a:pathLst>
           </a:custGeom>
           <a:blipFill rotWithShape="1">
-            <a:blip r:embed="rId12">
+            <a:blip r:embed="rId10">
               <a:alphaModFix/>
             </a:blip>
             <a:stretch>
@@ -41258,24 +41198,24 @@
         </p:nvSpPr>
         <p:spPr>
           <a:xfrm>
-            <a:off x="1520169" y="2015921"/>
-            <a:ext cx="3291840" cy="4114800"/>
+            <a:off x="9144000" y="10018463"/>
+            <a:ext cx="10873692" cy="1293159"/>
           </a:xfrm>
           <a:custGeom>
             <a:rect b="b" l="l" r="r" t="t"/>
             <a:pathLst>
-              <a:path extrusionOk="0" h="4114800" w="3291840">
+              <a:path extrusionOk="0" h="1293159" w="10873692">
                 <a:moveTo>
                   <a:pt x="0" y="0"/>
                 </a:moveTo>
                 <a:lnTo>
-                  <a:pt x="3291840" y="0"/>
-                </a:lnTo>
-                <a:lnTo>
-                  <a:pt x="3291840" y="4114800"/>
-                </a:lnTo>
-                <a:lnTo>
-                  <a:pt x="0" y="4114800"/>
+                  <a:pt x="10873692" y="0"/>
+                </a:lnTo>
+                <a:lnTo>
+                  <a:pt x="10873692" y="1293159"/>
+                </a:lnTo>
+                <a:lnTo>
+                  <a:pt x="0" y="1293159"/>
                 </a:lnTo>
                 <a:lnTo>
                   <a:pt x="0" y="0"/>
@@ -41285,11 +41225,11 @@
             </a:pathLst>
           </a:custGeom>
           <a:blipFill rotWithShape="1">
-            <a:blip r:embed="rId13">
+            <a:blip r:embed="rId11">
               <a:alphaModFix/>
             </a:blip>
             <a:stretch>
-              <a:fillRect b="0" l="0" r="0" t="0"/>
+              <a:fillRect b="0" l="0" r="0" t="-561069"/>
             </a:stretch>
           </a:blipFill>
           <a:ln>
@@ -41341,55 +41281,43 @@
           <p:nvPr/>
         </p:nvSpPr>
         <p:spPr>
-          <a:xfrm>
-            <a:off x="2759436" y="5699258"/>
-            <a:ext cx="4105992" cy="3559771"/>
+          <a:xfrm flipH="1">
+            <a:off x="17043400" y="8777238"/>
+            <a:ext cx="1752990" cy="1509762"/>
           </a:xfrm>
           <a:custGeom>
             <a:rect b="b" l="l" r="r" t="t"/>
             <a:pathLst>
-              <a:path extrusionOk="0" h="630606" w="727368">
+              <a:path extrusionOk="0" h="1509762" w="1752990">
                 <a:moveTo>
-                  <a:pt x="727368" y="315303"/>
+                  <a:pt x="1752990" y="0"/>
                 </a:moveTo>
                 <a:lnTo>
-                  <a:pt x="524168" y="630606"/>
-                </a:lnTo>
-                <a:lnTo>
-                  <a:pt x="203200" y="630606"/>
-                </a:lnTo>
-                <a:lnTo>
-                  <a:pt x="0" y="315303"/>
-                </a:lnTo>
-                <a:lnTo>
-                  <a:pt x="203200" y="0"/>
-                </a:lnTo>
-                <a:lnTo>
-                  <a:pt x="524168" y="0"/>
-                </a:lnTo>
-                <a:lnTo>
-                  <a:pt x="727368" y="315303"/>
+                  <a:pt x="0" y="0"/>
+                </a:lnTo>
+                <a:lnTo>
+                  <a:pt x="0" y="1509762"/>
+                </a:lnTo>
+                <a:lnTo>
+                  <a:pt x="1752990" y="1509762"/>
+                </a:lnTo>
+                <a:lnTo>
+                  <a:pt x="1752990" y="0"/>
                 </a:lnTo>
                 <a:close/>
               </a:path>
             </a:pathLst>
           </a:custGeom>
           <a:blipFill rotWithShape="1">
-            <a:blip r:embed="rId5">
+            <a:blip r:embed="rId12">
               <a:alphaModFix/>
             </a:blip>
             <a:stretch>
-              <a:fillRect b="0" l="-15019" r="-15019" t="0"/>
+              <a:fillRect b="0" l="0" r="0" t="0"/>
             </a:stretch>
           </a:blipFill>
-          <a:ln cap="sq" cmpd="sng" w="142875">
-            <a:solidFill>
-              <a:srgbClr val="FFFFFF"/>
-            </a:solidFill>
-            <a:prstDash val="solid"/>
-            <a:miter lim="8000"/>
-            <a:headEnd len="sm" w="sm" type="none"/>
-            <a:tailEnd len="sm" w="sm" type="none"/>
+          <a:ln>
+            <a:noFill/>
           </a:ln>
         </p:spPr>
         <p:txBody>
@@ -41438,42 +41366,54 @@
         </p:nvSpPr>
         <p:spPr>
           <a:xfrm>
-            <a:off x="3825955" y="6165696"/>
-            <a:ext cx="1972107" cy="2802736"/>
+            <a:off x="2759436" y="5699258"/>
+            <a:ext cx="4105992" cy="3559771"/>
           </a:xfrm>
           <a:custGeom>
             <a:rect b="b" l="l" r="r" t="t"/>
             <a:pathLst>
-              <a:path extrusionOk="0" h="2802736" w="1972107">
+              <a:path extrusionOk="0" h="630606" w="727368">
                 <a:moveTo>
-                  <a:pt x="0" y="0"/>
+                  <a:pt x="727368" y="315303"/>
                 </a:moveTo>
                 <a:lnTo>
-                  <a:pt x="1972107" y="0"/>
-                </a:lnTo>
-                <a:lnTo>
-                  <a:pt x="1972107" y="2802736"/>
-                </a:lnTo>
-                <a:lnTo>
-                  <a:pt x="0" y="2802736"/>
-                </a:lnTo>
-                <a:lnTo>
-                  <a:pt x="0" y="0"/>
+                  <a:pt x="524168" y="630606"/>
+                </a:lnTo>
+                <a:lnTo>
+                  <a:pt x="203200" y="630606"/>
+                </a:lnTo>
+                <a:lnTo>
+                  <a:pt x="0" y="315303"/>
+                </a:lnTo>
+                <a:lnTo>
+                  <a:pt x="203200" y="0"/>
+                </a:lnTo>
+                <a:lnTo>
+                  <a:pt x="524168" y="0"/>
+                </a:lnTo>
+                <a:lnTo>
+                  <a:pt x="727368" y="315303"/>
                 </a:lnTo>
                 <a:close/>
               </a:path>
             </a:pathLst>
           </a:custGeom>
           <a:blipFill rotWithShape="1">
-            <a:blip r:embed="rId14">
+            <a:blip r:embed="rId5">
               <a:alphaModFix/>
             </a:blip>
             <a:stretch>
-              <a:fillRect b="0" l="0" r="0" t="0"/>
+              <a:fillRect b="0" l="-15019" r="-15019" t="0"/>
             </a:stretch>
           </a:blipFill>
-          <a:ln>
-            <a:noFill/>
+          <a:ln cap="sq" cmpd="sng" w="142875">
+            <a:solidFill>
+              <a:srgbClr val="FFFFFF"/>
+            </a:solidFill>
+            <a:prstDash val="solid"/>
+            <a:miter lim="8000"/>
+            <a:headEnd len="sm" w="sm" type="none"/>
+            <a:tailEnd len="sm" w="sm" type="none"/>
           </a:ln>
         </p:spPr>
         <p:txBody>
@@ -41719,7 +41659,7 @@
           <p:nvPr/>
         </p:nvPicPr>
         <p:blipFill>
-          <a:blip r:embed="rId15">
+          <a:blip r:embed="rId13">
             <a:alphaModFix/>
           </a:blip>
           <a:stretch>
@@ -41730,6 +41670,62 @@
           <a:xfrm>
             <a:off x="12462894" y="1937250"/>
             <a:ext cx="5825106" cy="6782000"/>
+          </a:xfrm>
+          <a:prstGeom prst="rect">
+            <a:avLst/>
+          </a:prstGeom>
+          <a:noFill/>
+          <a:ln>
+            <a:noFill/>
+          </a:ln>
+        </p:spPr>
+      </p:pic>
+      <p:pic>
+        <p:nvPicPr>
+          <p:cNvPr id="391" name="Google Shape;391;g3ba4c4b9c29_0_27"/>
+          <p:cNvPicPr preferRelativeResize="0"/>
+          <p:nvPr/>
+        </p:nvPicPr>
+        <p:blipFill>
+          <a:blip r:embed="rId14">
+            <a:alphaModFix/>
+          </a:blip>
+          <a:stretch>
+            <a:fillRect/>
+          </a:stretch>
+        </p:blipFill>
+        <p:spPr>
+          <a:xfrm>
+            <a:off x="1800800" y="2160849"/>
+            <a:ext cx="2576971" cy="3437650"/>
+          </a:xfrm>
+          <a:prstGeom prst="rect">
+            <a:avLst/>
+          </a:prstGeom>
+          <a:noFill/>
+          <a:ln>
+            <a:noFill/>
+          </a:ln>
+        </p:spPr>
+      </p:pic>
+      <p:pic>
+        <p:nvPicPr>
+          <p:cNvPr id="392" name="Google Shape;392;g3ba4c4b9c29_0_27"/>
+          <p:cNvPicPr preferRelativeResize="0"/>
+          <p:nvPr/>
+        </p:nvPicPr>
+        <p:blipFill>
+          <a:blip r:embed="rId15">
+            <a:alphaModFix/>
+          </a:blip>
+          <a:stretch>
+            <a:fillRect/>
+          </a:stretch>
+        </p:blipFill>
+        <p:spPr>
+          <a:xfrm>
+            <a:off x="3705500" y="6154000"/>
+            <a:ext cx="2213850" cy="2906625"/>
           </a:xfrm>
           <a:prstGeom prst="rect">
             <a:avLst/>
@@ -41753,7 +41749,7 @@
   <p:cSld>
     <p:spTree>
       <p:nvGrpSpPr>
-        <p:cNvPr id="394" name="Shape 394"/>
+        <p:cNvPr id="396" name="Shape 396"/>
         <p:cNvGrpSpPr/>
         <p:nvPr/>
       </p:nvGrpSpPr>
@@ -41767,7 +41763,7 @@
       </p:grpSpPr>
       <p:sp>
         <p:nvSpPr>
-          <p:cNvPr id="395" name="Google Shape;395;g3ba4c4b9c29_0_77"/>
+          <p:cNvPr id="397" name="Google Shape;397;g3ba4c4b9c29_0_77"/>
           <p:cNvSpPr/>
           <p:nvPr/>
         </p:nvSpPr>
@@ -41851,7 +41847,7 @@
       </p:sp>
       <p:sp>
         <p:nvSpPr>
-          <p:cNvPr id="396" name="Google Shape;396;g3ba4c4b9c29_0_77"/>
+          <p:cNvPr id="398" name="Google Shape;398;g3ba4c4b9c29_0_77"/>
           <p:cNvSpPr/>
           <p:nvPr/>
         </p:nvSpPr>
@@ -41886,174 +41882,6 @@
           <a:blipFill rotWithShape="1">
             <a:blip r:embed="rId4">
               <a:alphaModFix/>
-            </a:blip>
-            <a:stretch>
-              <a:fillRect b="0" l="0" r="0" t="0"/>
-            </a:stretch>
-          </a:blipFill>
-          <a:ln>
-            <a:noFill/>
-          </a:ln>
-        </p:spPr>
-        <p:txBody>
-          <a:bodyPr anchorCtr="0" anchor="t" bIns="45700" lIns="91425" spcFirstLastPara="1" rIns="91425" wrap="square" tIns="45700">
-            <a:noAutofit/>
-          </a:bodyPr>
-          <a:lstStyle/>
-          <a:p>
-            <a:pPr indent="0" lvl="0" marL="0" marR="0" rtl="0" algn="l">
-              <a:lnSpc>
-                <a:spcPct val="100000"/>
-              </a:lnSpc>
-              <a:spcBef>
-                <a:spcPts val="0"/>
-              </a:spcBef>
-              <a:spcAft>
-                <a:spcPts val="0"/>
-              </a:spcAft>
-              <a:buClr>
-                <a:srgbClr val="000000"/>
-              </a:buClr>
-              <a:buSzPts val="1800"/>
-              <a:buFont typeface="Arial"/>
-              <a:buNone/>
-            </a:pPr>
-            <a:r>
-              <a:t/>
-            </a:r>
-            <a:endParaRPr b="0" i="0" sz="1800" u="none" cap="none" strike="noStrike">
-              <a:solidFill>
-                <a:schemeClr val="dk1"/>
-              </a:solidFill>
-              <a:latin typeface="Calibri"/>
-              <a:ea typeface="Calibri"/>
-              <a:cs typeface="Calibri"/>
-              <a:sym typeface="Calibri"/>
-            </a:endParaRPr>
-          </a:p>
-        </p:txBody>
-      </p:sp>
-      <p:sp>
-        <p:nvSpPr>
-          <p:cNvPr id="397" name="Google Shape;397;g3ba4c4b9c29_0_77"/>
-          <p:cNvSpPr/>
-          <p:nvPr/>
-        </p:nvSpPr>
-        <p:spPr>
-          <a:xfrm>
-            <a:off x="8947598" y="1931176"/>
-            <a:ext cx="659624" cy="659624"/>
-          </a:xfrm>
-          <a:custGeom>
-            <a:rect b="b" l="l" r="r" t="t"/>
-            <a:pathLst>
-              <a:path extrusionOk="0" h="659624" w="659624">
-                <a:moveTo>
-                  <a:pt x="0" y="0"/>
-                </a:moveTo>
-                <a:lnTo>
-                  <a:pt x="659624" y="0"/>
-                </a:lnTo>
-                <a:lnTo>
-                  <a:pt x="659624" y="659624"/>
-                </a:lnTo>
-                <a:lnTo>
-                  <a:pt x="0" y="659624"/>
-                </a:lnTo>
-                <a:lnTo>
-                  <a:pt x="0" y="0"/>
-                </a:lnTo>
-                <a:close/>
-              </a:path>
-            </a:pathLst>
-          </a:custGeom>
-          <a:blipFill rotWithShape="1">
-            <a:blip r:embed="rId5">
-              <a:alphaModFix amt="60000"/>
-            </a:blip>
-            <a:stretch>
-              <a:fillRect b="0" l="0" r="0" t="0"/>
-            </a:stretch>
-          </a:blipFill>
-          <a:ln>
-            <a:noFill/>
-          </a:ln>
-        </p:spPr>
-        <p:txBody>
-          <a:bodyPr anchorCtr="0" anchor="t" bIns="45700" lIns="91425" spcFirstLastPara="1" rIns="91425" wrap="square" tIns="45700">
-            <a:noAutofit/>
-          </a:bodyPr>
-          <a:lstStyle/>
-          <a:p>
-            <a:pPr indent="0" lvl="0" marL="0" marR="0" rtl="0" algn="l">
-              <a:lnSpc>
-                <a:spcPct val="100000"/>
-              </a:lnSpc>
-              <a:spcBef>
-                <a:spcPts val="0"/>
-              </a:spcBef>
-              <a:spcAft>
-                <a:spcPts val="0"/>
-              </a:spcAft>
-              <a:buClr>
-                <a:srgbClr val="000000"/>
-              </a:buClr>
-              <a:buSzPts val="1800"/>
-              <a:buFont typeface="Arial"/>
-              <a:buNone/>
-            </a:pPr>
-            <a:r>
-              <a:t/>
-            </a:r>
-            <a:endParaRPr b="0" i="0" sz="1800" u="none" cap="none" strike="noStrike">
-              <a:solidFill>
-                <a:schemeClr val="dk1"/>
-              </a:solidFill>
-              <a:latin typeface="Calibri"/>
-              <a:ea typeface="Calibri"/>
-              <a:cs typeface="Calibri"/>
-              <a:sym typeface="Calibri"/>
-            </a:endParaRPr>
-          </a:p>
-        </p:txBody>
-      </p:sp>
-      <p:sp>
-        <p:nvSpPr>
-          <p:cNvPr id="398" name="Google Shape;398;g3ba4c4b9c29_0_77"/>
-          <p:cNvSpPr/>
-          <p:nvPr/>
-        </p:nvSpPr>
-        <p:spPr>
-          <a:xfrm>
-            <a:off x="8947598" y="3645676"/>
-            <a:ext cx="659624" cy="659624"/>
-          </a:xfrm>
-          <a:custGeom>
-            <a:rect b="b" l="l" r="r" t="t"/>
-            <a:pathLst>
-              <a:path extrusionOk="0" h="659624" w="659624">
-                <a:moveTo>
-                  <a:pt x="0" y="0"/>
-                </a:moveTo>
-                <a:lnTo>
-                  <a:pt x="659624" y="0"/>
-                </a:lnTo>
-                <a:lnTo>
-                  <a:pt x="659624" y="659624"/>
-                </a:lnTo>
-                <a:lnTo>
-                  <a:pt x="0" y="659624"/>
-                </a:lnTo>
-                <a:lnTo>
-                  <a:pt x="0" y="0"/>
-                </a:lnTo>
-                <a:close/>
-              </a:path>
-            </a:pathLst>
-          </a:custGeom>
-          <a:blipFill rotWithShape="1">
-            <a:blip r:embed="rId5">
-              <a:alphaModFix amt="60000"/>
             </a:blip>
             <a:stretch>
               <a:fillRect b="0" l="0" r="0" t="0"/>
@@ -42109,7 +41937,7 @@
         </p:nvSpPr>
         <p:spPr>
           <a:xfrm>
-            <a:off x="8947598" y="5360176"/>
+            <a:off x="8947598" y="1931176"/>
             <a:ext cx="659624" cy="659624"/>
           </a:xfrm>
           <a:custGeom>
@@ -42185,9 +42013,177 @@
           </a:p>
         </p:txBody>
       </p:sp>
+      <p:sp>
+        <p:nvSpPr>
+          <p:cNvPr id="400" name="Google Shape;400;g3ba4c4b9c29_0_77"/>
+          <p:cNvSpPr/>
+          <p:nvPr/>
+        </p:nvSpPr>
+        <p:spPr>
+          <a:xfrm>
+            <a:off x="8947598" y="3645676"/>
+            <a:ext cx="659624" cy="659624"/>
+          </a:xfrm>
+          <a:custGeom>
+            <a:rect b="b" l="l" r="r" t="t"/>
+            <a:pathLst>
+              <a:path extrusionOk="0" h="659624" w="659624">
+                <a:moveTo>
+                  <a:pt x="0" y="0"/>
+                </a:moveTo>
+                <a:lnTo>
+                  <a:pt x="659624" y="0"/>
+                </a:lnTo>
+                <a:lnTo>
+                  <a:pt x="659624" y="659624"/>
+                </a:lnTo>
+                <a:lnTo>
+                  <a:pt x="0" y="659624"/>
+                </a:lnTo>
+                <a:lnTo>
+                  <a:pt x="0" y="0"/>
+                </a:lnTo>
+                <a:close/>
+              </a:path>
+            </a:pathLst>
+          </a:custGeom>
+          <a:blipFill rotWithShape="1">
+            <a:blip r:embed="rId5">
+              <a:alphaModFix amt="60000"/>
+            </a:blip>
+            <a:stretch>
+              <a:fillRect b="0" l="0" r="0" t="0"/>
+            </a:stretch>
+          </a:blipFill>
+          <a:ln>
+            <a:noFill/>
+          </a:ln>
+        </p:spPr>
+        <p:txBody>
+          <a:bodyPr anchorCtr="0" anchor="t" bIns="45700" lIns="91425" spcFirstLastPara="1" rIns="91425" wrap="square" tIns="45700">
+            <a:noAutofit/>
+          </a:bodyPr>
+          <a:lstStyle/>
+          <a:p>
+            <a:pPr indent="0" lvl="0" marL="0" marR="0" rtl="0" algn="l">
+              <a:lnSpc>
+                <a:spcPct val="100000"/>
+              </a:lnSpc>
+              <a:spcBef>
+                <a:spcPts val="0"/>
+              </a:spcBef>
+              <a:spcAft>
+                <a:spcPts val="0"/>
+              </a:spcAft>
+              <a:buClr>
+                <a:srgbClr val="000000"/>
+              </a:buClr>
+              <a:buSzPts val="1800"/>
+              <a:buFont typeface="Arial"/>
+              <a:buNone/>
+            </a:pPr>
+            <a:r>
+              <a:t/>
+            </a:r>
+            <a:endParaRPr b="0" i="0" sz="1800" u="none" cap="none" strike="noStrike">
+              <a:solidFill>
+                <a:schemeClr val="dk1"/>
+              </a:solidFill>
+              <a:latin typeface="Calibri"/>
+              <a:ea typeface="Calibri"/>
+              <a:cs typeface="Calibri"/>
+              <a:sym typeface="Calibri"/>
+            </a:endParaRPr>
+          </a:p>
+        </p:txBody>
+      </p:sp>
+      <p:sp>
+        <p:nvSpPr>
+          <p:cNvPr id="401" name="Google Shape;401;g3ba4c4b9c29_0_77"/>
+          <p:cNvSpPr/>
+          <p:nvPr/>
+        </p:nvSpPr>
+        <p:spPr>
+          <a:xfrm>
+            <a:off x="8947598" y="5360176"/>
+            <a:ext cx="659624" cy="659624"/>
+          </a:xfrm>
+          <a:custGeom>
+            <a:rect b="b" l="l" r="r" t="t"/>
+            <a:pathLst>
+              <a:path extrusionOk="0" h="659624" w="659624">
+                <a:moveTo>
+                  <a:pt x="0" y="0"/>
+                </a:moveTo>
+                <a:lnTo>
+                  <a:pt x="659624" y="0"/>
+                </a:lnTo>
+                <a:lnTo>
+                  <a:pt x="659624" y="659624"/>
+                </a:lnTo>
+                <a:lnTo>
+                  <a:pt x="0" y="659624"/>
+                </a:lnTo>
+                <a:lnTo>
+                  <a:pt x="0" y="0"/>
+                </a:lnTo>
+                <a:close/>
+              </a:path>
+            </a:pathLst>
+          </a:custGeom>
+          <a:blipFill rotWithShape="1">
+            <a:blip r:embed="rId5">
+              <a:alphaModFix amt="60000"/>
+            </a:blip>
+            <a:stretch>
+              <a:fillRect b="0" l="0" r="0" t="0"/>
+            </a:stretch>
+          </a:blipFill>
+          <a:ln>
+            <a:noFill/>
+          </a:ln>
+        </p:spPr>
+        <p:txBody>
+          <a:bodyPr anchorCtr="0" anchor="t" bIns="45700" lIns="91425" spcFirstLastPara="1" rIns="91425" wrap="square" tIns="45700">
+            <a:noAutofit/>
+          </a:bodyPr>
+          <a:lstStyle/>
+          <a:p>
+            <a:pPr indent="0" lvl="0" marL="0" marR="0" rtl="0" algn="l">
+              <a:lnSpc>
+                <a:spcPct val="100000"/>
+              </a:lnSpc>
+              <a:spcBef>
+                <a:spcPts val="0"/>
+              </a:spcBef>
+              <a:spcAft>
+                <a:spcPts val="0"/>
+              </a:spcAft>
+              <a:buClr>
+                <a:srgbClr val="000000"/>
+              </a:buClr>
+              <a:buSzPts val="1800"/>
+              <a:buFont typeface="Arial"/>
+              <a:buNone/>
+            </a:pPr>
+            <a:r>
+              <a:t/>
+            </a:r>
+            <a:endParaRPr b="0" i="0" sz="1800" u="none" cap="none" strike="noStrike">
+              <a:solidFill>
+                <a:schemeClr val="dk1"/>
+              </a:solidFill>
+              <a:latin typeface="Calibri"/>
+              <a:ea typeface="Calibri"/>
+              <a:cs typeface="Calibri"/>
+              <a:sym typeface="Calibri"/>
+            </a:endParaRPr>
+          </a:p>
+        </p:txBody>
+      </p:sp>
       <p:grpSp>
         <p:nvGrpSpPr>
-          <p:cNvPr id="400" name="Google Shape;400;g3ba4c4b9c29_0_77"/>
+          <p:cNvPr id="402" name="Google Shape;402;g3ba4c4b9c29_0_77"/>
           <p:cNvGrpSpPr/>
           <p:nvPr/>
         </p:nvGrpSpPr>
@@ -42201,7 +42197,7 @@
         </p:grpSpPr>
         <p:sp>
           <p:nvSpPr>
-            <p:cNvPr id="401" name="Google Shape;401;g3ba4c4b9c29_0_77"/>
+            <p:cNvPr id="403" name="Google Shape;403;g3ba4c4b9c29_0_77"/>
             <p:cNvSpPr/>
             <p:nvPr/>
           </p:nvSpPr>
@@ -42294,7 +42290,7 @@
         </p:sp>
         <p:sp>
           <p:nvSpPr>
-            <p:cNvPr id="402" name="Google Shape;402;g3ba4c4b9c29_0_77"/>
+            <p:cNvPr id="404" name="Google Shape;404;g3ba4c4b9c29_0_77"/>
             <p:cNvSpPr txBox="1"/>
             <p:nvPr/>
           </p:nvSpPr>
@@ -42352,7 +42348,7 @@
       </p:grpSp>
       <p:grpSp>
         <p:nvGrpSpPr>
-          <p:cNvPr id="403" name="Google Shape;403;g3ba4c4b9c29_0_77"/>
+          <p:cNvPr id="405" name="Google Shape;405;g3ba4c4b9c29_0_77"/>
           <p:cNvGrpSpPr/>
           <p:nvPr/>
         </p:nvGrpSpPr>
@@ -42366,7 +42362,7 @@
         </p:grpSpPr>
         <p:sp>
           <p:nvSpPr>
-            <p:cNvPr id="404" name="Google Shape;404;g3ba4c4b9c29_0_77"/>
+            <p:cNvPr id="406" name="Google Shape;406;g3ba4c4b9c29_0_77"/>
             <p:cNvSpPr/>
             <p:nvPr/>
           </p:nvSpPr>
@@ -42459,7 +42455,7 @@
         </p:sp>
         <p:sp>
           <p:nvSpPr>
-            <p:cNvPr id="405" name="Google Shape;405;g3ba4c4b9c29_0_77"/>
+            <p:cNvPr id="407" name="Google Shape;407;g3ba4c4b9c29_0_77"/>
             <p:cNvSpPr txBox="1"/>
             <p:nvPr/>
           </p:nvSpPr>
@@ -42517,7 +42513,7 @@
       </p:grpSp>
       <p:grpSp>
         <p:nvGrpSpPr>
-          <p:cNvPr id="406" name="Google Shape;406;g3ba4c4b9c29_0_77"/>
+          <p:cNvPr id="408" name="Google Shape;408;g3ba4c4b9c29_0_77"/>
           <p:cNvGrpSpPr/>
           <p:nvPr/>
         </p:nvGrpSpPr>
@@ -42531,7 +42527,7 @@
         </p:grpSpPr>
         <p:sp>
           <p:nvSpPr>
-            <p:cNvPr id="407" name="Google Shape;407;g3ba4c4b9c29_0_77"/>
+            <p:cNvPr id="409" name="Google Shape;409;g3ba4c4b9c29_0_77"/>
             <p:cNvSpPr/>
             <p:nvPr/>
           </p:nvSpPr>
@@ -42624,7 +42620,7 @@
         </p:sp>
         <p:sp>
           <p:nvSpPr>
-            <p:cNvPr id="408" name="Google Shape;408;g3ba4c4b9c29_0_77"/>
+            <p:cNvPr id="410" name="Google Shape;410;g3ba4c4b9c29_0_77"/>
             <p:cNvSpPr txBox="1"/>
             <p:nvPr/>
           </p:nvSpPr>
@@ -42682,7 +42678,7 @@
       </p:grpSp>
       <p:grpSp>
         <p:nvGrpSpPr>
-          <p:cNvPr id="409" name="Google Shape;409;g3ba4c4b9c29_0_77"/>
+          <p:cNvPr id="411" name="Google Shape;411;g3ba4c4b9c29_0_77"/>
           <p:cNvGrpSpPr/>
           <p:nvPr/>
         </p:nvGrpSpPr>
@@ -42696,7 +42692,7 @@
         </p:grpSpPr>
         <p:sp>
           <p:nvSpPr>
-            <p:cNvPr id="410" name="Google Shape;410;g3ba4c4b9c29_0_77"/>
+            <p:cNvPr id="412" name="Google Shape;412;g3ba4c4b9c29_0_77"/>
             <p:cNvSpPr/>
             <p:nvPr/>
           </p:nvSpPr>
@@ -42781,7 +42777,7 @@
         </p:sp>
         <p:sp>
           <p:nvSpPr>
-            <p:cNvPr id="411" name="Google Shape;411;g3ba4c4b9c29_0_77"/>
+            <p:cNvPr id="413" name="Google Shape;413;g3ba4c4b9c29_0_77"/>
             <p:cNvSpPr txBox="1"/>
             <p:nvPr/>
           </p:nvSpPr>
@@ -42839,7 +42835,7 @@
       </p:grpSp>
       <p:grpSp>
         <p:nvGrpSpPr>
-          <p:cNvPr id="412" name="Google Shape;412;g3ba4c4b9c29_0_77"/>
+          <p:cNvPr id="414" name="Google Shape;414;g3ba4c4b9c29_0_77"/>
           <p:cNvGrpSpPr/>
           <p:nvPr/>
         </p:nvGrpSpPr>
@@ -42853,7 +42849,7 @@
         </p:grpSpPr>
         <p:sp>
           <p:nvSpPr>
-            <p:cNvPr id="413" name="Google Shape;413;g3ba4c4b9c29_0_77"/>
+            <p:cNvPr id="415" name="Google Shape;415;g3ba4c4b9c29_0_77"/>
             <p:cNvSpPr/>
             <p:nvPr/>
           </p:nvSpPr>
@@ -42944,7 +42940,7 @@
         </p:sp>
         <p:sp>
           <p:nvSpPr>
-            <p:cNvPr id="414" name="Google Shape;414;g3ba4c4b9c29_0_77"/>
+            <p:cNvPr id="416" name="Google Shape;416;g3ba4c4b9c29_0_77"/>
             <p:cNvSpPr txBox="1"/>
             <p:nvPr/>
           </p:nvSpPr>
@@ -43002,7 +42998,7 @@
       </p:grpSp>
       <p:grpSp>
         <p:nvGrpSpPr>
-          <p:cNvPr id="415" name="Google Shape;415;g3ba4c4b9c29_0_77"/>
+          <p:cNvPr id="417" name="Google Shape;417;g3ba4c4b9c29_0_77"/>
           <p:cNvGrpSpPr/>
           <p:nvPr/>
         </p:nvGrpSpPr>
@@ -43016,7 +43012,7 @@
         </p:grpSpPr>
         <p:sp>
           <p:nvSpPr>
-            <p:cNvPr id="416" name="Google Shape;416;g3ba4c4b9c29_0_77"/>
+            <p:cNvPr id="418" name="Google Shape;418;g3ba4c4b9c29_0_77"/>
             <p:cNvSpPr/>
             <p:nvPr/>
           </p:nvSpPr>
@@ -43101,7 +43097,7 @@
         </p:sp>
         <p:sp>
           <p:nvSpPr>
-            <p:cNvPr id="417" name="Google Shape;417;g3ba4c4b9c29_0_77"/>
+            <p:cNvPr id="419" name="Google Shape;419;g3ba4c4b9c29_0_77"/>
             <p:cNvSpPr txBox="1"/>
             <p:nvPr/>
           </p:nvSpPr>
@@ -43159,7 +43155,7 @@
       </p:grpSp>
       <p:grpSp>
         <p:nvGrpSpPr>
-          <p:cNvPr id="418" name="Google Shape;418;g3ba4c4b9c29_0_77"/>
+          <p:cNvPr id="420" name="Google Shape;420;g3ba4c4b9c29_0_77"/>
           <p:cNvGrpSpPr/>
           <p:nvPr/>
         </p:nvGrpSpPr>
@@ -43173,7 +43169,7 @@
         </p:grpSpPr>
         <p:sp>
           <p:nvSpPr>
-            <p:cNvPr id="419" name="Google Shape;419;g3ba4c4b9c29_0_77"/>
+            <p:cNvPr id="421" name="Google Shape;421;g3ba4c4b9c29_0_77"/>
             <p:cNvSpPr/>
             <p:nvPr/>
           </p:nvSpPr>
@@ -43264,7 +43260,7 @@
         </p:sp>
         <p:sp>
           <p:nvSpPr>
-            <p:cNvPr id="420" name="Google Shape;420;g3ba4c4b9c29_0_77"/>
+            <p:cNvPr id="422" name="Google Shape;422;g3ba4c4b9c29_0_77"/>
             <p:cNvSpPr txBox="1"/>
             <p:nvPr/>
           </p:nvSpPr>
@@ -43322,7 +43318,7 @@
       </p:grpSp>
       <p:sp>
         <p:nvSpPr>
-          <p:cNvPr id="421" name="Google Shape;421;g3ba4c4b9c29_0_77"/>
+          <p:cNvPr id="423" name="Google Shape;423;g3ba4c4b9c29_0_77"/>
           <p:cNvSpPr/>
           <p:nvPr/>
         </p:nvSpPr>
@@ -43360,174 +43356,6 @@
             </a:blip>
             <a:stretch>
               <a:fillRect b="0" l="0" r="0" t="-23479"/>
-            </a:stretch>
-          </a:blipFill>
-          <a:ln>
-            <a:noFill/>
-          </a:ln>
-        </p:spPr>
-        <p:txBody>
-          <a:bodyPr anchorCtr="0" anchor="t" bIns="45700" lIns="91425" spcFirstLastPara="1" rIns="91425" wrap="square" tIns="45700">
-            <a:noAutofit/>
-          </a:bodyPr>
-          <a:lstStyle/>
-          <a:p>
-            <a:pPr indent="0" lvl="0" marL="0" marR="0" rtl="0" algn="l">
-              <a:lnSpc>
-                <a:spcPct val="100000"/>
-              </a:lnSpc>
-              <a:spcBef>
-                <a:spcPts val="0"/>
-              </a:spcBef>
-              <a:spcAft>
-                <a:spcPts val="0"/>
-              </a:spcAft>
-              <a:buClr>
-                <a:srgbClr val="000000"/>
-              </a:buClr>
-              <a:buSzPts val="1800"/>
-              <a:buFont typeface="Arial"/>
-              <a:buNone/>
-            </a:pPr>
-            <a:r>
-              <a:t/>
-            </a:r>
-            <a:endParaRPr b="0" i="0" sz="1800" u="none" cap="none" strike="noStrike">
-              <a:solidFill>
-                <a:schemeClr val="dk1"/>
-              </a:solidFill>
-              <a:latin typeface="Calibri"/>
-              <a:ea typeface="Calibri"/>
-              <a:cs typeface="Calibri"/>
-              <a:sym typeface="Calibri"/>
-            </a:endParaRPr>
-          </a:p>
-        </p:txBody>
-      </p:sp>
-      <p:sp>
-        <p:nvSpPr>
-          <p:cNvPr id="422" name="Google Shape;422;g3ba4c4b9c29_0_77"/>
-          <p:cNvSpPr/>
-          <p:nvPr/>
-        </p:nvSpPr>
-        <p:spPr>
-          <a:xfrm>
-            <a:off x="-936887" y="178564"/>
-            <a:ext cx="1336551" cy="905513"/>
-          </a:xfrm>
-          <a:custGeom>
-            <a:rect b="b" l="l" r="r" t="t"/>
-            <a:pathLst>
-              <a:path extrusionOk="0" h="905513" w="1336551">
-                <a:moveTo>
-                  <a:pt x="0" y="0"/>
-                </a:moveTo>
-                <a:lnTo>
-                  <a:pt x="1336551" y="0"/>
-                </a:lnTo>
-                <a:lnTo>
-                  <a:pt x="1336551" y="905514"/>
-                </a:lnTo>
-                <a:lnTo>
-                  <a:pt x="0" y="905514"/>
-                </a:lnTo>
-                <a:lnTo>
-                  <a:pt x="0" y="0"/>
-                </a:lnTo>
-                <a:close/>
-              </a:path>
-            </a:pathLst>
-          </a:custGeom>
-          <a:blipFill rotWithShape="1">
-            <a:blip r:embed="rId7">
-              <a:alphaModFix/>
-            </a:blip>
-            <a:stretch>
-              <a:fillRect b="0" l="0" r="0" t="0"/>
-            </a:stretch>
-          </a:blipFill>
-          <a:ln>
-            <a:noFill/>
-          </a:ln>
-        </p:spPr>
-        <p:txBody>
-          <a:bodyPr anchorCtr="0" anchor="t" bIns="45700" lIns="91425" spcFirstLastPara="1" rIns="91425" wrap="square" tIns="45700">
-            <a:noAutofit/>
-          </a:bodyPr>
-          <a:lstStyle/>
-          <a:p>
-            <a:pPr indent="0" lvl="0" marL="0" marR="0" rtl="0" algn="l">
-              <a:lnSpc>
-                <a:spcPct val="100000"/>
-              </a:lnSpc>
-              <a:spcBef>
-                <a:spcPts val="0"/>
-              </a:spcBef>
-              <a:spcAft>
-                <a:spcPts val="0"/>
-              </a:spcAft>
-              <a:buClr>
-                <a:srgbClr val="000000"/>
-              </a:buClr>
-              <a:buSzPts val="1800"/>
-              <a:buFont typeface="Arial"/>
-              <a:buNone/>
-            </a:pPr>
-            <a:r>
-              <a:t/>
-            </a:r>
-            <a:endParaRPr b="0" i="0" sz="1800" u="none" cap="none" strike="noStrike">
-              <a:solidFill>
-                <a:schemeClr val="dk1"/>
-              </a:solidFill>
-              <a:latin typeface="Calibri"/>
-              <a:ea typeface="Calibri"/>
-              <a:cs typeface="Calibri"/>
-              <a:sym typeface="Calibri"/>
-            </a:endParaRPr>
-          </a:p>
-        </p:txBody>
-      </p:sp>
-      <p:sp>
-        <p:nvSpPr>
-          <p:cNvPr id="423" name="Google Shape;423;g3ba4c4b9c29_0_77"/>
-          <p:cNvSpPr/>
-          <p:nvPr/>
-        </p:nvSpPr>
-        <p:spPr>
-          <a:xfrm>
-            <a:off x="17083802" y="-1709864"/>
-            <a:ext cx="3098800" cy="2738564"/>
-          </a:xfrm>
-          <a:custGeom>
-            <a:rect b="b" l="l" r="r" t="t"/>
-            <a:pathLst>
-              <a:path extrusionOk="0" h="2738564" w="3098800">
-                <a:moveTo>
-                  <a:pt x="0" y="0"/>
-                </a:moveTo>
-                <a:lnTo>
-                  <a:pt x="3098800" y="0"/>
-                </a:lnTo>
-                <a:lnTo>
-                  <a:pt x="3098800" y="2738564"/>
-                </a:lnTo>
-                <a:lnTo>
-                  <a:pt x="0" y="2738564"/>
-                </a:lnTo>
-                <a:lnTo>
-                  <a:pt x="0" y="0"/>
-                </a:lnTo>
-                <a:close/>
-              </a:path>
-            </a:pathLst>
-          </a:custGeom>
-          <a:blipFill rotWithShape="1">
-            <a:blip r:embed="rId8">
-              <a:alphaModFix/>
-            </a:blip>
-            <a:stretch>
-              <a:fillRect b="0" l="0" r="0" t="0"/>
             </a:stretch>
           </a:blipFill>
           <a:ln>
@@ -43580,24 +43408,24 @@
         </p:nvSpPr>
         <p:spPr>
           <a:xfrm>
-            <a:off x="17942798" y="-3419992"/>
-            <a:ext cx="1992249" cy="4114800"/>
+            <a:off x="-936887" y="178564"/>
+            <a:ext cx="1336551" cy="905513"/>
           </a:xfrm>
           <a:custGeom>
             <a:rect b="b" l="l" r="r" t="t"/>
             <a:pathLst>
-              <a:path extrusionOk="0" h="4114800" w="1992249">
+              <a:path extrusionOk="0" h="905513" w="1336551">
                 <a:moveTo>
                   <a:pt x="0" y="0"/>
                 </a:moveTo>
                 <a:lnTo>
-                  <a:pt x="1992249" y="0"/>
-                </a:lnTo>
-                <a:lnTo>
-                  <a:pt x="1992249" y="4114800"/>
-                </a:lnTo>
-                <a:lnTo>
-                  <a:pt x="0" y="4114800"/>
+                  <a:pt x="1336551" y="0"/>
+                </a:lnTo>
+                <a:lnTo>
+                  <a:pt x="1336551" y="905514"/>
+                </a:lnTo>
+                <a:lnTo>
+                  <a:pt x="0" y="905514"/>
                 </a:lnTo>
                 <a:lnTo>
                   <a:pt x="0" y="0"/>
@@ -43607,7 +43435,7 @@
             </a:pathLst>
           </a:custGeom>
           <a:blipFill rotWithShape="1">
-            <a:blip r:embed="rId9">
+            <a:blip r:embed="rId7">
               <a:alphaModFix/>
             </a:blip>
             <a:stretch>
@@ -43664,24 +43492,24 @@
         </p:nvSpPr>
         <p:spPr>
           <a:xfrm>
-            <a:off x="10145339" y="10018463"/>
-            <a:ext cx="10873692" cy="1293159"/>
+            <a:off x="17083802" y="-1709864"/>
+            <a:ext cx="3098800" cy="2738564"/>
           </a:xfrm>
           <a:custGeom>
             <a:rect b="b" l="l" r="r" t="t"/>
             <a:pathLst>
-              <a:path extrusionOk="0" h="1293159" w="10873692">
+              <a:path extrusionOk="0" h="2738564" w="3098800">
                 <a:moveTo>
                   <a:pt x="0" y="0"/>
                 </a:moveTo>
                 <a:lnTo>
-                  <a:pt x="10873692" y="0"/>
-                </a:lnTo>
-                <a:lnTo>
-                  <a:pt x="10873692" y="1293159"/>
-                </a:lnTo>
-                <a:lnTo>
-                  <a:pt x="0" y="1293159"/>
+                  <a:pt x="3098800" y="0"/>
+                </a:lnTo>
+                <a:lnTo>
+                  <a:pt x="3098800" y="2738564"/>
+                </a:lnTo>
+                <a:lnTo>
+                  <a:pt x="0" y="2738564"/>
                 </a:lnTo>
                 <a:lnTo>
                   <a:pt x="0" y="0"/>
@@ -43691,11 +43519,11 @@
             </a:pathLst>
           </a:custGeom>
           <a:blipFill rotWithShape="1">
-            <a:blip r:embed="rId10">
+            <a:blip r:embed="rId8">
               <a:alphaModFix/>
             </a:blip>
             <a:stretch>
-              <a:fillRect b="0" l="0" r="0" t="-561069"/>
+              <a:fillRect b="0" l="0" r="0" t="0"/>
             </a:stretch>
           </a:blipFill>
           <a:ln>
@@ -43747,35 +43575,35 @@
           <p:nvPr/>
         </p:nvSpPr>
         <p:spPr>
-          <a:xfrm flipH="1">
-            <a:off x="17043400" y="8777238"/>
-            <a:ext cx="1752990" cy="1509762"/>
+          <a:xfrm>
+            <a:off x="17942798" y="-3419992"/>
+            <a:ext cx="1992249" cy="4114800"/>
           </a:xfrm>
           <a:custGeom>
             <a:rect b="b" l="l" r="r" t="t"/>
             <a:pathLst>
-              <a:path extrusionOk="0" h="1509762" w="1752990">
+              <a:path extrusionOk="0" h="4114800" w="1992249">
                 <a:moveTo>
-                  <a:pt x="1752990" y="0"/>
+                  <a:pt x="0" y="0"/>
                 </a:moveTo>
                 <a:lnTo>
+                  <a:pt x="1992249" y="0"/>
+                </a:lnTo>
+                <a:lnTo>
+                  <a:pt x="1992249" y="4114800"/>
+                </a:lnTo>
+                <a:lnTo>
+                  <a:pt x="0" y="4114800"/>
+                </a:lnTo>
+                <a:lnTo>
                   <a:pt x="0" y="0"/>
-                </a:lnTo>
-                <a:lnTo>
-                  <a:pt x="0" y="1509762"/>
-                </a:lnTo>
-                <a:lnTo>
-                  <a:pt x="1752990" y="1509762"/>
-                </a:lnTo>
-                <a:lnTo>
-                  <a:pt x="1752990" y="0"/>
                 </a:lnTo>
                 <a:close/>
               </a:path>
             </a:pathLst>
           </a:custGeom>
           <a:blipFill rotWithShape="1">
-            <a:blip r:embed="rId11">
+            <a:blip r:embed="rId9">
               <a:alphaModFix/>
             </a:blip>
             <a:stretch>
@@ -43832,6 +43660,174 @@
         </p:nvSpPr>
         <p:spPr>
           <a:xfrm>
+            <a:off x="10145339" y="10018463"/>
+            <a:ext cx="10873692" cy="1293159"/>
+          </a:xfrm>
+          <a:custGeom>
+            <a:rect b="b" l="l" r="r" t="t"/>
+            <a:pathLst>
+              <a:path extrusionOk="0" h="1293159" w="10873692">
+                <a:moveTo>
+                  <a:pt x="0" y="0"/>
+                </a:moveTo>
+                <a:lnTo>
+                  <a:pt x="10873692" y="0"/>
+                </a:lnTo>
+                <a:lnTo>
+                  <a:pt x="10873692" y="1293159"/>
+                </a:lnTo>
+                <a:lnTo>
+                  <a:pt x="0" y="1293159"/>
+                </a:lnTo>
+                <a:lnTo>
+                  <a:pt x="0" y="0"/>
+                </a:lnTo>
+                <a:close/>
+              </a:path>
+            </a:pathLst>
+          </a:custGeom>
+          <a:blipFill rotWithShape="1">
+            <a:blip r:embed="rId10">
+              <a:alphaModFix/>
+            </a:blip>
+            <a:stretch>
+              <a:fillRect b="0" l="0" r="0" t="-561069"/>
+            </a:stretch>
+          </a:blipFill>
+          <a:ln>
+            <a:noFill/>
+          </a:ln>
+        </p:spPr>
+        <p:txBody>
+          <a:bodyPr anchorCtr="0" anchor="t" bIns="45700" lIns="91425" spcFirstLastPara="1" rIns="91425" wrap="square" tIns="45700">
+            <a:noAutofit/>
+          </a:bodyPr>
+          <a:lstStyle/>
+          <a:p>
+            <a:pPr indent="0" lvl="0" marL="0" marR="0" rtl="0" algn="l">
+              <a:lnSpc>
+                <a:spcPct val="100000"/>
+              </a:lnSpc>
+              <a:spcBef>
+                <a:spcPts val="0"/>
+              </a:spcBef>
+              <a:spcAft>
+                <a:spcPts val="0"/>
+              </a:spcAft>
+              <a:buClr>
+                <a:srgbClr val="000000"/>
+              </a:buClr>
+              <a:buSzPts val="1800"/>
+              <a:buFont typeface="Arial"/>
+              <a:buNone/>
+            </a:pPr>
+            <a:r>
+              <a:t/>
+            </a:r>
+            <a:endParaRPr b="0" i="0" sz="1800" u="none" cap="none" strike="noStrike">
+              <a:solidFill>
+                <a:schemeClr val="dk1"/>
+              </a:solidFill>
+              <a:latin typeface="Calibri"/>
+              <a:ea typeface="Calibri"/>
+              <a:cs typeface="Calibri"/>
+              <a:sym typeface="Calibri"/>
+            </a:endParaRPr>
+          </a:p>
+        </p:txBody>
+      </p:sp>
+      <p:sp>
+        <p:nvSpPr>
+          <p:cNvPr id="428" name="Google Shape;428;g3ba4c4b9c29_0_77"/>
+          <p:cNvSpPr/>
+          <p:nvPr/>
+        </p:nvSpPr>
+        <p:spPr>
+          <a:xfrm flipH="1">
+            <a:off x="17043400" y="8777238"/>
+            <a:ext cx="1752990" cy="1509762"/>
+          </a:xfrm>
+          <a:custGeom>
+            <a:rect b="b" l="l" r="r" t="t"/>
+            <a:pathLst>
+              <a:path extrusionOk="0" h="1509762" w="1752990">
+                <a:moveTo>
+                  <a:pt x="1752990" y="0"/>
+                </a:moveTo>
+                <a:lnTo>
+                  <a:pt x="0" y="0"/>
+                </a:lnTo>
+                <a:lnTo>
+                  <a:pt x="0" y="1509762"/>
+                </a:lnTo>
+                <a:lnTo>
+                  <a:pt x="1752990" y="1509762"/>
+                </a:lnTo>
+                <a:lnTo>
+                  <a:pt x="1752990" y="0"/>
+                </a:lnTo>
+                <a:close/>
+              </a:path>
+            </a:pathLst>
+          </a:custGeom>
+          <a:blipFill rotWithShape="1">
+            <a:blip r:embed="rId11">
+              <a:alphaModFix/>
+            </a:blip>
+            <a:stretch>
+              <a:fillRect b="0" l="0" r="0" t="0"/>
+            </a:stretch>
+          </a:blipFill>
+          <a:ln>
+            <a:noFill/>
+          </a:ln>
+        </p:spPr>
+        <p:txBody>
+          <a:bodyPr anchorCtr="0" anchor="t" bIns="45700" lIns="91425" spcFirstLastPara="1" rIns="91425" wrap="square" tIns="45700">
+            <a:noAutofit/>
+          </a:bodyPr>
+          <a:lstStyle/>
+          <a:p>
+            <a:pPr indent="0" lvl="0" marL="0" marR="0" rtl="0" algn="l">
+              <a:lnSpc>
+                <a:spcPct val="100000"/>
+              </a:lnSpc>
+              <a:spcBef>
+                <a:spcPts val="0"/>
+              </a:spcBef>
+              <a:spcAft>
+                <a:spcPts val="0"/>
+              </a:spcAft>
+              <a:buClr>
+                <a:srgbClr val="000000"/>
+              </a:buClr>
+              <a:buSzPts val="1800"/>
+              <a:buFont typeface="Arial"/>
+              <a:buNone/>
+            </a:pPr>
+            <a:r>
+              <a:t/>
+            </a:r>
+            <a:endParaRPr b="0" i="0" sz="1800" u="none" cap="none" strike="noStrike">
+              <a:solidFill>
+                <a:schemeClr val="dk1"/>
+              </a:solidFill>
+              <a:latin typeface="Calibri"/>
+              <a:ea typeface="Calibri"/>
+              <a:cs typeface="Calibri"/>
+              <a:sym typeface="Calibri"/>
+            </a:endParaRPr>
+          </a:p>
+        </p:txBody>
+      </p:sp>
+      <p:sp>
+        <p:nvSpPr>
+          <p:cNvPr id="429" name="Google Shape;429;g3ba4c4b9c29_0_77"/>
+          <p:cNvSpPr/>
+          <p:nvPr/>
+        </p:nvSpPr>
+        <p:spPr>
+          <a:xfrm>
             <a:off x="1665305" y="3891152"/>
             <a:ext cx="4122295" cy="4114800"/>
           </a:xfrm>
@@ -43910,7 +43906,7 @@
       </p:sp>
       <p:sp>
         <p:nvSpPr>
-          <p:cNvPr id="428" name="Google Shape;428;g3ba4c4b9c29_0_77"/>
+          <p:cNvPr id="430" name="Google Shape;430;g3ba4c4b9c29_0_77"/>
           <p:cNvSpPr txBox="1"/>
           <p:nvPr/>
         </p:nvSpPr>
@@ -43988,7 +43984,7 @@
       </p:sp>
       <p:sp>
         <p:nvSpPr>
-          <p:cNvPr id="429" name="Google Shape;429;g3ba4c4b9c29_0_77"/>
+          <p:cNvPr id="431" name="Google Shape;431;g3ba4c4b9c29_0_77"/>
           <p:cNvSpPr txBox="1"/>
           <p:nvPr/>
         </p:nvSpPr>
@@ -44046,7 +44042,7 @@
       </p:sp>
       <p:sp>
         <p:nvSpPr>
-          <p:cNvPr id="430" name="Google Shape;430;g3ba4c4b9c29_0_77"/>
+          <p:cNvPr id="432" name="Google Shape;432;g3ba4c4b9c29_0_77"/>
           <p:cNvSpPr txBox="1"/>
           <p:nvPr/>
         </p:nvSpPr>
@@ -44104,7 +44100,7 @@
       </p:sp>
       <p:sp>
         <p:nvSpPr>
-          <p:cNvPr id="431" name="Google Shape;431;g3ba4c4b9c29_0_77"/>
+          <p:cNvPr id="433" name="Google Shape;433;g3ba4c4b9c29_0_77"/>
           <p:cNvSpPr txBox="1"/>
           <p:nvPr/>
         </p:nvSpPr>
@@ -44182,7 +44178,7 @@
       </p:sp>
       <p:sp>
         <p:nvSpPr>
-          <p:cNvPr id="432" name="Google Shape;432;g3ba4c4b9c29_0_77"/>
+          <p:cNvPr id="434" name="Google Shape;434;g3ba4c4b9c29_0_77"/>
           <p:cNvSpPr txBox="1"/>
           <p:nvPr/>
         </p:nvSpPr>
@@ -44248,7 +44244,7 @@
       </p:sp>
       <p:sp>
         <p:nvSpPr>
-          <p:cNvPr id="433" name="Google Shape;433;g3ba4c4b9c29_0_77"/>
+          <p:cNvPr id="435" name="Google Shape;435;g3ba4c4b9c29_0_77"/>
           <p:cNvSpPr txBox="1"/>
           <p:nvPr/>
         </p:nvSpPr>
@@ -44306,7 +44302,7 @@
       </p:sp>
       <p:sp>
         <p:nvSpPr>
-          <p:cNvPr id="434" name="Google Shape;434;g3ba4c4b9c29_0_77"/>
+          <p:cNvPr id="436" name="Google Shape;436;g3ba4c4b9c29_0_77"/>
           <p:cNvSpPr txBox="1"/>
           <p:nvPr/>
         </p:nvSpPr>
